--- a/cascaded-voice-ai.pptx
+++ b/cascaded-voice-ai.pptx
@@ -10,9 +10,10 @@
     <p:sldId id="258" r:id="rId4"/>
     <p:sldId id="259" r:id="rId5"/>
     <p:sldId id="260" r:id="rId6"/>
+    <p:sldId id="261" r:id="rId7"/>
   </p:sldIdLst>
   <p:notesMasterIdLst>
-    <p:notesMasterId r:id="rId7"/>
+    <p:notesMasterId r:id="rId8"/>
   </p:notesMasterIdLst>
   <p:sldSz cx="9144000" cy="5143500"/>
   <p:notesSz cx="5143500" cy="9144000"/>
@@ -506,7 +507,7 @@
           <a:p>
             <a:r>
               <a:rPr lang="en-US" dirty="0"/>
-              <a:t>The cascaded architecture chains three specialist models. Whisper transcribes the user's speech, Llama 3 reasons over the transcript and produces a text reply, and VoxCPM synthesises that reply back into speech. Because the hand-off between stages is plain text, each component can be optimised or replaced independently.</a:t>
+              <a:t>The cascaded architecture chains three specialist models. Speech-to-text (Whisper, or open alternatives such as NVIDIA Parakeet and Moonshine) transcribes the user; a text LLM (Llama 3, Qwen3, Gemma 3) reasons and replies; text-to-speech (VoxCPM, Kokoro, Chatterbox) speaks the answer. Because the hand-off between stages is plain text, each component can be optimised or replaced independently.</a:t>
             </a:r>
             <a:endParaRPr lang="en-US" dirty="0"/>
           </a:p>
@@ -594,7 +595,7 @@
           <a:p>
             <a:r>
               <a:rPr lang="en-US" dirty="0"/>
-              <a:t>The core advantage is that text sits between every stage. That unlocks mature text-LLM reasoning and RAG, independent component swaps, simple text-level moderation, and a complete transcript for debugging.</a:t>
+              <a:t>The models are only half the system. WebRTC is the default transport for low-latency browser and mobile audio (UDP, Opus, jitter buffering, echo cancellation); WebSockets suit server-to-server links and SIP connects phone calls. VAD such as Silero classifies short frames as speech or silence and triggers barge-in. Turn-detection models (LiveKit's turn detector, Pipecat Smart Turn, TEN Turn Detection) judge whether the user is actually done, avoiding cut-offs from fixed silence timers. Frameworks like Pipecat, LiveKit Agents and TEN Framework wire it all together and manage interruptions and context.</a:t>
             </a:r>
             <a:endParaRPr lang="en-US" dirty="0"/>
           </a:p>
@@ -682,7 +683,7 @@
           <a:p>
             <a:r>
               <a:rPr lang="en-US" dirty="0"/>
-              <a:t>Converting speech to text discards tone and emotion. Latency is additive across VAD, STT, LLM and TTS — the budget shown is illustrative, not measured. Handling interruptions requires an external VAD and a careful cancellation state machine.</a:t>
+              <a:t>The core advantage is that text sits between every stage. That unlocks mature text-LLM reasoning and RAG, independent component swaps, simple text-level moderation, and a complete transcript for debugging.</a:t>
             </a:r>
             <a:endParaRPr lang="en-US" dirty="0"/>
           </a:p>
@@ -770,7 +771,7 @@
           <a:p>
             <a:r>
               <a:rPr lang="en-US" dirty="0"/>
-              <a:t>Omni models process audio tokens directly, winning on latency, emotion and interruptions. Cascaded pipelines win on reasoning, RAG, guardrails, voice flexibility and cost. Latency figures are typical ranges, not benchmarks.</a:t>
+              <a:t>Converting speech to text discards tone and emotion. Latency is additive across VAD, STT, LLM and TTS — the budget shown is illustrative, not measured. Handling interruptions requires an external VAD and a careful cancellation state machine.</a:t>
             </a:r>
             <a:endParaRPr lang="en-US" dirty="0"/>
           </a:p>
@@ -858,7 +859,7 @@
           <a:p>
             <a:r>
               <a:rPr lang="en-US" dirty="0"/>
-              <a:t>Use cascaded pipelines for knowledge-heavy, regulated or brand-sensitive use cases. Use omni models where conversational feel is the product. Hybrid designs — omni front-end with text-LLM tool calls — are an emerging middle ground.</a:t>
+              <a:t>Omni models process audio tokens directly, winning on latency, emotion and interruptions. Cascaded pipelines win on reasoning, RAG, guardrails, voice flexibility and cost. Latency figures are typical ranges, not benchmarks.</a:t>
             </a:r>
             <a:endParaRPr lang="en-US" dirty="0"/>
           </a:p>
@@ -882,6 +883,94 @@
             <a:fld id="{F7021451-1387-4CA6-816F-3879F97B5CBC}" type="slidenum">
               <a:rPr lang="en-US"/>
               <a:t>5</a:t>
+            </a:fld>
+            <a:endParaRPr lang="en-US"/>
+          </a:p>
+        </p:txBody>
+      </p:sp>
+    </p:spTree>
+    <p:extLst>
+      <p:ext uri="{BB962C8B-B14F-4D97-AF65-F5344CB8AC3E}">
+        <p14:creationId xmlns:p14="http://schemas.microsoft.com/office/powerpoint/2010/main" val="1024086991"/>
+      </p:ext>
+    </p:extLst>
+  </p:cSld>
+  <p:clrMapOvr>
+    <a:masterClrMapping/>
+  </p:clrMapOvr>
+</p:notes>
+</file>
+
+<file path=ppt/notesSlides/notesSlide6.xml><?xml version="1.0" encoding="utf-8"?>
+<p:notes xmlns:a="http://schemas.openxmlformats.org/drawingml/2006/main" xmlns:r="http://schemas.openxmlformats.org/officeDocument/2006/relationships" xmlns:p="http://schemas.openxmlformats.org/presentationml/2006/main">
+  <p:cSld>
+    <p:spTree>
+      <p:nvGrpSpPr>
+        <p:cNvPr id="1" name=""/>
+        <p:cNvGrpSpPr/>
+        <p:nvPr/>
+      </p:nvGrpSpPr>
+      <p:grpSpPr>
+        <a:xfrm>
+          <a:off x="0" y="0"/>
+          <a:ext cx="0" cy="0"/>
+          <a:chOff x="0" y="0"/>
+          <a:chExt cx="0" cy="0"/>
+        </a:xfrm>
+      </p:grpSpPr>
+      <p:sp>
+        <p:nvSpPr>
+          <p:cNvPr id="2" name="Slide Image Placeholder 1"/>
+          <p:cNvSpPr>
+            <a:spLocks noGrp="1" noRot="1" noChangeAspect="1"/>
+          </p:cNvSpPr>
+          <p:nvPr>
+            <p:ph type="sldImg"/>
+          </p:nvPr>
+        </p:nvSpPr>
+        <p:spPr/>
+      </p:sp>
+      <p:sp>
+        <p:nvSpPr>
+          <p:cNvPr id="3" name="Notes Placeholder 2"/>
+          <p:cNvSpPr>
+            <a:spLocks noGrp="1"/>
+          </p:cNvSpPr>
+          <p:nvPr>
+            <p:ph type="body" idx="1"/>
+          </p:nvPr>
+        </p:nvSpPr>
+        <p:spPr/>
+        <p:txBody>
+          <a:bodyPr/>
+          <a:lstStyle/>
+          <a:p>
+            <a:r>
+              <a:rPr lang="en-US" dirty="0"/>
+              <a:t>Use cascaded pipelines for knowledge-heavy, regulated or brand-sensitive use cases; use omni models where conversational feel is the product. Open-weight speech-to-speech examples: Qwen3-Omni (Alibaba), Moshi (Kyutai, full-duplex), MiniCPM-o (OpenBMB), GLM-4-Voice (Zhipu AI). Hosted APIs: OpenAI's GPT Realtime and Google's Gemini Live native-audio models. Hybrid designs — an omni front-end that calls a text LLM for tools and RAG — are an emerging middle ground.</a:t>
+            </a:r>
+            <a:endParaRPr lang="en-US" dirty="0"/>
+          </a:p>
+        </p:txBody>
+      </p:sp>
+      <p:sp>
+        <p:nvSpPr>
+          <p:cNvPr id="4" name="Slide Number Placeholder 3"/>
+          <p:cNvSpPr>
+            <a:spLocks noGrp="1"/>
+          </p:cNvSpPr>
+          <p:nvPr>
+            <p:ph type="sldNum" sz="quarter" idx="10"/>
+          </p:nvPr>
+        </p:nvSpPr>
+        <p:spPr/>
+        <p:txBody>
+          <a:bodyPr/>
+          <a:lstStyle/>
+          <a:p>
+            <a:fld id="{F7021451-1387-4CA6-816F-3879F97B5CBC}" type="slidenum">
+              <a:rPr lang="en-US"/>
+              <a:t>6</a:t>
             </a:fld>
             <a:endParaRPr lang="en-US"/>
           </a:p>
@@ -1213,7 +1302,7 @@
     <p:bg>
       <p:bgPr>
         <a:solidFill>
-          <a:srgbClr val="24163A"/>
+          <a:srgbClr val="0E3B2E"/>
         </a:solidFill>
       </p:bgPr>
     </p:bg>
@@ -1295,7 +1384,7 @@
               <a:buNone/>
             </a:pPr>
             <a:r>
-              <a:rPr lang="en-US" sz="3800" b="1" dirty="0">
+              <a:rPr lang="en-US" sz="3600" b="1" dirty="0">
                 <a:solidFill>
                   <a:srgbClr val="FFFFFF"/>
                 </a:solidFill>
@@ -1305,7 +1394,7 @@
               </a:rPr>
               <a:t>The Cascaded Pipeline</a:t>
             </a:r>
-            <a:endParaRPr lang="en-US" sz="3800" dirty="0"/>
+            <a:endParaRPr lang="en-US" sz="3600" dirty="0"/>
           </a:p>
         </p:txBody>
       </p:sp>
@@ -1317,7 +1406,7 @@
         </p:nvSpPr>
         <p:spPr>
           <a:xfrm>
-            <a:off x="457200" y="1234440"/>
+            <a:off x="457200" y="1216152"/>
             <a:ext cx="8229600" cy="365760"/>
           </a:xfrm>
           <a:prstGeom prst="rect">
@@ -1336,7 +1425,7 @@
             <a:r>
               <a:rPr lang="en-US" sz="1500" i="1" dirty="0">
                 <a:solidFill>
-                  <a:srgbClr val="E4DDF0"/>
+                  <a:srgbClr val="CFE6D6"/>
                 </a:solidFill>
                 <a:latin typeface="Calibri" pitchFamily="34" charset="0"/>
                 <a:ea typeface="Calibri" pitchFamily="34" charset="-122"/>
@@ -1356,7 +1445,7 @@
         </p:nvSpPr>
         <p:spPr>
           <a:xfrm>
-            <a:off x="457200" y="2331720"/>
+            <a:off x="457200" y="2286000"/>
             <a:ext cx="685800" cy="868680"/>
           </a:xfrm>
           <a:prstGeom prst="roundRect">
@@ -1365,11 +1454,11 @@
             </a:avLst>
           </a:prstGeom>
           <a:solidFill>
-            <a:srgbClr val="3A2757"/>
+            <a:srgbClr val="185443"/>
           </a:solidFill>
           <a:ln w="12700">
             <a:solidFill>
-              <a:srgbClr val="5B4580"/>
+              <a:srgbClr val="2F7A60"/>
             </a:solidFill>
             <a:prstDash val="solid"/>
           </a:ln>
@@ -1391,7 +1480,7 @@
         </p:blipFill>
         <p:spPr>
           <a:xfrm>
-            <a:off x="644652" y="2459736"/>
+            <a:off x="644652" y="2414016"/>
             <a:ext cx="310896" cy="310896"/>
           </a:xfrm>
           <a:prstGeom prst="rect">
@@ -1407,7 +1496,7 @@
         </p:nvSpPr>
         <p:spPr>
           <a:xfrm>
-            <a:off x="457200" y="2834640"/>
+            <a:off x="457200" y="2788920"/>
             <a:ext cx="685800" cy="274320"/>
           </a:xfrm>
           <a:prstGeom prst="rect">
@@ -1426,7 +1515,7 @@
             <a:r>
               <a:rPr lang="en-US" sz="1200" dirty="0">
                 <a:solidFill>
-                  <a:srgbClr val="E4DDF0"/>
+                  <a:srgbClr val="CFE6D6"/>
                 </a:solidFill>
                 <a:latin typeface="Calibri" pitchFamily="34" charset="0"/>
                 <a:ea typeface="Calibri" pitchFamily="34" charset="-122"/>
@@ -1446,7 +1535,7 @@
         </p:nvSpPr>
         <p:spPr>
           <a:xfrm>
-            <a:off x="1179576" y="2766060"/>
+            <a:off x="1179576" y="2720340"/>
             <a:ext cx="201168" cy="0"/>
           </a:xfrm>
           <a:prstGeom prst="line">
@@ -1470,12 +1559,12 @@
         </p:nvSpPr>
         <p:spPr>
           <a:xfrm>
-            <a:off x="1417320" y="2148840"/>
-            <a:ext cx="1280160" cy="1234440"/>
+            <a:off x="1417320" y="1783080"/>
+            <a:ext cx="1280160" cy="1874520"/>
           </a:xfrm>
           <a:prstGeom prst="roundRect">
             <a:avLst>
-              <a:gd name="adj" fmla="val 8889"/>
+              <a:gd name="adj" fmla="val 8571"/>
             </a:avLst>
           </a:prstGeom>
           <a:solidFill>
@@ -1483,14 +1572,14 @@
           </a:solidFill>
           <a:ln w="31750">
             <a:solidFill>
-              <a:srgbClr val="2BB3A3"/>
+              <a:srgbClr val="3FA7D6"/>
             </a:solidFill>
             <a:prstDash val="solid"/>
           </a:ln>
           <a:effectLst>
             <a:outerShdw sx="100000" sy="100000" kx="0" ky="0" algn="bl" rotWithShape="0" blurRad="76200" dist="25400" dir="5400000">
               <a:srgbClr val="000000">
-                <a:alpha val="18000"/>
+                <a:alpha val="20000"/>
               </a:srgbClr>
             </a:outerShdw>
           </a:effectLst>
@@ -1504,18 +1593,18 @@
         </p:nvSpPr>
         <p:spPr>
           <a:xfrm>
-            <a:off x="1819656" y="2267712"/>
-            <a:ext cx="475488" cy="475488"/>
+            <a:off x="1828800" y="1892808"/>
+            <a:ext cx="457200" cy="457200"/>
           </a:xfrm>
           <a:prstGeom prst="ellipse">
             <a:avLst/>
           </a:prstGeom>
           <a:solidFill>
-            <a:srgbClr val="2BB3A3"/>
+            <a:srgbClr val="3FA7D6"/>
           </a:solidFill>
           <a:ln w="12700">
             <a:solidFill>
-              <a:srgbClr val="2BB3A3"/>
+              <a:srgbClr val="3FA7D6"/>
             </a:solidFill>
             <a:prstDash val="solid"/>
           </a:ln>
@@ -1537,8 +1626,8 @@
         </p:blipFill>
         <p:spPr>
           <a:xfrm>
-            <a:off x="1920240" y="2368296"/>
-            <a:ext cx="274320" cy="274320"/>
+            <a:off x="1929384" y="1993392"/>
+            <a:ext cx="256032" cy="256032"/>
           </a:xfrm>
           <a:prstGeom prst="rect">
             <a:avLst/>
@@ -1553,7 +1642,7 @@
         </p:nvSpPr>
         <p:spPr>
           <a:xfrm>
-            <a:off x="1417320" y="2788920"/>
+            <a:off x="1417320" y="2404872"/>
             <a:ext cx="1280160" cy="274320"/>
           </a:xfrm>
           <a:prstGeom prst="rect">
@@ -1572,7 +1661,7 @@
             <a:r>
               <a:rPr lang="en-US" sz="1500" b="1" dirty="0">
                 <a:solidFill>
-                  <a:srgbClr val="1E1A28"/>
+                  <a:srgbClr val="15241E"/>
                 </a:solidFill>
                 <a:latin typeface="Calibri" pitchFamily="34" charset="0"/>
                 <a:ea typeface="Calibri" pitchFamily="34" charset="-122"/>
@@ -1586,14 +1675,37 @@
       </p:sp>
       <p:sp>
         <p:nvSpPr>
-          <p:cNvPr id="13" name="Text 9"/>
+          <p:cNvPr id="13" name="Shape 9"/>
+          <p:cNvSpPr/>
+          <p:nvPr/>
+        </p:nvSpPr>
+        <p:spPr>
+          <a:xfrm>
+            <a:off x="1691640" y="2734056"/>
+            <a:ext cx="731520" cy="0"/>
+          </a:xfrm>
+          <a:prstGeom prst="line">
+            <a:avLst/>
+          </a:prstGeom>
+          <a:noFill/>
+          <a:ln w="12700">
+            <a:solidFill>
+              <a:srgbClr val="CFE6D6"/>
+            </a:solidFill>
+            <a:prstDash val="solid"/>
+          </a:ln>
+        </p:spPr>
+      </p:sp>
+      <p:sp>
+        <p:nvSpPr>
+          <p:cNvPr id="14" name="Text 10"/>
           <p:cNvSpPr txBox="1"/>
           <p:nvPr/>
         </p:nvSpPr>
         <p:spPr>
           <a:xfrm>
-            <a:off x="1417320" y="3044952"/>
-            <a:ext cx="1280160" cy="237744"/>
+            <a:off x="1417320" y="2807208"/>
+            <a:ext cx="1280160" cy="749808"/>
           </a:xfrm>
           <a:prstGeom prst="rect">
             <a:avLst/>
@@ -1602,16 +1714,19 @@
           <a:ln/>
         </p:spPr>
         <p:txBody>
-          <a:bodyPr wrap="square" lIns="0" tIns="0" rIns="0" bIns="0" rtlCol="0" anchor="ctr"/>
+          <a:bodyPr wrap="square" lIns="0" tIns="0" rIns="0" bIns="0" rtlCol="0" anchor="t"/>
           <a:lstStyle/>
           <a:p>
             <a:pPr algn="ctr" indent="0" marL="0">
-              <a:buNone/>
-            </a:pPr>
-            <a:r>
-              <a:rPr lang="en-US" sz="1200" dirty="0">
-                <a:solidFill>
-                  <a:srgbClr val="6B6480"/>
+              <a:spcAft>
+                <a:spcPts val="200"/>
+              </a:spcAft>
+              <a:buNone/>
+            </a:pPr>
+            <a:r>
+              <a:rPr lang="en-US" sz="1100" b="1" dirty="0">
+                <a:solidFill>
+                  <a:srgbClr val="15241E"/>
                 </a:solidFill>
                 <a:latin typeface="Calibri" pitchFamily="34" charset="0"/>
                 <a:ea typeface="Calibri" pitchFamily="34" charset="-122"/>
@@ -1619,19 +1734,59 @@
               </a:rPr>
               <a:t>Whisper</a:t>
             </a:r>
-            <a:endParaRPr lang="en-US" sz="1200" dirty="0"/>
-          </a:p>
-        </p:txBody>
-      </p:sp>
-      <p:sp>
-        <p:nvSpPr>
-          <p:cNvPr id="14" name="Shape 10"/>
+            <a:endParaRPr lang="en-US" sz="1100" dirty="0"/>
+          </a:p>
+          <a:p>
+            <a:pPr algn="ctr" indent="0" marL="0">
+              <a:spcAft>
+                <a:spcPts val="200"/>
+              </a:spcAft>
+              <a:buNone/>
+            </a:pPr>
+            <a:r>
+              <a:rPr lang="en-US" sz="1100" dirty="0">
+                <a:solidFill>
+                  <a:srgbClr val="4F6559"/>
+                </a:solidFill>
+                <a:latin typeface="Calibri" pitchFamily="34" charset="0"/>
+                <a:ea typeface="Calibri" pitchFamily="34" charset="-122"/>
+                <a:cs typeface="Calibri" pitchFamily="34" charset="-120"/>
+              </a:rPr>
+              <a:t>NVIDIA Parakeet</a:t>
+            </a:r>
+            <a:endParaRPr lang="en-US" sz="1100" dirty="0"/>
+          </a:p>
+          <a:p>
+            <a:pPr algn="ctr" indent="0" marL="0">
+              <a:spcAft>
+                <a:spcPts val="200"/>
+              </a:spcAft>
+              <a:buNone/>
+            </a:pPr>
+            <a:r>
+              <a:rPr lang="en-US" sz="1100" dirty="0">
+                <a:solidFill>
+                  <a:srgbClr val="4F6559"/>
+                </a:solidFill>
+                <a:latin typeface="Calibri" pitchFamily="34" charset="0"/>
+                <a:ea typeface="Calibri" pitchFamily="34" charset="-122"/>
+                <a:cs typeface="Calibri" pitchFamily="34" charset="-120"/>
+              </a:rPr>
+              <a:t>Moonshine</a:t>
+            </a:r>
+            <a:endParaRPr lang="en-US" sz="1100" dirty="0"/>
+          </a:p>
+        </p:txBody>
+      </p:sp>
+      <p:sp>
+        <p:nvSpPr>
+          <p:cNvPr id="15" name="Shape 11"/>
           <p:cNvSpPr/>
           <p:nvPr/>
         </p:nvSpPr>
         <p:spPr>
           <a:xfrm>
-            <a:off x="2734056" y="2766060"/>
+            <a:off x="2734056" y="2720340"/>
             <a:ext cx="201168" cy="0"/>
           </a:xfrm>
           <a:prstGeom prst="line">
@@ -1649,13 +1804,13 @@
       </p:sp>
       <p:sp>
         <p:nvSpPr>
-          <p:cNvPr id="15" name="Shape 11"/>
+          <p:cNvPr id="16" name="Shape 12"/>
           <p:cNvSpPr/>
           <p:nvPr/>
         </p:nvSpPr>
         <p:spPr>
           <a:xfrm>
-            <a:off x="2971800" y="2331720"/>
+            <a:off x="2971800" y="2286000"/>
             <a:ext cx="685800" cy="868680"/>
           </a:xfrm>
           <a:prstGeom prst="roundRect">
@@ -1664,11 +1819,11 @@
             </a:avLst>
           </a:prstGeom>
           <a:solidFill>
-            <a:srgbClr val="3A2757"/>
+            <a:srgbClr val="185443"/>
           </a:solidFill>
           <a:ln w="12700">
             <a:solidFill>
-              <a:srgbClr val="5B4580"/>
+              <a:srgbClr val="2F7A60"/>
             </a:solidFill>
             <a:prstDash val="solid"/>
           </a:ln>
@@ -1676,7 +1831,7 @@
       </p:sp>
       <p:pic>
         <p:nvPicPr>
-          <p:cNvPr id="16" name="Image 2" descr="preencoded.png">    </p:cNvPr>
+          <p:cNvPr id="17" name="Image 2" descr="preencoded.png">    </p:cNvPr>
           <p:cNvPicPr>
             <a:picLocks noChangeAspect="1"/>
           </p:cNvPicPr>
@@ -1690,7 +1845,7 @@
         </p:blipFill>
         <p:spPr>
           <a:xfrm>
-            <a:off x="3159252" y="2459736"/>
+            <a:off x="3159252" y="2414016"/>
             <a:ext cx="310896" cy="310896"/>
           </a:xfrm>
           <a:prstGeom prst="rect">
@@ -1700,13 +1855,13 @@
       </p:pic>
       <p:sp>
         <p:nvSpPr>
-          <p:cNvPr id="17" name="Text 12"/>
+          <p:cNvPr id="18" name="Text 13"/>
           <p:cNvSpPr txBox="1"/>
           <p:nvPr/>
         </p:nvSpPr>
         <p:spPr>
           <a:xfrm>
-            <a:off x="2971800" y="2834640"/>
+            <a:off x="2971800" y="2788920"/>
             <a:ext cx="685800" cy="274320"/>
           </a:xfrm>
           <a:prstGeom prst="rect">
@@ -1725,7 +1880,7 @@
             <a:r>
               <a:rPr lang="en-US" sz="1200" dirty="0">
                 <a:solidFill>
-                  <a:srgbClr val="E4DDF0"/>
+                  <a:srgbClr val="CFE6D6"/>
                 </a:solidFill>
                 <a:latin typeface="Calibri" pitchFamily="34" charset="0"/>
                 <a:ea typeface="Calibri" pitchFamily="34" charset="-122"/>
@@ -1739,13 +1894,13 @@
       </p:sp>
       <p:sp>
         <p:nvSpPr>
-          <p:cNvPr id="18" name="Shape 13"/>
+          <p:cNvPr id="19" name="Shape 14"/>
           <p:cNvSpPr/>
           <p:nvPr/>
         </p:nvSpPr>
         <p:spPr>
           <a:xfrm>
-            <a:off x="3694176" y="2766060"/>
+            <a:off x="3694176" y="2720340"/>
             <a:ext cx="201168" cy="0"/>
           </a:xfrm>
           <a:prstGeom prst="line">
@@ -1763,18 +1918,18 @@
       </p:sp>
       <p:sp>
         <p:nvSpPr>
-          <p:cNvPr id="19" name="Shape 14"/>
+          <p:cNvPr id="20" name="Shape 15"/>
           <p:cNvSpPr/>
           <p:nvPr/>
         </p:nvSpPr>
         <p:spPr>
           <a:xfrm>
-            <a:off x="3931920" y="2148840"/>
-            <a:ext cx="1280160" cy="1234440"/>
+            <a:off x="3931920" y="1783080"/>
+            <a:ext cx="1280160" cy="1874520"/>
           </a:xfrm>
           <a:prstGeom prst="roundRect">
             <a:avLst>
-              <a:gd name="adj" fmla="val 8889"/>
+              <a:gd name="adj" fmla="val 8571"/>
             </a:avLst>
           </a:prstGeom>
           <a:solidFill>
@@ -1789,7 +1944,7 @@
           <a:effectLst>
             <a:outerShdw sx="100000" sy="100000" kx="0" ky="0" algn="bl" rotWithShape="0" blurRad="76200" dist="25400" dir="5400000">
               <a:srgbClr val="000000">
-                <a:alpha val="18000"/>
+                <a:alpha val="20000"/>
               </a:srgbClr>
             </a:outerShdw>
           </a:effectLst>
@@ -1797,14 +1952,14 @@
       </p:sp>
       <p:sp>
         <p:nvSpPr>
-          <p:cNvPr id="20" name="Shape 15"/>
+          <p:cNvPr id="21" name="Shape 16"/>
           <p:cNvSpPr/>
           <p:nvPr/>
         </p:nvSpPr>
         <p:spPr>
           <a:xfrm>
-            <a:off x="4334256" y="2267712"/>
-            <a:ext cx="475488" cy="475488"/>
+            <a:off x="4343400" y="1892808"/>
+            <a:ext cx="457200" cy="457200"/>
           </a:xfrm>
           <a:prstGeom prst="ellipse">
             <a:avLst/>
@@ -1822,7 +1977,7 @@
       </p:sp>
       <p:pic>
         <p:nvPicPr>
-          <p:cNvPr id="21" name="Image 3" descr="preencoded.png">    </p:cNvPr>
+          <p:cNvPr id="22" name="Image 3" descr="preencoded.png">    </p:cNvPr>
           <p:cNvPicPr>
             <a:picLocks noChangeAspect="1"/>
           </p:cNvPicPr>
@@ -1836,8 +1991,8 @@
         </p:blipFill>
         <p:spPr>
           <a:xfrm>
-            <a:off x="4434840" y="2368296"/>
-            <a:ext cx="274320" cy="274320"/>
+            <a:off x="4443984" y="1993392"/>
+            <a:ext cx="256032" cy="256032"/>
           </a:xfrm>
           <a:prstGeom prst="rect">
             <a:avLst/>
@@ -1846,13 +2001,13 @@
       </p:pic>
       <p:sp>
         <p:nvSpPr>
-          <p:cNvPr id="22" name="Text 16"/>
+          <p:cNvPr id="23" name="Text 17"/>
           <p:cNvSpPr txBox="1"/>
           <p:nvPr/>
         </p:nvSpPr>
         <p:spPr>
           <a:xfrm>
-            <a:off x="3931920" y="2788920"/>
+            <a:off x="3931920" y="2404872"/>
             <a:ext cx="1280160" cy="274320"/>
           </a:xfrm>
           <a:prstGeom prst="rect">
@@ -1871,7 +2026,7 @@
             <a:r>
               <a:rPr lang="en-US" sz="1500" b="1" dirty="0">
                 <a:solidFill>
-                  <a:srgbClr val="1E1A28"/>
+                  <a:srgbClr val="15241E"/>
                 </a:solidFill>
                 <a:latin typeface="Calibri" pitchFamily="34" charset="0"/>
                 <a:ea typeface="Calibri" pitchFamily="34" charset="-122"/>
@@ -1885,14 +2040,37 @@
       </p:sp>
       <p:sp>
         <p:nvSpPr>
-          <p:cNvPr id="23" name="Text 17"/>
+          <p:cNvPr id="24" name="Shape 18"/>
+          <p:cNvSpPr/>
+          <p:nvPr/>
+        </p:nvSpPr>
+        <p:spPr>
+          <a:xfrm>
+            <a:off x="4206240" y="2734056"/>
+            <a:ext cx="731520" cy="0"/>
+          </a:xfrm>
+          <a:prstGeom prst="line">
+            <a:avLst/>
+          </a:prstGeom>
+          <a:noFill/>
+          <a:ln w="12700">
+            <a:solidFill>
+              <a:srgbClr val="CFE6D6"/>
+            </a:solidFill>
+            <a:prstDash val="solid"/>
+          </a:ln>
+        </p:spPr>
+      </p:sp>
+      <p:sp>
+        <p:nvSpPr>
+          <p:cNvPr id="25" name="Text 19"/>
           <p:cNvSpPr txBox="1"/>
           <p:nvPr/>
         </p:nvSpPr>
         <p:spPr>
           <a:xfrm>
-            <a:off x="3931920" y="3044952"/>
-            <a:ext cx="1280160" cy="237744"/>
+            <a:off x="3931920" y="2807208"/>
+            <a:ext cx="1280160" cy="749808"/>
           </a:xfrm>
           <a:prstGeom prst="rect">
             <a:avLst/>
@@ -1901,16 +2079,19 @@
           <a:ln/>
         </p:spPr>
         <p:txBody>
-          <a:bodyPr wrap="square" lIns="0" tIns="0" rIns="0" bIns="0" rtlCol="0" anchor="ctr"/>
+          <a:bodyPr wrap="square" lIns="0" tIns="0" rIns="0" bIns="0" rtlCol="0" anchor="t"/>
           <a:lstStyle/>
           <a:p>
             <a:pPr algn="ctr" indent="0" marL="0">
-              <a:buNone/>
-            </a:pPr>
-            <a:r>
-              <a:rPr lang="en-US" sz="1200" dirty="0">
-                <a:solidFill>
-                  <a:srgbClr val="6B6480"/>
+              <a:spcAft>
+                <a:spcPts val="200"/>
+              </a:spcAft>
+              <a:buNone/>
+            </a:pPr>
+            <a:r>
+              <a:rPr lang="en-US" sz="1100" b="1" dirty="0">
+                <a:solidFill>
+                  <a:srgbClr val="15241E"/>
                 </a:solidFill>
                 <a:latin typeface="Calibri" pitchFamily="34" charset="0"/>
                 <a:ea typeface="Calibri" pitchFamily="34" charset="-122"/>
@@ -1918,19 +2099,59 @@
               </a:rPr>
               <a:t>Llama 3</a:t>
             </a:r>
-            <a:endParaRPr lang="en-US" sz="1200" dirty="0"/>
-          </a:p>
-        </p:txBody>
-      </p:sp>
-      <p:sp>
-        <p:nvSpPr>
-          <p:cNvPr id="24" name="Shape 18"/>
+            <a:endParaRPr lang="en-US" sz="1100" dirty="0"/>
+          </a:p>
+          <a:p>
+            <a:pPr algn="ctr" indent="0" marL="0">
+              <a:spcAft>
+                <a:spcPts val="200"/>
+              </a:spcAft>
+              <a:buNone/>
+            </a:pPr>
+            <a:r>
+              <a:rPr lang="en-US" sz="1100" dirty="0">
+                <a:solidFill>
+                  <a:srgbClr val="4F6559"/>
+                </a:solidFill>
+                <a:latin typeface="Calibri" pitchFamily="34" charset="0"/>
+                <a:ea typeface="Calibri" pitchFamily="34" charset="-122"/>
+                <a:cs typeface="Calibri" pitchFamily="34" charset="-120"/>
+              </a:rPr>
+              <a:t>Qwen3</a:t>
+            </a:r>
+            <a:endParaRPr lang="en-US" sz="1100" dirty="0"/>
+          </a:p>
+          <a:p>
+            <a:pPr algn="ctr" indent="0" marL="0">
+              <a:spcAft>
+                <a:spcPts val="200"/>
+              </a:spcAft>
+              <a:buNone/>
+            </a:pPr>
+            <a:r>
+              <a:rPr lang="en-US" sz="1100" dirty="0">
+                <a:solidFill>
+                  <a:srgbClr val="4F6559"/>
+                </a:solidFill>
+                <a:latin typeface="Calibri" pitchFamily="34" charset="0"/>
+                <a:ea typeface="Calibri" pitchFamily="34" charset="-122"/>
+                <a:cs typeface="Calibri" pitchFamily="34" charset="-120"/>
+              </a:rPr>
+              <a:t>Gemma 3</a:t>
+            </a:r>
+            <a:endParaRPr lang="en-US" sz="1100" dirty="0"/>
+          </a:p>
+        </p:txBody>
+      </p:sp>
+      <p:sp>
+        <p:nvSpPr>
+          <p:cNvPr id="26" name="Shape 20"/>
           <p:cNvSpPr/>
           <p:nvPr/>
         </p:nvSpPr>
         <p:spPr>
           <a:xfrm>
-            <a:off x="5248656" y="2766060"/>
+            <a:off x="5248656" y="2720340"/>
             <a:ext cx="201168" cy="0"/>
           </a:xfrm>
           <a:prstGeom prst="line">
@@ -1948,13 +2169,13 @@
       </p:sp>
       <p:sp>
         <p:nvSpPr>
-          <p:cNvPr id="25" name="Shape 19"/>
+          <p:cNvPr id="27" name="Shape 21"/>
           <p:cNvSpPr/>
           <p:nvPr/>
         </p:nvSpPr>
         <p:spPr>
           <a:xfrm>
-            <a:off x="5486400" y="2331720"/>
+            <a:off x="5486400" y="2286000"/>
             <a:ext cx="685800" cy="868680"/>
           </a:xfrm>
           <a:prstGeom prst="roundRect">
@@ -1963,11 +2184,11 @@
             </a:avLst>
           </a:prstGeom>
           <a:solidFill>
-            <a:srgbClr val="3A2757"/>
+            <a:srgbClr val="185443"/>
           </a:solidFill>
           <a:ln w="12700">
             <a:solidFill>
-              <a:srgbClr val="5B4580"/>
+              <a:srgbClr val="2F7A60"/>
             </a:solidFill>
             <a:prstDash val="solid"/>
           </a:ln>
@@ -1975,7 +2196,7 @@
       </p:sp>
       <p:pic>
         <p:nvPicPr>
-          <p:cNvPr id="26" name="Image 4" descr="preencoded.png">    </p:cNvPr>
+          <p:cNvPr id="28" name="Image 4" descr="preencoded.png">    </p:cNvPr>
           <p:cNvPicPr>
             <a:picLocks noChangeAspect="1"/>
           </p:cNvPicPr>
@@ -1989,7 +2210,7 @@
         </p:blipFill>
         <p:spPr>
           <a:xfrm>
-            <a:off x="5673852" y="2459736"/>
+            <a:off x="5673852" y="2414016"/>
             <a:ext cx="310896" cy="310896"/>
           </a:xfrm>
           <a:prstGeom prst="rect">
@@ -1999,13 +2220,13 @@
       </p:pic>
       <p:sp>
         <p:nvSpPr>
-          <p:cNvPr id="27" name="Text 20"/>
+          <p:cNvPr id="29" name="Text 22"/>
           <p:cNvSpPr txBox="1"/>
           <p:nvPr/>
         </p:nvSpPr>
         <p:spPr>
           <a:xfrm>
-            <a:off x="5486400" y="2834640"/>
+            <a:off x="5486400" y="2788920"/>
             <a:ext cx="685800" cy="274320"/>
           </a:xfrm>
           <a:prstGeom prst="rect">
@@ -2024,7 +2245,7 @@
             <a:r>
               <a:rPr lang="en-US" sz="1200" dirty="0">
                 <a:solidFill>
-                  <a:srgbClr val="E4DDF0"/>
+                  <a:srgbClr val="CFE6D6"/>
                 </a:solidFill>
                 <a:latin typeface="Calibri" pitchFamily="34" charset="0"/>
                 <a:ea typeface="Calibri" pitchFamily="34" charset="-122"/>
@@ -2038,13 +2259,13 @@
       </p:sp>
       <p:sp>
         <p:nvSpPr>
-          <p:cNvPr id="28" name="Shape 21"/>
+          <p:cNvPr id="30" name="Shape 23"/>
           <p:cNvSpPr/>
           <p:nvPr/>
         </p:nvSpPr>
         <p:spPr>
           <a:xfrm>
-            <a:off x="6208776" y="2766060"/>
+            <a:off x="6208776" y="2720340"/>
             <a:ext cx="201168" cy="0"/>
           </a:xfrm>
           <a:prstGeom prst="line">
@@ -2062,18 +2283,18 @@
       </p:sp>
       <p:sp>
         <p:nvSpPr>
-          <p:cNvPr id="29" name="Shape 22"/>
+          <p:cNvPr id="31" name="Shape 24"/>
           <p:cNvSpPr/>
           <p:nvPr/>
         </p:nvSpPr>
         <p:spPr>
           <a:xfrm>
-            <a:off x="6446520" y="2148840"/>
-            <a:ext cx="1280160" cy="1234440"/>
+            <a:off x="6446520" y="1783080"/>
+            <a:ext cx="1280160" cy="1874520"/>
           </a:xfrm>
           <a:prstGeom prst="roundRect">
             <a:avLst>
-              <a:gd name="adj" fmla="val 8889"/>
+              <a:gd name="adj" fmla="val 8571"/>
             </a:avLst>
           </a:prstGeom>
           <a:solidFill>
@@ -2088,7 +2309,7 @@
           <a:effectLst>
             <a:outerShdw sx="100000" sy="100000" kx="0" ky="0" algn="bl" rotWithShape="0" blurRad="76200" dist="25400" dir="5400000">
               <a:srgbClr val="000000">
-                <a:alpha val="18000"/>
+                <a:alpha val="20000"/>
               </a:srgbClr>
             </a:outerShdw>
           </a:effectLst>
@@ -2096,14 +2317,14 @@
       </p:sp>
       <p:sp>
         <p:nvSpPr>
-          <p:cNvPr id="30" name="Shape 23"/>
+          <p:cNvPr id="32" name="Shape 25"/>
           <p:cNvSpPr/>
           <p:nvPr/>
         </p:nvSpPr>
         <p:spPr>
           <a:xfrm>
-            <a:off x="6848856" y="2267712"/>
-            <a:ext cx="475488" cy="475488"/>
+            <a:off x="6858000" y="1892808"/>
+            <a:ext cx="457200" cy="457200"/>
           </a:xfrm>
           <a:prstGeom prst="ellipse">
             <a:avLst/>
@@ -2121,7 +2342,7 @@
       </p:sp>
       <p:pic>
         <p:nvPicPr>
-          <p:cNvPr id="31" name="Image 5" descr="preencoded.png">    </p:cNvPr>
+          <p:cNvPr id="33" name="Image 5" descr="preencoded.png">    </p:cNvPr>
           <p:cNvPicPr>
             <a:picLocks noChangeAspect="1"/>
           </p:cNvPicPr>
@@ -2135,8 +2356,8 @@
         </p:blipFill>
         <p:spPr>
           <a:xfrm>
-            <a:off x="6949440" y="2368296"/>
-            <a:ext cx="274320" cy="274320"/>
+            <a:off x="6958584" y="1993392"/>
+            <a:ext cx="256032" cy="256032"/>
           </a:xfrm>
           <a:prstGeom prst="rect">
             <a:avLst/>
@@ -2145,13 +2366,13 @@
       </p:pic>
       <p:sp>
         <p:nvSpPr>
-          <p:cNvPr id="32" name="Text 24"/>
+          <p:cNvPr id="34" name="Text 26"/>
           <p:cNvSpPr txBox="1"/>
           <p:nvPr/>
         </p:nvSpPr>
         <p:spPr>
           <a:xfrm>
-            <a:off x="6446520" y="2788920"/>
+            <a:off x="6446520" y="2404872"/>
             <a:ext cx="1280160" cy="274320"/>
           </a:xfrm>
           <a:prstGeom prst="rect">
@@ -2170,7 +2391,7 @@
             <a:r>
               <a:rPr lang="en-US" sz="1500" b="1" dirty="0">
                 <a:solidFill>
-                  <a:srgbClr val="1E1A28"/>
+                  <a:srgbClr val="15241E"/>
                 </a:solidFill>
                 <a:latin typeface="Calibri" pitchFamily="34" charset="0"/>
                 <a:ea typeface="Calibri" pitchFamily="34" charset="-122"/>
@@ -2184,14 +2405,37 @@
       </p:sp>
       <p:sp>
         <p:nvSpPr>
-          <p:cNvPr id="33" name="Text 25"/>
+          <p:cNvPr id="35" name="Shape 27"/>
+          <p:cNvSpPr/>
+          <p:nvPr/>
+        </p:nvSpPr>
+        <p:spPr>
+          <a:xfrm>
+            <a:off x="6720840" y="2734056"/>
+            <a:ext cx="731520" cy="0"/>
+          </a:xfrm>
+          <a:prstGeom prst="line">
+            <a:avLst/>
+          </a:prstGeom>
+          <a:noFill/>
+          <a:ln w="12700">
+            <a:solidFill>
+              <a:srgbClr val="CFE6D6"/>
+            </a:solidFill>
+            <a:prstDash val="solid"/>
+          </a:ln>
+        </p:spPr>
+      </p:sp>
+      <p:sp>
+        <p:nvSpPr>
+          <p:cNvPr id="36" name="Text 28"/>
           <p:cNvSpPr txBox="1"/>
           <p:nvPr/>
         </p:nvSpPr>
         <p:spPr>
           <a:xfrm>
-            <a:off x="6446520" y="3044952"/>
-            <a:ext cx="1280160" cy="237744"/>
+            <a:off x="6446520" y="2807208"/>
+            <a:ext cx="1280160" cy="749808"/>
           </a:xfrm>
           <a:prstGeom prst="rect">
             <a:avLst/>
@@ -2200,16 +2444,19 @@
           <a:ln/>
         </p:spPr>
         <p:txBody>
-          <a:bodyPr wrap="square" lIns="0" tIns="0" rIns="0" bIns="0" rtlCol="0" anchor="ctr"/>
+          <a:bodyPr wrap="square" lIns="0" tIns="0" rIns="0" bIns="0" rtlCol="0" anchor="t"/>
           <a:lstStyle/>
           <a:p>
             <a:pPr algn="ctr" indent="0" marL="0">
-              <a:buNone/>
-            </a:pPr>
-            <a:r>
-              <a:rPr lang="en-US" sz="1200" dirty="0">
-                <a:solidFill>
-                  <a:srgbClr val="6B6480"/>
+              <a:spcAft>
+                <a:spcPts val="200"/>
+              </a:spcAft>
+              <a:buNone/>
+            </a:pPr>
+            <a:r>
+              <a:rPr lang="en-US" sz="1100" b="1" dirty="0">
+                <a:solidFill>
+                  <a:srgbClr val="15241E"/>
                 </a:solidFill>
                 <a:latin typeface="Calibri" pitchFamily="34" charset="0"/>
                 <a:ea typeface="Calibri" pitchFamily="34" charset="-122"/>
@@ -2217,19 +2464,59 @@
               </a:rPr>
               <a:t>VoxCPM</a:t>
             </a:r>
-            <a:endParaRPr lang="en-US" sz="1200" dirty="0"/>
-          </a:p>
-        </p:txBody>
-      </p:sp>
-      <p:sp>
-        <p:nvSpPr>
-          <p:cNvPr id="34" name="Shape 26"/>
+            <a:endParaRPr lang="en-US" sz="1100" dirty="0"/>
+          </a:p>
+          <a:p>
+            <a:pPr algn="ctr" indent="0" marL="0">
+              <a:spcAft>
+                <a:spcPts val="200"/>
+              </a:spcAft>
+              <a:buNone/>
+            </a:pPr>
+            <a:r>
+              <a:rPr lang="en-US" sz="1100" dirty="0">
+                <a:solidFill>
+                  <a:srgbClr val="4F6559"/>
+                </a:solidFill>
+                <a:latin typeface="Calibri" pitchFamily="34" charset="0"/>
+                <a:ea typeface="Calibri" pitchFamily="34" charset="-122"/>
+                <a:cs typeface="Calibri" pitchFamily="34" charset="-120"/>
+              </a:rPr>
+              <a:t>Kokoro</a:t>
+            </a:r>
+            <a:endParaRPr lang="en-US" sz="1100" dirty="0"/>
+          </a:p>
+          <a:p>
+            <a:pPr algn="ctr" indent="0" marL="0">
+              <a:spcAft>
+                <a:spcPts val="200"/>
+              </a:spcAft>
+              <a:buNone/>
+            </a:pPr>
+            <a:r>
+              <a:rPr lang="en-US" sz="1100" dirty="0">
+                <a:solidFill>
+                  <a:srgbClr val="4F6559"/>
+                </a:solidFill>
+                <a:latin typeface="Calibri" pitchFamily="34" charset="0"/>
+                <a:ea typeface="Calibri" pitchFamily="34" charset="-122"/>
+                <a:cs typeface="Calibri" pitchFamily="34" charset="-120"/>
+              </a:rPr>
+              <a:t>Chatterbox</a:t>
+            </a:r>
+            <a:endParaRPr lang="en-US" sz="1100" dirty="0"/>
+          </a:p>
+        </p:txBody>
+      </p:sp>
+      <p:sp>
+        <p:nvSpPr>
+          <p:cNvPr id="37" name="Shape 29"/>
           <p:cNvSpPr/>
           <p:nvPr/>
         </p:nvSpPr>
         <p:spPr>
           <a:xfrm>
-            <a:off x="7763256" y="2766060"/>
+            <a:off x="7763256" y="2720340"/>
             <a:ext cx="201168" cy="0"/>
           </a:xfrm>
           <a:prstGeom prst="line">
@@ -2247,13 +2534,13 @@
       </p:sp>
       <p:sp>
         <p:nvSpPr>
-          <p:cNvPr id="35" name="Shape 27"/>
+          <p:cNvPr id="38" name="Shape 30"/>
           <p:cNvSpPr/>
           <p:nvPr/>
         </p:nvSpPr>
         <p:spPr>
           <a:xfrm>
-            <a:off x="8001000" y="2331720"/>
+            <a:off x="8001000" y="2286000"/>
             <a:ext cx="685800" cy="868680"/>
           </a:xfrm>
           <a:prstGeom prst="roundRect">
@@ -2262,11 +2549,11 @@
             </a:avLst>
           </a:prstGeom>
           <a:solidFill>
-            <a:srgbClr val="3A2757"/>
+            <a:srgbClr val="185443"/>
           </a:solidFill>
           <a:ln w="12700">
             <a:solidFill>
-              <a:srgbClr val="5B4580"/>
+              <a:srgbClr val="2F7A60"/>
             </a:solidFill>
             <a:prstDash val="solid"/>
           </a:ln>
@@ -2274,7 +2561,7 @@
       </p:sp>
       <p:pic>
         <p:nvPicPr>
-          <p:cNvPr id="36" name="Image 6" descr="preencoded.png">    </p:cNvPr>
+          <p:cNvPr id="39" name="Image 6" descr="preencoded.png">    </p:cNvPr>
           <p:cNvPicPr>
             <a:picLocks noChangeAspect="1"/>
           </p:cNvPicPr>
@@ -2288,7 +2575,7 @@
         </p:blipFill>
         <p:spPr>
           <a:xfrm>
-            <a:off x="8188452" y="2459736"/>
+            <a:off x="8188452" y="2414016"/>
             <a:ext cx="310896" cy="310896"/>
           </a:xfrm>
           <a:prstGeom prst="rect">
@@ -2298,13 +2585,13 @@
       </p:pic>
       <p:sp>
         <p:nvSpPr>
-          <p:cNvPr id="37" name="Text 28"/>
+          <p:cNvPr id="40" name="Text 31"/>
           <p:cNvSpPr txBox="1"/>
           <p:nvPr/>
         </p:nvSpPr>
         <p:spPr>
           <a:xfrm>
-            <a:off x="8001000" y="2834640"/>
+            <a:off x="8001000" y="2788920"/>
             <a:ext cx="685800" cy="274320"/>
           </a:xfrm>
           <a:prstGeom prst="rect">
@@ -2323,7 +2610,7 @@
             <a:r>
               <a:rPr lang="en-US" sz="1200" dirty="0">
                 <a:solidFill>
-                  <a:srgbClr val="E4DDF0"/>
+                  <a:srgbClr val="CFE6D6"/>
                 </a:solidFill>
                 <a:latin typeface="Calibri" pitchFamily="34" charset="0"/>
                 <a:ea typeface="Calibri" pitchFamily="34" charset="-122"/>
@@ -2337,14 +2624,14 @@
       </p:sp>
       <p:sp>
         <p:nvSpPr>
-          <p:cNvPr id="38" name="Text 29"/>
+          <p:cNvPr id="41" name="Text 32"/>
           <p:cNvSpPr txBox="1"/>
           <p:nvPr/>
         </p:nvSpPr>
         <p:spPr>
           <a:xfrm>
-            <a:off x="1234440" y="3493008"/>
-            <a:ext cx="1645920" cy="274320"/>
+            <a:off x="457200" y="3767328"/>
+            <a:ext cx="8229600" cy="237744"/>
           </a:xfrm>
           <a:prstGeom prst="rect">
             <a:avLst/>
@@ -2360,107 +2647,29 @@
               <a:buNone/>
             </a:pPr>
             <a:r>
-              <a:rPr lang="en-US" sz="1100" dirty="0">
-                <a:solidFill>
-                  <a:srgbClr val="E4DDF0"/>
-                </a:solidFill>
-                <a:latin typeface="Calibri" pitchFamily="34" charset="0"/>
-                <a:ea typeface="Calibri" pitchFamily="34" charset="-122"/>
-                <a:cs typeface="Calibri" pitchFamily="34" charset="-120"/>
-              </a:rPr>
-              <a:t>Speech → transcript</a:t>
-            </a:r>
-            <a:endParaRPr lang="en-US" sz="1100" dirty="0"/>
-          </a:p>
-        </p:txBody>
-      </p:sp>
-      <p:sp>
-        <p:nvSpPr>
-          <p:cNvPr id="39" name="Text 30"/>
+              <a:rPr lang="en-US" sz="1000" i="1" dirty="0">
+                <a:solidFill>
+                  <a:srgbClr val="CFE6D6"/>
+                </a:solidFill>
+                <a:latin typeface="Calibri" pitchFamily="34" charset="0"/>
+                <a:ea typeface="Calibri" pitchFamily="34" charset="-122"/>
+                <a:cs typeface="Calibri" pitchFamily="34" charset="-120"/>
+              </a:rPr>
+              <a:t>Bold = reference stack · others are open-source drop-in alternatives</a:t>
+            </a:r>
+            <a:endParaRPr lang="en-US" sz="1000" dirty="0"/>
+          </a:p>
+        </p:txBody>
+      </p:sp>
+      <p:sp>
+        <p:nvSpPr>
+          <p:cNvPr id="42" name="Text 33"/>
           <p:cNvSpPr txBox="1"/>
           <p:nvPr/>
         </p:nvSpPr>
         <p:spPr>
           <a:xfrm>
-            <a:off x="3749040" y="3493008"/>
-            <a:ext cx="1645920" cy="274320"/>
-          </a:xfrm>
-          <a:prstGeom prst="rect">
-            <a:avLst/>
-          </a:prstGeom>
-          <a:noFill/>
-          <a:ln/>
-        </p:spPr>
-        <p:txBody>
-          <a:bodyPr wrap="square" lIns="0" tIns="0" rIns="0" bIns="0" rtlCol="0" anchor="ctr"/>
-          <a:lstStyle/>
-          <a:p>
-            <a:pPr algn="ctr" indent="0" marL="0">
-              <a:buNone/>
-            </a:pPr>
-            <a:r>
-              <a:rPr lang="en-US" sz="1100" dirty="0">
-                <a:solidFill>
-                  <a:srgbClr val="E4DDF0"/>
-                </a:solidFill>
-                <a:latin typeface="Calibri" pitchFamily="34" charset="0"/>
-                <a:ea typeface="Calibri" pitchFamily="34" charset="-122"/>
-                <a:cs typeface="Calibri" pitchFamily="34" charset="-120"/>
-              </a:rPr>
-              <a:t>Reasoning · RAG · tools</a:t>
-            </a:r>
-            <a:endParaRPr lang="en-US" sz="1100" dirty="0"/>
-          </a:p>
-        </p:txBody>
-      </p:sp>
-      <p:sp>
-        <p:nvSpPr>
-          <p:cNvPr id="40" name="Text 31"/>
-          <p:cNvSpPr txBox="1"/>
-          <p:nvPr/>
-        </p:nvSpPr>
-        <p:spPr>
-          <a:xfrm>
-            <a:off x="6263640" y="3493008"/>
-            <a:ext cx="1645920" cy="274320"/>
-          </a:xfrm>
-          <a:prstGeom prst="rect">
-            <a:avLst/>
-          </a:prstGeom>
-          <a:noFill/>
-          <a:ln/>
-        </p:spPr>
-        <p:txBody>
-          <a:bodyPr wrap="square" lIns="0" tIns="0" rIns="0" bIns="0" rtlCol="0" anchor="ctr"/>
-          <a:lstStyle/>
-          <a:p>
-            <a:pPr algn="ctr" indent="0" marL="0">
-              <a:buNone/>
-            </a:pPr>
-            <a:r>
-              <a:rPr lang="en-US" sz="1100" dirty="0">
-                <a:solidFill>
-                  <a:srgbClr val="E4DDF0"/>
-                </a:solidFill>
-                <a:latin typeface="Calibri" pitchFamily="34" charset="0"/>
-                <a:ea typeface="Calibri" pitchFamily="34" charset="-122"/>
-                <a:cs typeface="Calibri" pitchFamily="34" charset="-120"/>
-              </a:rPr>
-              <a:t>Transcript → speech</a:t>
-            </a:r>
-            <a:endParaRPr lang="en-US" sz="1100" dirty="0"/>
-          </a:p>
-        </p:txBody>
-      </p:sp>
-      <p:sp>
-        <p:nvSpPr>
-          <p:cNvPr id="41" name="Text 32"/>
-          <p:cNvSpPr txBox="1"/>
-          <p:nvPr/>
-        </p:nvSpPr>
-        <p:spPr>
-          <a:xfrm>
-            <a:off x="457200" y="4251960"/>
+            <a:off x="457200" y="4297680"/>
             <a:ext cx="8229600" cy="457200"/>
           </a:xfrm>
           <a:prstGeom prst="rect">
@@ -2519,7 +2728,7 @@
     <p:bg>
       <p:bgPr>
         <a:solidFill>
-          <a:srgbClr val="FFFFFF"/>
+          <a:srgbClr val="E6F2EA"/>
         </a:solidFill>
       </p:bgPr>
     </p:bg>
@@ -2562,17 +2771,17 @@
               <a:buNone/>
             </a:pPr>
             <a:r>
-              <a:rPr lang="en-US" sz="3400" b="1" dirty="0">
-                <a:solidFill>
-                  <a:srgbClr val="24163A"/>
+              <a:rPr lang="en-US" sz="3200" b="1" dirty="0">
+                <a:solidFill>
+                  <a:srgbClr val="0E3B2E"/>
                 </a:solidFill>
                 <a:latin typeface="Cambria" pitchFamily="34" charset="0"/>
                 <a:ea typeface="Cambria" pitchFamily="34" charset="-122"/>
                 <a:cs typeface="Cambria" pitchFamily="34" charset="-120"/>
               </a:rPr>
-              <a:t>Why Cascaded Works</a:t>
-            </a:r>
-            <a:endParaRPr lang="en-US" sz="3400" dirty="0"/>
+              <a:t>Real-Time Plumbing</a:t>
+            </a:r>
+            <a:endParaRPr lang="en-US" sz="3200" dirty="0"/>
           </a:p>
         </p:txBody>
       </p:sp>
@@ -2603,13 +2812,13 @@
             <a:r>
               <a:rPr lang="en-US" sz="1500" dirty="0">
                 <a:solidFill>
-                  <a:srgbClr val="6B6480"/>
-                </a:solidFill>
-                <a:latin typeface="Calibri" pitchFamily="34" charset="0"/>
-                <a:ea typeface="Calibri" pitchFamily="34" charset="-122"/>
-                <a:cs typeface="Calibri" pitchFamily="34" charset="-120"/>
-              </a:rPr>
-              <a:t>Text in the middle buys control, clarity and flexibility.</a:t>
+                  <a:srgbClr val="4F6559"/>
+                </a:solidFill>
+                <a:latin typeface="Calibri" pitchFamily="34" charset="0"/>
+                <a:ea typeface="Calibri" pitchFamily="34" charset="-122"/>
+                <a:cs typeface="Calibri" pitchFamily="34" charset="-120"/>
+              </a:rPr>
+              <a:t>What turns three models into a conversation you can actually talk to.</a:t>
             </a:r>
             <a:endParaRPr lang="en-US" sz="1500" dirty="0"/>
           </a:p>
@@ -2623,20 +2832,20 @@
         </p:nvSpPr>
         <p:spPr>
           <a:xfrm>
-            <a:off x="457200" y="1481328"/>
-            <a:ext cx="3977640" cy="1554480"/>
+            <a:off x="457200" y="1417320"/>
+            <a:ext cx="1234440" cy="411480"/>
           </a:xfrm>
           <a:prstGeom prst="roundRect">
             <a:avLst>
-              <a:gd name="adj" fmla="val 5882"/>
+              <a:gd name="adj" fmla="val 48889"/>
             </a:avLst>
           </a:prstGeom>
           <a:solidFill>
-            <a:srgbClr val="F4F1F9"/>
+            <a:srgbClr val="FFFFFF"/>
           </a:solidFill>
           <a:ln w="12700">
             <a:solidFill>
-              <a:srgbClr val="E4DDF0"/>
+              <a:srgbClr val="CFE6D6"/>
             </a:solidFill>
             <a:prstDash val="solid"/>
           </a:ln>
@@ -2644,32 +2853,459 @@
       </p:sp>
       <p:sp>
         <p:nvSpPr>
-          <p:cNvPr id="5" name="Shape 3"/>
+          <p:cNvPr id="5" name="Text 3"/>
+          <p:cNvSpPr txBox="1"/>
+          <p:nvPr/>
+        </p:nvSpPr>
+        <p:spPr>
+          <a:xfrm>
+            <a:off x="457200" y="1417320"/>
+            <a:ext cx="1234440" cy="411480"/>
+          </a:xfrm>
+          <a:prstGeom prst="rect">
+            <a:avLst/>
+          </a:prstGeom>
+          <a:noFill/>
+          <a:ln/>
+        </p:spPr>
+        <p:txBody>
+          <a:bodyPr wrap="square" lIns="0" tIns="0" rIns="0" bIns="0" rtlCol="0" anchor="ctr"/>
+          <a:lstStyle/>
+          <a:p>
+            <a:pPr algn="ctr" indent="0" marL="0">
+              <a:buNone/>
+            </a:pPr>
+            <a:r>
+              <a:rPr lang="en-US" sz="1200" b="1" dirty="0">
+                <a:solidFill>
+                  <a:srgbClr val="0E3B2E"/>
+                </a:solidFill>
+                <a:latin typeface="Calibri" pitchFamily="34" charset="0"/>
+                <a:ea typeface="Calibri" pitchFamily="34" charset="-122"/>
+                <a:cs typeface="Calibri" pitchFamily="34" charset="-120"/>
+              </a:rPr>
+              <a:t>User device</a:t>
+            </a:r>
+            <a:endParaRPr lang="en-US" sz="1200" dirty="0"/>
+          </a:p>
+        </p:txBody>
+      </p:sp>
+      <p:sp>
+        <p:nvSpPr>
+          <p:cNvPr id="6" name="Shape 4"/>
           <p:cNvSpPr/>
           <p:nvPr/>
         </p:nvSpPr>
         <p:spPr>
           <a:xfrm>
-            <a:off x="685800" y="1709928"/>
-            <a:ext cx="502920" cy="502920"/>
-          </a:xfrm>
-          <a:prstGeom prst="ellipse">
-            <a:avLst/>
+            <a:off x="1737360" y="1623060"/>
+            <a:ext cx="251460" cy="0"/>
+          </a:xfrm>
+          <a:prstGeom prst="line">
+            <a:avLst/>
+          </a:prstGeom>
+          <a:noFill/>
+          <a:ln w="19050">
+            <a:solidFill>
+              <a:srgbClr val="2F7A60"/>
+            </a:solidFill>
+            <a:prstDash val="solid"/>
+            <a:headEnd type="triangle"/>
+            <a:tailEnd type="triangle"/>
+          </a:ln>
+        </p:spPr>
+      </p:sp>
+      <p:sp>
+        <p:nvSpPr>
+          <p:cNvPr id="7" name="Shape 5"/>
+          <p:cNvSpPr/>
+          <p:nvPr/>
+        </p:nvSpPr>
+        <p:spPr>
+          <a:xfrm>
+            <a:off x="2034540" y="1417320"/>
+            <a:ext cx="1234440" cy="411480"/>
+          </a:xfrm>
+          <a:prstGeom prst="roundRect">
+            <a:avLst>
+              <a:gd name="adj" fmla="val 48889"/>
+            </a:avLst>
           </a:prstGeom>
           <a:solidFill>
-            <a:srgbClr val="24163A"/>
+            <a:srgbClr val="3FA7D6"/>
           </a:solidFill>
           <a:ln w="12700">
             <a:solidFill>
-              <a:srgbClr val="24163A"/>
+              <a:srgbClr val="3FA7D6"/>
             </a:solidFill>
             <a:prstDash val="solid"/>
           </a:ln>
         </p:spPr>
       </p:sp>
+      <p:sp>
+        <p:nvSpPr>
+          <p:cNvPr id="8" name="Text 6"/>
+          <p:cNvSpPr txBox="1"/>
+          <p:nvPr/>
+        </p:nvSpPr>
+        <p:spPr>
+          <a:xfrm>
+            <a:off x="2034540" y="1417320"/>
+            <a:ext cx="1234440" cy="411480"/>
+          </a:xfrm>
+          <a:prstGeom prst="rect">
+            <a:avLst/>
+          </a:prstGeom>
+          <a:noFill/>
+          <a:ln/>
+        </p:spPr>
+        <p:txBody>
+          <a:bodyPr wrap="square" lIns="0" tIns="0" rIns="0" bIns="0" rtlCol="0" anchor="ctr"/>
+          <a:lstStyle/>
+          <a:p>
+            <a:pPr algn="ctr" indent="0" marL="0">
+              <a:buNone/>
+            </a:pPr>
+            <a:r>
+              <a:rPr lang="en-US" sz="1200" b="1" dirty="0">
+                <a:solidFill>
+                  <a:srgbClr val="FFFFFF"/>
+                </a:solidFill>
+                <a:latin typeface="Calibri" pitchFamily="34" charset="0"/>
+                <a:ea typeface="Calibri" pitchFamily="34" charset="-122"/>
+                <a:cs typeface="Calibri" pitchFamily="34" charset="-120"/>
+              </a:rPr>
+              <a:t>Transport</a:t>
+            </a:r>
+            <a:endParaRPr lang="en-US" sz="1200" dirty="0"/>
+          </a:p>
+        </p:txBody>
+      </p:sp>
+      <p:sp>
+        <p:nvSpPr>
+          <p:cNvPr id="9" name="Shape 7"/>
+          <p:cNvSpPr/>
+          <p:nvPr/>
+        </p:nvSpPr>
+        <p:spPr>
+          <a:xfrm>
+            <a:off x="3314700" y="1623060"/>
+            <a:ext cx="251460" cy="0"/>
+          </a:xfrm>
+          <a:prstGeom prst="line">
+            <a:avLst/>
+          </a:prstGeom>
+          <a:noFill/>
+          <a:ln w="19050">
+            <a:solidFill>
+              <a:srgbClr val="2F7A60"/>
+            </a:solidFill>
+            <a:prstDash val="solid"/>
+            <a:tailEnd type="triangle"/>
+          </a:ln>
+        </p:spPr>
+      </p:sp>
+      <p:sp>
+        <p:nvSpPr>
+          <p:cNvPr id="10" name="Shape 8"/>
+          <p:cNvSpPr/>
+          <p:nvPr/>
+        </p:nvSpPr>
+        <p:spPr>
+          <a:xfrm>
+            <a:off x="3611880" y="1417320"/>
+            <a:ext cx="1234440" cy="411480"/>
+          </a:xfrm>
+          <a:prstGeom prst="roundRect">
+            <a:avLst>
+              <a:gd name="adj" fmla="val 48889"/>
+            </a:avLst>
+          </a:prstGeom>
+          <a:solidFill>
+            <a:srgbClr val="FFB22E"/>
+          </a:solidFill>
+          <a:ln w="12700">
+            <a:solidFill>
+              <a:srgbClr val="FFB22E"/>
+            </a:solidFill>
+            <a:prstDash val="solid"/>
+          </a:ln>
+        </p:spPr>
+      </p:sp>
+      <p:sp>
+        <p:nvSpPr>
+          <p:cNvPr id="11" name="Text 9"/>
+          <p:cNvSpPr txBox="1"/>
+          <p:nvPr/>
+        </p:nvSpPr>
+        <p:spPr>
+          <a:xfrm>
+            <a:off x="3611880" y="1417320"/>
+            <a:ext cx="1234440" cy="411480"/>
+          </a:xfrm>
+          <a:prstGeom prst="rect">
+            <a:avLst/>
+          </a:prstGeom>
+          <a:noFill/>
+          <a:ln/>
+        </p:spPr>
+        <p:txBody>
+          <a:bodyPr wrap="square" lIns="0" tIns="0" rIns="0" bIns="0" rtlCol="0" anchor="ctr"/>
+          <a:lstStyle/>
+          <a:p>
+            <a:pPr algn="ctr" indent="0" marL="0">
+              <a:buNone/>
+            </a:pPr>
+            <a:r>
+              <a:rPr lang="en-US" sz="1200" b="1" dirty="0">
+                <a:solidFill>
+                  <a:srgbClr val="15241E"/>
+                </a:solidFill>
+                <a:latin typeface="Calibri" pitchFamily="34" charset="0"/>
+                <a:ea typeface="Calibri" pitchFamily="34" charset="-122"/>
+                <a:cs typeface="Calibri" pitchFamily="34" charset="-120"/>
+              </a:rPr>
+              <a:t>VAD</a:t>
+            </a:r>
+            <a:endParaRPr lang="en-US" sz="1200" dirty="0"/>
+          </a:p>
+        </p:txBody>
+      </p:sp>
+      <p:sp>
+        <p:nvSpPr>
+          <p:cNvPr id="12" name="Shape 10"/>
+          <p:cNvSpPr/>
+          <p:nvPr/>
+        </p:nvSpPr>
+        <p:spPr>
+          <a:xfrm>
+            <a:off x="4892040" y="1623060"/>
+            <a:ext cx="251460" cy="0"/>
+          </a:xfrm>
+          <a:prstGeom prst="line">
+            <a:avLst/>
+          </a:prstGeom>
+          <a:noFill/>
+          <a:ln w="19050">
+            <a:solidFill>
+              <a:srgbClr val="2F7A60"/>
+            </a:solidFill>
+            <a:prstDash val="solid"/>
+            <a:tailEnd type="triangle"/>
+          </a:ln>
+        </p:spPr>
+      </p:sp>
+      <p:sp>
+        <p:nvSpPr>
+          <p:cNvPr id="13" name="Shape 11"/>
+          <p:cNvSpPr/>
+          <p:nvPr/>
+        </p:nvSpPr>
+        <p:spPr>
+          <a:xfrm>
+            <a:off x="5189220" y="1417320"/>
+            <a:ext cx="1463040" cy="411480"/>
+          </a:xfrm>
+          <a:prstGeom prst="roundRect">
+            <a:avLst>
+              <a:gd name="adj" fmla="val 48889"/>
+            </a:avLst>
+          </a:prstGeom>
+          <a:solidFill>
+            <a:srgbClr val="F2545B"/>
+          </a:solidFill>
+          <a:ln w="12700">
+            <a:solidFill>
+              <a:srgbClr val="F2545B"/>
+            </a:solidFill>
+            <a:prstDash val="solid"/>
+          </a:ln>
+        </p:spPr>
+      </p:sp>
+      <p:sp>
+        <p:nvSpPr>
+          <p:cNvPr id="14" name="Text 12"/>
+          <p:cNvSpPr txBox="1"/>
+          <p:nvPr/>
+        </p:nvSpPr>
+        <p:spPr>
+          <a:xfrm>
+            <a:off x="5189220" y="1417320"/>
+            <a:ext cx="1463040" cy="411480"/>
+          </a:xfrm>
+          <a:prstGeom prst="rect">
+            <a:avLst/>
+          </a:prstGeom>
+          <a:noFill/>
+          <a:ln/>
+        </p:spPr>
+        <p:txBody>
+          <a:bodyPr wrap="square" lIns="0" tIns="0" rIns="0" bIns="0" rtlCol="0" anchor="ctr"/>
+          <a:lstStyle/>
+          <a:p>
+            <a:pPr algn="ctr" indent="0" marL="0">
+              <a:buNone/>
+            </a:pPr>
+            <a:r>
+              <a:rPr lang="en-US" sz="1200" b="1" dirty="0">
+                <a:solidFill>
+                  <a:srgbClr val="FFFFFF"/>
+                </a:solidFill>
+                <a:latin typeface="Calibri" pitchFamily="34" charset="0"/>
+                <a:ea typeface="Calibri" pitchFamily="34" charset="-122"/>
+                <a:cs typeface="Calibri" pitchFamily="34" charset="-120"/>
+              </a:rPr>
+              <a:t>Turn detection</a:t>
+            </a:r>
+            <a:endParaRPr lang="en-US" sz="1200" dirty="0"/>
+          </a:p>
+        </p:txBody>
+      </p:sp>
+      <p:sp>
+        <p:nvSpPr>
+          <p:cNvPr id="15" name="Shape 13"/>
+          <p:cNvSpPr/>
+          <p:nvPr/>
+        </p:nvSpPr>
+        <p:spPr>
+          <a:xfrm>
+            <a:off x="6697980" y="1623060"/>
+            <a:ext cx="251460" cy="0"/>
+          </a:xfrm>
+          <a:prstGeom prst="line">
+            <a:avLst/>
+          </a:prstGeom>
+          <a:noFill/>
+          <a:ln w="19050">
+            <a:solidFill>
+              <a:srgbClr val="2F7A60"/>
+            </a:solidFill>
+            <a:prstDash val="solid"/>
+            <a:tailEnd type="triangle"/>
+          </a:ln>
+        </p:spPr>
+      </p:sp>
+      <p:sp>
+        <p:nvSpPr>
+          <p:cNvPr id="16" name="Shape 14"/>
+          <p:cNvSpPr/>
+          <p:nvPr/>
+        </p:nvSpPr>
+        <p:spPr>
+          <a:xfrm>
+            <a:off x="6995160" y="1417320"/>
+            <a:ext cx="1691640" cy="411480"/>
+          </a:xfrm>
+          <a:prstGeom prst="roundRect">
+            <a:avLst>
+              <a:gd name="adj" fmla="val 48889"/>
+            </a:avLst>
+          </a:prstGeom>
+          <a:solidFill>
+            <a:srgbClr val="0E3B2E"/>
+          </a:solidFill>
+          <a:ln w="12700">
+            <a:solidFill>
+              <a:srgbClr val="0E3B2E"/>
+            </a:solidFill>
+            <a:prstDash val="solid"/>
+          </a:ln>
+        </p:spPr>
+      </p:sp>
+      <p:sp>
+        <p:nvSpPr>
+          <p:cNvPr id="17" name="Text 15"/>
+          <p:cNvSpPr txBox="1"/>
+          <p:nvPr/>
+        </p:nvSpPr>
+        <p:spPr>
+          <a:xfrm>
+            <a:off x="6995160" y="1417320"/>
+            <a:ext cx="1691640" cy="411480"/>
+          </a:xfrm>
+          <a:prstGeom prst="rect">
+            <a:avLst/>
+          </a:prstGeom>
+          <a:noFill/>
+          <a:ln/>
+        </p:spPr>
+        <p:txBody>
+          <a:bodyPr wrap="square" lIns="0" tIns="0" rIns="0" bIns="0" rtlCol="0" anchor="ctr"/>
+          <a:lstStyle/>
+          <a:p>
+            <a:pPr algn="ctr" indent="0" marL="0">
+              <a:buNone/>
+            </a:pPr>
+            <a:r>
+              <a:rPr lang="en-US" sz="1200" b="1" dirty="0">
+                <a:solidFill>
+                  <a:srgbClr val="FFFFFF"/>
+                </a:solidFill>
+                <a:latin typeface="Calibri" pitchFamily="34" charset="0"/>
+                <a:ea typeface="Calibri" pitchFamily="34" charset="-122"/>
+                <a:cs typeface="Calibri" pitchFamily="34" charset="-120"/>
+              </a:rPr>
+              <a:t>STT → LLM → TTS</a:t>
+            </a:r>
+            <a:endParaRPr lang="en-US" sz="1200" dirty="0"/>
+          </a:p>
+        </p:txBody>
+      </p:sp>
+      <p:sp>
+        <p:nvSpPr>
+          <p:cNvPr id="18" name="Shape 16"/>
+          <p:cNvSpPr/>
+          <p:nvPr/>
+        </p:nvSpPr>
+        <p:spPr>
+          <a:xfrm>
+            <a:off x="457200" y="2011680"/>
+            <a:ext cx="1920240" cy="2697480"/>
+          </a:xfrm>
+          <a:prstGeom prst="roundRect">
+            <a:avLst>
+              <a:gd name="adj" fmla="val 4762"/>
+            </a:avLst>
+          </a:prstGeom>
+          <a:solidFill>
+            <a:srgbClr val="FFFFFF"/>
+          </a:solidFill>
+          <a:ln w="12700">
+            <a:solidFill>
+              <a:srgbClr val="CFE6D6"/>
+            </a:solidFill>
+            <a:prstDash val="solid"/>
+          </a:ln>
+        </p:spPr>
+      </p:sp>
+      <p:sp>
+        <p:nvSpPr>
+          <p:cNvPr id="19" name="Shape 17"/>
+          <p:cNvSpPr/>
+          <p:nvPr/>
+        </p:nvSpPr>
+        <p:spPr>
+          <a:xfrm>
+            <a:off x="621792" y="2176272"/>
+            <a:ext cx="384048" cy="384048"/>
+          </a:xfrm>
+          <a:prstGeom prst="ellipse">
+            <a:avLst/>
+          </a:prstGeom>
+          <a:solidFill>
+            <a:srgbClr val="3FA7D6"/>
+          </a:solidFill>
+          <a:ln w="12700">
+            <a:solidFill>
+              <a:srgbClr val="3FA7D6"/>
+            </a:solidFill>
+            <a:prstDash val="solid"/>
+          </a:ln>
+        </p:spPr>
+      </p:sp>
       <p:pic>
         <p:nvPicPr>
-          <p:cNvPr id="6" name="Image 0" descr="preencoded.png">    </p:cNvPr>
+          <p:cNvPr id="20" name="Image 0" descr="preencoded.png">    </p:cNvPr>
           <p:cNvPicPr>
             <a:picLocks noChangeAspect="1"/>
           </p:cNvPicPr>
@@ -2683,8 +3319,8 @@
         </p:blipFill>
         <p:spPr>
           <a:xfrm>
-            <a:off x="813816" y="1837944"/>
-            <a:ext cx="246888" cy="246888"/>
+            <a:off x="713232" y="2267712"/>
+            <a:ext cx="201168" cy="201168"/>
           </a:xfrm>
           <a:prstGeom prst="rect">
             <a:avLst/>
@@ -2693,14 +3329,14 @@
       </p:pic>
       <p:sp>
         <p:nvSpPr>
-          <p:cNvPr id="7" name="Text 4"/>
+          <p:cNvPr id="21" name="Text 18"/>
           <p:cNvSpPr txBox="1"/>
           <p:nvPr/>
         </p:nvSpPr>
         <p:spPr>
           <a:xfrm>
-            <a:off x="1325880" y="1709928"/>
-            <a:ext cx="2926080" cy="502920"/>
+            <a:off x="621792" y="2651760"/>
+            <a:ext cx="1591056" cy="274320"/>
           </a:xfrm>
           <a:prstGeom prst="rect">
             <a:avLst/>
@@ -2716,30 +3352,30 @@
               <a:buNone/>
             </a:pPr>
             <a:r>
-              <a:rPr lang="en-US" sz="1600" b="1" dirty="0">
-                <a:solidFill>
-                  <a:srgbClr val="24163A"/>
-                </a:solidFill>
-                <a:latin typeface="Calibri" pitchFamily="34" charset="0"/>
-                <a:ea typeface="Calibri" pitchFamily="34" charset="-122"/>
-                <a:cs typeface="Calibri" pitchFamily="34" charset="-120"/>
-              </a:rPr>
-              <a:t>Best-in-class reasoning &amp; RAG</a:t>
-            </a:r>
-            <a:endParaRPr lang="en-US" sz="1600" dirty="0"/>
-          </a:p>
-        </p:txBody>
-      </p:sp>
-      <p:sp>
-        <p:nvSpPr>
-          <p:cNvPr id="8" name="Text 5"/>
+              <a:rPr lang="en-US" sz="1400" b="1" dirty="0">
+                <a:solidFill>
+                  <a:srgbClr val="0E3B2E"/>
+                </a:solidFill>
+                <a:latin typeface="Calibri" pitchFamily="34" charset="0"/>
+                <a:ea typeface="Calibri" pitchFamily="34" charset="-122"/>
+                <a:cs typeface="Calibri" pitchFamily="34" charset="-120"/>
+              </a:rPr>
+              <a:t>Transport</a:t>
+            </a:r>
+            <a:endParaRPr lang="en-US" sz="1400" dirty="0"/>
+          </a:p>
+        </p:txBody>
+      </p:sp>
+      <p:sp>
+        <p:nvSpPr>
+          <p:cNvPr id="22" name="Text 19"/>
           <p:cNvSpPr txBox="1"/>
           <p:nvPr/>
         </p:nvSpPr>
         <p:spPr>
           <a:xfrm>
-            <a:off x="685800" y="2304288"/>
-            <a:ext cx="3520440" cy="640080"/>
+            <a:off x="621792" y="2971800"/>
+            <a:ext cx="1591056" cy="914400"/>
           </a:xfrm>
           <a:prstGeom prst="rect">
             <a:avLst/>
@@ -2755,42 +3391,154 @@
               <a:buNone/>
             </a:pPr>
             <a:r>
-              <a:rPr lang="en-US" sz="1200" dirty="0">
-                <a:solidFill>
-                  <a:srgbClr val="1E1A28"/>
-                </a:solidFill>
-                <a:latin typeface="Calibri" pitchFamily="34" charset="0"/>
-                <a:ea typeface="Calibri" pitchFamily="34" charset="-122"/>
-                <a:cs typeface="Calibri" pitchFamily="34" charset="-120"/>
-              </a:rPr>
-              <a:t>Text LLMs lead on logic, JSON output and RAG — 100k tokens of manuals is easy in text, painful in an audio KV cache.</a:t>
-            </a:r>
-            <a:endParaRPr lang="en-US" sz="1200" dirty="0"/>
-          </a:p>
-        </p:txBody>
-      </p:sp>
-      <p:sp>
-        <p:nvSpPr>
-          <p:cNvPr id="9" name="Shape 6"/>
+              <a:rPr lang="en-US" sz="1000" dirty="0">
+                <a:solidFill>
+                  <a:srgbClr val="15241E"/>
+                </a:solidFill>
+                <a:latin typeface="Calibri" pitchFamily="34" charset="0"/>
+                <a:ea typeface="Calibri" pitchFamily="34" charset="-122"/>
+                <a:cs typeface="Calibri" pitchFamily="34" charset="-120"/>
+              </a:rPr>
+              <a:t>WebRTC for browser &amp; mobile: UDP, Opus, jitter buffer, echo cancellation. WebSocket for servers; SIP for phones.</a:t>
+            </a:r>
+            <a:endParaRPr lang="en-US" sz="1000" dirty="0"/>
+          </a:p>
+        </p:txBody>
+      </p:sp>
+      <p:sp>
+        <p:nvSpPr>
+          <p:cNvPr id="23" name="Text 20"/>
+          <p:cNvSpPr txBox="1"/>
+          <p:nvPr/>
+        </p:nvSpPr>
+        <p:spPr>
+          <a:xfrm>
+            <a:off x="621792" y="3931920"/>
+            <a:ext cx="1591056" cy="182880"/>
+          </a:xfrm>
+          <a:prstGeom prst="rect">
+            <a:avLst/>
+          </a:prstGeom>
+          <a:noFill/>
+          <a:ln/>
+        </p:spPr>
+        <p:txBody>
+          <a:bodyPr wrap="square" lIns="0" tIns="0" rIns="0" bIns="0" rtlCol="0" anchor="ctr"/>
+          <a:lstStyle/>
+          <a:p>
+            <a:pPr indent="0" marL="0">
+              <a:buNone/>
+            </a:pPr>
+            <a:r>
+              <a:rPr lang="en-US" sz="800" b="1" spc="100" kern="0" dirty="0">
+                <a:solidFill>
+                  <a:srgbClr val="4F6559"/>
+                </a:solidFill>
+                <a:latin typeface="Calibri" pitchFamily="34" charset="0"/>
+                <a:ea typeface="Calibri" pitchFamily="34" charset="-122"/>
+                <a:cs typeface="Calibri" pitchFamily="34" charset="-120"/>
+              </a:rPr>
+              <a:t>OPEN-SOURCE TOOLS</a:t>
+            </a:r>
+            <a:endParaRPr lang="en-US" sz="800" dirty="0"/>
+          </a:p>
+        </p:txBody>
+      </p:sp>
+      <p:sp>
+        <p:nvSpPr>
+          <p:cNvPr id="24" name="Text 21"/>
+          <p:cNvSpPr txBox="1"/>
+          <p:nvPr/>
+        </p:nvSpPr>
+        <p:spPr>
+          <a:xfrm>
+            <a:off x="621792" y="4114800"/>
+            <a:ext cx="1591056" cy="502920"/>
+          </a:xfrm>
+          <a:prstGeom prst="rect">
+            <a:avLst/>
+          </a:prstGeom>
+          <a:noFill/>
+          <a:ln/>
+        </p:spPr>
+        <p:txBody>
+          <a:bodyPr wrap="square" lIns="0" tIns="0" rIns="0" bIns="0" rtlCol="0" anchor="t"/>
+          <a:lstStyle/>
+          <a:p>
+            <a:pPr indent="0" marL="0">
+              <a:buNone/>
+            </a:pPr>
+            <a:r>
+              <a:rPr lang="en-US" sz="1000" b="1" dirty="0">
+                <a:solidFill>
+                  <a:srgbClr val="2F7A60"/>
+                </a:solidFill>
+                <a:latin typeface="Calibri" pitchFamily="34" charset="0"/>
+                <a:ea typeface="Calibri" pitchFamily="34" charset="-122"/>
+                <a:cs typeface="Calibri" pitchFamily="34" charset="-120"/>
+              </a:rPr>
+              <a:t>LiveKit</a:t>
+            </a:r>
+            <a:endParaRPr lang="en-US" sz="1000" dirty="0"/>
+          </a:p>
+          <a:p>
+            <a:pPr indent="0" marL="0">
+              <a:buNone/>
+            </a:pPr>
+            <a:r>
+              <a:rPr lang="en-US" sz="1000" b="1" dirty="0">
+                <a:solidFill>
+                  <a:srgbClr val="2F7A60"/>
+                </a:solidFill>
+                <a:latin typeface="Calibri" pitchFamily="34" charset="0"/>
+                <a:ea typeface="Calibri" pitchFamily="34" charset="-122"/>
+                <a:cs typeface="Calibri" pitchFamily="34" charset="-120"/>
+              </a:rPr>
+              <a:t>mediasoup</a:t>
+            </a:r>
+            <a:endParaRPr lang="en-US" sz="1000" dirty="0"/>
+          </a:p>
+          <a:p>
+            <a:pPr indent="0" marL="0">
+              <a:buNone/>
+            </a:pPr>
+            <a:r>
+              <a:rPr lang="en-US" sz="1000" b="1" dirty="0">
+                <a:solidFill>
+                  <a:srgbClr val="2F7A60"/>
+                </a:solidFill>
+                <a:latin typeface="Calibri" pitchFamily="34" charset="0"/>
+                <a:ea typeface="Calibri" pitchFamily="34" charset="-122"/>
+                <a:cs typeface="Calibri" pitchFamily="34" charset="-120"/>
+              </a:rPr>
+              <a:t>Janus Gateway</a:t>
+            </a:r>
+            <a:endParaRPr lang="en-US" sz="1000" dirty="0"/>
+          </a:p>
+        </p:txBody>
+      </p:sp>
+      <p:sp>
+        <p:nvSpPr>
+          <p:cNvPr id="25" name="Shape 22"/>
           <p:cNvSpPr/>
           <p:nvPr/>
         </p:nvSpPr>
         <p:spPr>
           <a:xfrm>
-            <a:off x="4709160" y="1481328"/>
-            <a:ext cx="3977640" cy="1554480"/>
+            <a:off x="2560320" y="2011680"/>
+            <a:ext cx="1920240" cy="2697480"/>
           </a:xfrm>
           <a:prstGeom prst="roundRect">
             <a:avLst>
-              <a:gd name="adj" fmla="val 5882"/>
+              <a:gd name="adj" fmla="val 4762"/>
             </a:avLst>
           </a:prstGeom>
           <a:solidFill>
-            <a:srgbClr val="F4F1F9"/>
+            <a:srgbClr val="FFFFFF"/>
           </a:solidFill>
           <a:ln w="12700">
             <a:solidFill>
-              <a:srgbClr val="E4DDF0"/>
+              <a:srgbClr val="CFE6D6"/>
             </a:solidFill>
             <a:prstDash val="solid"/>
           </a:ln>
@@ -2798,24 +3546,24 @@
       </p:sp>
       <p:sp>
         <p:nvSpPr>
-          <p:cNvPr id="10" name="Shape 7"/>
+          <p:cNvPr id="26" name="Shape 23"/>
           <p:cNvSpPr/>
           <p:nvPr/>
         </p:nvSpPr>
         <p:spPr>
           <a:xfrm>
-            <a:off x="4937760" y="1709928"/>
-            <a:ext cx="502920" cy="502920"/>
+            <a:off x="2724912" y="2176272"/>
+            <a:ext cx="384048" cy="384048"/>
           </a:xfrm>
           <a:prstGeom prst="ellipse">
             <a:avLst/>
           </a:prstGeom>
           <a:solidFill>
-            <a:srgbClr val="24163A"/>
+            <a:srgbClr val="FFB22E"/>
           </a:solidFill>
           <a:ln w="12700">
             <a:solidFill>
-              <a:srgbClr val="24163A"/>
+              <a:srgbClr val="FFB22E"/>
             </a:solidFill>
             <a:prstDash val="solid"/>
           </a:ln>
@@ -2823,7 +3571,7 @@
       </p:sp>
       <p:pic>
         <p:nvPicPr>
-          <p:cNvPr id="11" name="Image 1" descr="preencoded.png">    </p:cNvPr>
+          <p:cNvPr id="27" name="Image 1" descr="preencoded.png">    </p:cNvPr>
           <p:cNvPicPr>
             <a:picLocks noChangeAspect="1"/>
           </p:cNvPicPr>
@@ -2837,8 +3585,8 @@
         </p:blipFill>
         <p:spPr>
           <a:xfrm>
-            <a:off x="5065776" y="1837944"/>
-            <a:ext cx="246888" cy="246888"/>
+            <a:off x="2816352" y="2267712"/>
+            <a:ext cx="201168" cy="201168"/>
           </a:xfrm>
           <a:prstGeom prst="rect">
             <a:avLst/>
@@ -2847,14 +3595,14 @@
       </p:pic>
       <p:sp>
         <p:nvSpPr>
-          <p:cNvPr id="12" name="Text 8"/>
+          <p:cNvPr id="28" name="Text 24"/>
           <p:cNvSpPr txBox="1"/>
           <p:nvPr/>
         </p:nvSpPr>
         <p:spPr>
           <a:xfrm>
-            <a:off x="5577840" y="1709928"/>
-            <a:ext cx="2926080" cy="502920"/>
+            <a:off x="2724912" y="2651760"/>
+            <a:ext cx="1591056" cy="274320"/>
           </a:xfrm>
           <a:prstGeom prst="rect">
             <a:avLst/>
@@ -2870,30 +3618,30 @@
               <a:buNone/>
             </a:pPr>
             <a:r>
-              <a:rPr lang="en-US" sz="1600" b="1" dirty="0">
-                <a:solidFill>
-                  <a:srgbClr val="24163A"/>
-                </a:solidFill>
-                <a:latin typeface="Calibri" pitchFamily="34" charset="0"/>
-                <a:ea typeface="Calibri" pitchFamily="34" charset="-122"/>
-                <a:cs typeface="Calibri" pitchFamily="34" charset="-120"/>
-              </a:rPr>
-              <a:t>Modular &amp; swappable</a:t>
-            </a:r>
-            <a:endParaRPr lang="en-US" sz="1600" dirty="0"/>
-          </a:p>
-        </p:txBody>
-      </p:sp>
-      <p:sp>
-        <p:nvSpPr>
-          <p:cNvPr id="13" name="Text 9"/>
+              <a:rPr lang="en-US" sz="1400" b="1" dirty="0">
+                <a:solidFill>
+                  <a:srgbClr val="0E3B2E"/>
+                </a:solidFill>
+                <a:latin typeface="Calibri" pitchFamily="34" charset="0"/>
+                <a:ea typeface="Calibri" pitchFamily="34" charset="-122"/>
+                <a:cs typeface="Calibri" pitchFamily="34" charset="-120"/>
+              </a:rPr>
+              <a:t>VAD</a:t>
+            </a:r>
+            <a:endParaRPr lang="en-US" sz="1400" dirty="0"/>
+          </a:p>
+        </p:txBody>
+      </p:sp>
+      <p:sp>
+        <p:nvSpPr>
+          <p:cNvPr id="29" name="Text 25"/>
           <p:cNvSpPr txBox="1"/>
           <p:nvPr/>
         </p:nvSpPr>
         <p:spPr>
           <a:xfrm>
-            <a:off x="4937760" y="2304288"/>
-            <a:ext cx="3520440" cy="640080"/>
+            <a:off x="2724912" y="2971800"/>
+            <a:ext cx="1591056" cy="914400"/>
           </a:xfrm>
           <a:prstGeom prst="rect">
             <a:avLst/>
@@ -2909,42 +3657,154 @@
               <a:buNone/>
             </a:pPr>
             <a:r>
-              <a:rPr lang="en-US" sz="1200" dirty="0">
-                <a:solidFill>
-                  <a:srgbClr val="1E1A28"/>
-                </a:solidFill>
-                <a:latin typeface="Calibri" pitchFamily="34" charset="0"/>
-                <a:ea typeface="Calibri" pitchFamily="34" charset="-122"/>
-                <a:cs typeface="Calibri" pitchFamily="34" charset="-120"/>
-              </a:rPr>
-              <a:t>Need a new voice? Swap only the TTS model. STT and LLM stay untouched; each stage upgrades on its own schedule.</a:t>
-            </a:r>
-            <a:endParaRPr lang="en-US" sz="1200" dirty="0"/>
-          </a:p>
-        </p:txBody>
-      </p:sp>
-      <p:sp>
-        <p:nvSpPr>
-          <p:cNvPr id="14" name="Shape 10"/>
+              <a:rPr lang="en-US" sz="1000" dirty="0">
+                <a:solidFill>
+                  <a:srgbClr val="15241E"/>
+                </a:solidFill>
+                <a:latin typeface="Calibri" pitchFamily="34" charset="0"/>
+                <a:ea typeface="Calibri" pitchFamily="34" charset="-122"/>
+                <a:cs typeface="Calibri" pitchFamily="34" charset="-120"/>
+              </a:rPr>
+              <a:t>Labels each ~30 ms frame as speech or silence. Gates STT and fires barge-in when the user talks over the bot.</a:t>
+            </a:r>
+            <a:endParaRPr lang="en-US" sz="1000" dirty="0"/>
+          </a:p>
+        </p:txBody>
+      </p:sp>
+      <p:sp>
+        <p:nvSpPr>
+          <p:cNvPr id="30" name="Text 26"/>
+          <p:cNvSpPr txBox="1"/>
+          <p:nvPr/>
+        </p:nvSpPr>
+        <p:spPr>
+          <a:xfrm>
+            <a:off x="2724912" y="3931920"/>
+            <a:ext cx="1591056" cy="182880"/>
+          </a:xfrm>
+          <a:prstGeom prst="rect">
+            <a:avLst/>
+          </a:prstGeom>
+          <a:noFill/>
+          <a:ln/>
+        </p:spPr>
+        <p:txBody>
+          <a:bodyPr wrap="square" lIns="0" tIns="0" rIns="0" bIns="0" rtlCol="0" anchor="ctr"/>
+          <a:lstStyle/>
+          <a:p>
+            <a:pPr indent="0" marL="0">
+              <a:buNone/>
+            </a:pPr>
+            <a:r>
+              <a:rPr lang="en-US" sz="800" b="1" spc="100" kern="0" dirty="0">
+                <a:solidFill>
+                  <a:srgbClr val="4F6559"/>
+                </a:solidFill>
+                <a:latin typeface="Calibri" pitchFamily="34" charset="0"/>
+                <a:ea typeface="Calibri" pitchFamily="34" charset="-122"/>
+                <a:cs typeface="Calibri" pitchFamily="34" charset="-120"/>
+              </a:rPr>
+              <a:t>OPEN-SOURCE TOOLS</a:t>
+            </a:r>
+            <a:endParaRPr lang="en-US" sz="800" dirty="0"/>
+          </a:p>
+        </p:txBody>
+      </p:sp>
+      <p:sp>
+        <p:nvSpPr>
+          <p:cNvPr id="31" name="Text 27"/>
+          <p:cNvSpPr txBox="1"/>
+          <p:nvPr/>
+        </p:nvSpPr>
+        <p:spPr>
+          <a:xfrm>
+            <a:off x="2724912" y="4114800"/>
+            <a:ext cx="1591056" cy="502920"/>
+          </a:xfrm>
+          <a:prstGeom prst="rect">
+            <a:avLst/>
+          </a:prstGeom>
+          <a:noFill/>
+          <a:ln/>
+        </p:spPr>
+        <p:txBody>
+          <a:bodyPr wrap="square" lIns="0" tIns="0" rIns="0" bIns="0" rtlCol="0" anchor="t"/>
+          <a:lstStyle/>
+          <a:p>
+            <a:pPr indent="0" marL="0">
+              <a:buNone/>
+            </a:pPr>
+            <a:r>
+              <a:rPr lang="en-US" sz="1000" b="1" dirty="0">
+                <a:solidFill>
+                  <a:srgbClr val="2F7A60"/>
+                </a:solidFill>
+                <a:latin typeface="Calibri" pitchFamily="34" charset="0"/>
+                <a:ea typeface="Calibri" pitchFamily="34" charset="-122"/>
+                <a:cs typeface="Calibri" pitchFamily="34" charset="-120"/>
+              </a:rPr>
+              <a:t>Silero VAD</a:t>
+            </a:r>
+            <a:endParaRPr lang="en-US" sz="1000" dirty="0"/>
+          </a:p>
+          <a:p>
+            <a:pPr indent="0" marL="0">
+              <a:buNone/>
+            </a:pPr>
+            <a:r>
+              <a:rPr lang="en-US" sz="1000" b="1" dirty="0">
+                <a:solidFill>
+                  <a:srgbClr val="2F7A60"/>
+                </a:solidFill>
+                <a:latin typeface="Calibri" pitchFamily="34" charset="0"/>
+                <a:ea typeface="Calibri" pitchFamily="34" charset="-122"/>
+                <a:cs typeface="Calibri" pitchFamily="34" charset="-120"/>
+              </a:rPr>
+              <a:t>WebRTC VAD</a:t>
+            </a:r>
+            <a:endParaRPr lang="en-US" sz="1000" dirty="0"/>
+          </a:p>
+          <a:p>
+            <a:pPr indent="0" marL="0">
+              <a:buNone/>
+            </a:pPr>
+            <a:r>
+              <a:rPr lang="en-US" sz="1000" b="1" dirty="0">
+                <a:solidFill>
+                  <a:srgbClr val="2F7A60"/>
+                </a:solidFill>
+                <a:latin typeface="Calibri" pitchFamily="34" charset="0"/>
+                <a:ea typeface="Calibri" pitchFamily="34" charset="-122"/>
+                <a:cs typeface="Calibri" pitchFamily="34" charset="-120"/>
+              </a:rPr>
+              <a:t>TEN VAD</a:t>
+            </a:r>
+            <a:endParaRPr lang="en-US" sz="1000" dirty="0"/>
+          </a:p>
+        </p:txBody>
+      </p:sp>
+      <p:sp>
+        <p:nvSpPr>
+          <p:cNvPr id="32" name="Shape 28"/>
           <p:cNvSpPr/>
           <p:nvPr/>
         </p:nvSpPr>
         <p:spPr>
           <a:xfrm>
-            <a:off x="457200" y="3310128"/>
-            <a:ext cx="3977640" cy="1554480"/>
+            <a:off x="4663440" y="2011680"/>
+            <a:ext cx="1920240" cy="2697480"/>
           </a:xfrm>
           <a:prstGeom prst="roundRect">
             <a:avLst>
-              <a:gd name="adj" fmla="val 5882"/>
+              <a:gd name="adj" fmla="val 4762"/>
             </a:avLst>
           </a:prstGeom>
           <a:solidFill>
-            <a:srgbClr val="F4F1F9"/>
+            <a:srgbClr val="FFFFFF"/>
           </a:solidFill>
           <a:ln w="12700">
             <a:solidFill>
-              <a:srgbClr val="E4DDF0"/>
+              <a:srgbClr val="CFE6D6"/>
             </a:solidFill>
             <a:prstDash val="solid"/>
           </a:ln>
@@ -2952,24 +3812,24 @@
       </p:sp>
       <p:sp>
         <p:nvSpPr>
-          <p:cNvPr id="15" name="Shape 11"/>
+          <p:cNvPr id="33" name="Shape 29"/>
           <p:cNvSpPr/>
           <p:nvPr/>
         </p:nvSpPr>
         <p:spPr>
           <a:xfrm>
-            <a:off x="685800" y="3538728"/>
-            <a:ext cx="502920" cy="502920"/>
+            <a:off x="4828032" y="2176272"/>
+            <a:ext cx="384048" cy="384048"/>
           </a:xfrm>
           <a:prstGeom prst="ellipse">
             <a:avLst/>
           </a:prstGeom>
           <a:solidFill>
-            <a:srgbClr val="24163A"/>
+            <a:srgbClr val="F2545B"/>
           </a:solidFill>
           <a:ln w="12700">
             <a:solidFill>
-              <a:srgbClr val="24163A"/>
+              <a:srgbClr val="F2545B"/>
             </a:solidFill>
             <a:prstDash val="solid"/>
           </a:ln>
@@ -2977,7 +3837,7 @@
       </p:sp>
       <p:pic>
         <p:nvPicPr>
-          <p:cNvPr id="16" name="Image 2" descr="preencoded.png">    </p:cNvPr>
+          <p:cNvPr id="34" name="Image 2" descr="preencoded.png">    </p:cNvPr>
           <p:cNvPicPr>
             <a:picLocks noChangeAspect="1"/>
           </p:cNvPicPr>
@@ -2991,8 +3851,8 @@
         </p:blipFill>
         <p:spPr>
           <a:xfrm>
-            <a:off x="813816" y="3666744"/>
-            <a:ext cx="246888" cy="246888"/>
+            <a:off x="4919472" y="2267712"/>
+            <a:ext cx="201168" cy="201168"/>
           </a:xfrm>
           <a:prstGeom prst="rect">
             <a:avLst/>
@@ -3001,14 +3861,14 @@
       </p:pic>
       <p:sp>
         <p:nvSpPr>
-          <p:cNvPr id="17" name="Text 12"/>
+          <p:cNvPr id="35" name="Text 30"/>
           <p:cNvSpPr txBox="1"/>
           <p:nvPr/>
         </p:nvSpPr>
         <p:spPr>
           <a:xfrm>
-            <a:off x="1325880" y="3538728"/>
-            <a:ext cx="2926080" cy="502920"/>
+            <a:off x="4828032" y="2651760"/>
+            <a:ext cx="1591056" cy="274320"/>
           </a:xfrm>
           <a:prstGeom prst="rect">
             <a:avLst/>
@@ -3024,30 +3884,30 @@
               <a:buNone/>
             </a:pPr>
             <a:r>
-              <a:rPr lang="en-US" sz="1600" b="1" dirty="0">
-                <a:solidFill>
-                  <a:srgbClr val="24163A"/>
-                </a:solidFill>
-                <a:latin typeface="Calibri" pitchFamily="34" charset="0"/>
-                <a:ea typeface="Calibri" pitchFamily="34" charset="-122"/>
-                <a:cs typeface="Calibri" pitchFamily="34" charset="-120"/>
-              </a:rPr>
-              <a:t>Easy guardrails</a:t>
-            </a:r>
-            <a:endParaRPr lang="en-US" sz="1600" dirty="0"/>
-          </a:p>
-        </p:txBody>
-      </p:sp>
-      <p:sp>
-        <p:nvSpPr>
-          <p:cNvPr id="18" name="Text 13"/>
+              <a:rPr lang="en-US" sz="1400" b="1" dirty="0">
+                <a:solidFill>
+                  <a:srgbClr val="0E3B2E"/>
+                </a:solidFill>
+                <a:latin typeface="Calibri" pitchFamily="34" charset="0"/>
+                <a:ea typeface="Calibri" pitchFamily="34" charset="-122"/>
+                <a:cs typeface="Calibri" pitchFamily="34" charset="-120"/>
+              </a:rPr>
+              <a:t>Turn Detection</a:t>
+            </a:r>
+            <a:endParaRPr lang="en-US" sz="1400" dirty="0"/>
+          </a:p>
+        </p:txBody>
+      </p:sp>
+      <p:sp>
+        <p:nvSpPr>
+          <p:cNvPr id="36" name="Text 31"/>
           <p:cNvSpPr txBox="1"/>
           <p:nvPr/>
         </p:nvSpPr>
         <p:spPr>
           <a:xfrm>
-            <a:off x="685800" y="4133088"/>
-            <a:ext cx="3520440" cy="640080"/>
+            <a:off x="4828032" y="2971800"/>
+            <a:ext cx="1591056" cy="914400"/>
           </a:xfrm>
           <a:prstGeom prst="rect">
             <a:avLst/>
@@ -3063,42 +3923,154 @@
               <a:buNone/>
             </a:pPr>
             <a:r>
-              <a:rPr lang="en-US" sz="1200" dirty="0">
-                <a:solidFill>
-                  <a:srgbClr val="1E1A28"/>
-                </a:solidFill>
-                <a:latin typeface="Calibri" pitchFamily="34" charset="0"/>
-                <a:ea typeface="Calibri" pitchFamily="34" charset="-122"/>
-                <a:cs typeface="Calibri" pitchFamily="34" charset="-120"/>
-              </a:rPr>
-              <a:t>Run regex, NeMo Guardrails or Llama Guard on the intermediate text and block unsafe output before it ever reaches TTS.</a:t>
-            </a:r>
-            <a:endParaRPr lang="en-US" sz="1200" dirty="0"/>
-          </a:p>
-        </p:txBody>
-      </p:sp>
-      <p:sp>
-        <p:nvSpPr>
-          <p:cNvPr id="19" name="Shape 14"/>
+              <a:rPr lang="en-US" sz="1000" dirty="0">
+                <a:solidFill>
+                  <a:srgbClr val="15241E"/>
+                </a:solidFill>
+                <a:latin typeface="Calibri" pitchFamily="34" charset="0"/>
+                <a:ea typeface="Calibri" pitchFamily="34" charset="-122"/>
+                <a:cs typeface="Calibri" pitchFamily="34" charset="-120"/>
+              </a:rPr>
+              <a:t>Decides whether the user has finished or is only pausing. Semantic models beat fixed silence timeouts.</a:t>
+            </a:r>
+            <a:endParaRPr lang="en-US" sz="1000" dirty="0"/>
+          </a:p>
+        </p:txBody>
+      </p:sp>
+      <p:sp>
+        <p:nvSpPr>
+          <p:cNvPr id="37" name="Text 32"/>
+          <p:cNvSpPr txBox="1"/>
+          <p:nvPr/>
+        </p:nvSpPr>
+        <p:spPr>
+          <a:xfrm>
+            <a:off x="4828032" y="3931920"/>
+            <a:ext cx="1591056" cy="182880"/>
+          </a:xfrm>
+          <a:prstGeom prst="rect">
+            <a:avLst/>
+          </a:prstGeom>
+          <a:noFill/>
+          <a:ln/>
+        </p:spPr>
+        <p:txBody>
+          <a:bodyPr wrap="square" lIns="0" tIns="0" rIns="0" bIns="0" rtlCol="0" anchor="ctr"/>
+          <a:lstStyle/>
+          <a:p>
+            <a:pPr indent="0" marL="0">
+              <a:buNone/>
+            </a:pPr>
+            <a:r>
+              <a:rPr lang="en-US" sz="800" b="1" spc="100" kern="0" dirty="0">
+                <a:solidFill>
+                  <a:srgbClr val="4F6559"/>
+                </a:solidFill>
+                <a:latin typeface="Calibri" pitchFamily="34" charset="0"/>
+                <a:ea typeface="Calibri" pitchFamily="34" charset="-122"/>
+                <a:cs typeface="Calibri" pitchFamily="34" charset="-120"/>
+              </a:rPr>
+              <a:t>OPEN-SOURCE TOOLS</a:t>
+            </a:r>
+            <a:endParaRPr lang="en-US" sz="800" dirty="0"/>
+          </a:p>
+        </p:txBody>
+      </p:sp>
+      <p:sp>
+        <p:nvSpPr>
+          <p:cNvPr id="38" name="Text 33"/>
+          <p:cNvSpPr txBox="1"/>
+          <p:nvPr/>
+        </p:nvSpPr>
+        <p:spPr>
+          <a:xfrm>
+            <a:off x="4828032" y="4114800"/>
+            <a:ext cx="1591056" cy="502920"/>
+          </a:xfrm>
+          <a:prstGeom prst="rect">
+            <a:avLst/>
+          </a:prstGeom>
+          <a:noFill/>
+          <a:ln/>
+        </p:spPr>
+        <p:txBody>
+          <a:bodyPr wrap="square" lIns="0" tIns="0" rIns="0" bIns="0" rtlCol="0" anchor="t"/>
+          <a:lstStyle/>
+          <a:p>
+            <a:pPr indent="0" marL="0">
+              <a:buNone/>
+            </a:pPr>
+            <a:r>
+              <a:rPr lang="en-US" sz="1000" b="1" dirty="0">
+                <a:solidFill>
+                  <a:srgbClr val="2F7A60"/>
+                </a:solidFill>
+                <a:latin typeface="Calibri" pitchFamily="34" charset="0"/>
+                <a:ea typeface="Calibri" pitchFamily="34" charset="-122"/>
+                <a:cs typeface="Calibri" pitchFamily="34" charset="-120"/>
+              </a:rPr>
+              <a:t>LiveKit Turn Detector</a:t>
+            </a:r>
+            <a:endParaRPr lang="en-US" sz="1000" dirty="0"/>
+          </a:p>
+          <a:p>
+            <a:pPr indent="0" marL="0">
+              <a:buNone/>
+            </a:pPr>
+            <a:r>
+              <a:rPr lang="en-US" sz="1000" b="1" dirty="0">
+                <a:solidFill>
+                  <a:srgbClr val="2F7A60"/>
+                </a:solidFill>
+                <a:latin typeface="Calibri" pitchFamily="34" charset="0"/>
+                <a:ea typeface="Calibri" pitchFamily="34" charset="-122"/>
+                <a:cs typeface="Calibri" pitchFamily="34" charset="-120"/>
+              </a:rPr>
+              <a:t>Pipecat Smart Turn</a:t>
+            </a:r>
+            <a:endParaRPr lang="en-US" sz="1000" dirty="0"/>
+          </a:p>
+          <a:p>
+            <a:pPr indent="0" marL="0">
+              <a:buNone/>
+            </a:pPr>
+            <a:r>
+              <a:rPr lang="en-US" sz="1000" b="1" dirty="0">
+                <a:solidFill>
+                  <a:srgbClr val="2F7A60"/>
+                </a:solidFill>
+                <a:latin typeface="Calibri" pitchFamily="34" charset="0"/>
+                <a:ea typeface="Calibri" pitchFamily="34" charset="-122"/>
+                <a:cs typeface="Calibri" pitchFamily="34" charset="-120"/>
+              </a:rPr>
+              <a:t>TEN Turn Detection</a:t>
+            </a:r>
+            <a:endParaRPr lang="en-US" sz="1000" dirty="0"/>
+          </a:p>
+        </p:txBody>
+      </p:sp>
+      <p:sp>
+        <p:nvSpPr>
+          <p:cNvPr id="39" name="Shape 34"/>
           <p:cNvSpPr/>
           <p:nvPr/>
         </p:nvSpPr>
         <p:spPr>
           <a:xfrm>
-            <a:off x="4709160" y="3310128"/>
-            <a:ext cx="3977640" cy="1554480"/>
+            <a:off x="6766560" y="2011680"/>
+            <a:ext cx="1920240" cy="2697480"/>
           </a:xfrm>
           <a:prstGeom prst="roundRect">
             <a:avLst>
-              <a:gd name="adj" fmla="val 5882"/>
+              <a:gd name="adj" fmla="val 4762"/>
             </a:avLst>
           </a:prstGeom>
           <a:solidFill>
-            <a:srgbClr val="F4F1F9"/>
+            <a:srgbClr val="FFFFFF"/>
           </a:solidFill>
           <a:ln w="12700">
             <a:solidFill>
-              <a:srgbClr val="E4DDF0"/>
+              <a:srgbClr val="CFE6D6"/>
             </a:solidFill>
             <a:prstDash val="solid"/>
           </a:ln>
@@ -3106,24 +4078,24 @@
       </p:sp>
       <p:sp>
         <p:nvSpPr>
-          <p:cNvPr id="20" name="Shape 15"/>
+          <p:cNvPr id="40" name="Shape 35"/>
           <p:cNvSpPr/>
           <p:nvPr/>
         </p:nvSpPr>
         <p:spPr>
           <a:xfrm>
-            <a:off x="4937760" y="3538728"/>
-            <a:ext cx="502920" cy="502920"/>
+            <a:off x="6931152" y="2176272"/>
+            <a:ext cx="384048" cy="384048"/>
           </a:xfrm>
           <a:prstGeom prst="ellipse">
             <a:avLst/>
           </a:prstGeom>
           <a:solidFill>
-            <a:srgbClr val="24163A"/>
+            <a:srgbClr val="0E3B2E"/>
           </a:solidFill>
           <a:ln w="12700">
             <a:solidFill>
-              <a:srgbClr val="24163A"/>
+              <a:srgbClr val="0E3B2E"/>
             </a:solidFill>
             <a:prstDash val="solid"/>
           </a:ln>
@@ -3131,7 +4103,7 @@
       </p:sp>
       <p:pic>
         <p:nvPicPr>
-          <p:cNvPr id="21" name="Image 3" descr="preencoded.png">    </p:cNvPr>
+          <p:cNvPr id="41" name="Image 3" descr="preencoded.png">    </p:cNvPr>
           <p:cNvPicPr>
             <a:picLocks noChangeAspect="1"/>
           </p:cNvPicPr>
@@ -3145,8 +4117,8 @@
         </p:blipFill>
         <p:spPr>
           <a:xfrm>
-            <a:off x="5065776" y="3666744"/>
-            <a:ext cx="246888" cy="246888"/>
+            <a:off x="7022592" y="2267712"/>
+            <a:ext cx="201168" cy="201168"/>
           </a:xfrm>
           <a:prstGeom prst="rect">
             <a:avLst/>
@@ -3155,14 +4127,14 @@
       </p:pic>
       <p:sp>
         <p:nvSpPr>
-          <p:cNvPr id="22" name="Text 16"/>
+          <p:cNvPr id="42" name="Text 36"/>
           <p:cNvSpPr txBox="1"/>
           <p:nvPr/>
         </p:nvSpPr>
         <p:spPr>
           <a:xfrm>
-            <a:off x="5577840" y="3538728"/>
-            <a:ext cx="2926080" cy="502920"/>
+            <a:off x="6931152" y="2651760"/>
+            <a:ext cx="1591056" cy="274320"/>
           </a:xfrm>
           <a:prstGeom prst="rect">
             <a:avLst/>
@@ -3178,30 +4150,30 @@
               <a:buNone/>
             </a:pPr>
             <a:r>
-              <a:rPr lang="en-US" sz="1600" b="1" dirty="0">
-                <a:solidFill>
-                  <a:srgbClr val="24163A"/>
-                </a:solidFill>
-                <a:latin typeface="Calibri" pitchFamily="34" charset="0"/>
-                <a:ea typeface="Calibri" pitchFamily="34" charset="-122"/>
-                <a:cs typeface="Calibri" pitchFamily="34" charset="-120"/>
-              </a:rPr>
-              <a:t>Full observability</a:t>
-            </a:r>
-            <a:endParaRPr lang="en-US" sz="1600" dirty="0"/>
-          </a:p>
-        </p:txBody>
-      </p:sp>
-      <p:sp>
-        <p:nvSpPr>
-          <p:cNvPr id="23" name="Text 17"/>
+              <a:rPr lang="en-US" sz="1400" b="1" dirty="0">
+                <a:solidFill>
+                  <a:srgbClr val="0E3B2E"/>
+                </a:solidFill>
+                <a:latin typeface="Calibri" pitchFamily="34" charset="0"/>
+                <a:ea typeface="Calibri" pitchFamily="34" charset="-122"/>
+                <a:cs typeface="Calibri" pitchFamily="34" charset="-120"/>
+              </a:rPr>
+              <a:t>Orchestration</a:t>
+            </a:r>
+            <a:endParaRPr lang="en-US" sz="1400" dirty="0"/>
+          </a:p>
+        </p:txBody>
+      </p:sp>
+      <p:sp>
+        <p:nvSpPr>
+          <p:cNvPr id="43" name="Text 37"/>
           <p:cNvSpPr txBox="1"/>
           <p:nvPr/>
         </p:nvSpPr>
         <p:spPr>
           <a:xfrm>
-            <a:off x="4937760" y="4133088"/>
-            <a:ext cx="3520440" cy="640080"/>
+            <a:off x="6931152" y="2971800"/>
+            <a:ext cx="1591056" cy="914400"/>
           </a:xfrm>
           <a:prstGeom prst="rect">
             <a:avLst/>
@@ -3217,17 +4189,129 @@
               <a:buNone/>
             </a:pPr>
             <a:r>
-              <a:rPr lang="en-US" sz="1200" dirty="0">
-                <a:solidFill>
-                  <a:srgbClr val="1E1A28"/>
-                </a:solidFill>
-                <a:latin typeface="Calibri" pitchFamily="34" charset="0"/>
-                <a:ea typeface="Calibri" pitchFamily="34" charset="-122"/>
-                <a:cs typeface="Calibri" pitchFamily="34" charset="-120"/>
-              </a:rPr>
-              <a:t>An exact transcript of what the user said and what the AI replied makes debugging, QA and auditing straightforward.</a:t>
-            </a:r>
-            <a:endParaRPr lang="en-US" sz="1200" dirty="0"/>
+              <a:rPr lang="en-US" sz="1000" dirty="0">
+                <a:solidFill>
+                  <a:srgbClr val="15241E"/>
+                </a:solidFill>
+                <a:latin typeface="Calibri" pitchFamily="34" charset="0"/>
+                <a:ea typeface="Calibri" pitchFamily="34" charset="-122"/>
+                <a:cs typeface="Calibri" pitchFamily="34" charset="-120"/>
+              </a:rPr>
+              <a:t>Streams audio and text frames between stages; handles interruptions, TTS cancellation and conversation context.</a:t>
+            </a:r>
+            <a:endParaRPr lang="en-US" sz="1000" dirty="0"/>
+          </a:p>
+        </p:txBody>
+      </p:sp>
+      <p:sp>
+        <p:nvSpPr>
+          <p:cNvPr id="44" name="Text 38"/>
+          <p:cNvSpPr txBox="1"/>
+          <p:nvPr/>
+        </p:nvSpPr>
+        <p:spPr>
+          <a:xfrm>
+            <a:off x="6931152" y="3931920"/>
+            <a:ext cx="1591056" cy="182880"/>
+          </a:xfrm>
+          <a:prstGeom prst="rect">
+            <a:avLst/>
+          </a:prstGeom>
+          <a:noFill/>
+          <a:ln/>
+        </p:spPr>
+        <p:txBody>
+          <a:bodyPr wrap="square" lIns="0" tIns="0" rIns="0" bIns="0" rtlCol="0" anchor="ctr"/>
+          <a:lstStyle/>
+          <a:p>
+            <a:pPr indent="0" marL="0">
+              <a:buNone/>
+            </a:pPr>
+            <a:r>
+              <a:rPr lang="en-US" sz="800" b="1" spc="100" kern="0" dirty="0">
+                <a:solidFill>
+                  <a:srgbClr val="4F6559"/>
+                </a:solidFill>
+                <a:latin typeface="Calibri" pitchFamily="34" charset="0"/>
+                <a:ea typeface="Calibri" pitchFamily="34" charset="-122"/>
+                <a:cs typeface="Calibri" pitchFamily="34" charset="-120"/>
+              </a:rPr>
+              <a:t>OPEN-SOURCE TOOLS</a:t>
+            </a:r>
+            <a:endParaRPr lang="en-US" sz="800" dirty="0"/>
+          </a:p>
+        </p:txBody>
+      </p:sp>
+      <p:sp>
+        <p:nvSpPr>
+          <p:cNvPr id="45" name="Text 39"/>
+          <p:cNvSpPr txBox="1"/>
+          <p:nvPr/>
+        </p:nvSpPr>
+        <p:spPr>
+          <a:xfrm>
+            <a:off x="6931152" y="4114800"/>
+            <a:ext cx="1591056" cy="502920"/>
+          </a:xfrm>
+          <a:prstGeom prst="rect">
+            <a:avLst/>
+          </a:prstGeom>
+          <a:noFill/>
+          <a:ln/>
+        </p:spPr>
+        <p:txBody>
+          <a:bodyPr wrap="square" lIns="0" tIns="0" rIns="0" bIns="0" rtlCol="0" anchor="t"/>
+          <a:lstStyle/>
+          <a:p>
+            <a:pPr indent="0" marL="0">
+              <a:buNone/>
+            </a:pPr>
+            <a:r>
+              <a:rPr lang="en-US" sz="1000" b="1" dirty="0">
+                <a:solidFill>
+                  <a:srgbClr val="2F7A60"/>
+                </a:solidFill>
+                <a:latin typeface="Calibri" pitchFamily="34" charset="0"/>
+                <a:ea typeface="Calibri" pitchFamily="34" charset="-122"/>
+                <a:cs typeface="Calibri" pitchFamily="34" charset="-120"/>
+              </a:rPr>
+              <a:t>Pipecat</a:t>
+            </a:r>
+            <a:endParaRPr lang="en-US" sz="1000" dirty="0"/>
+          </a:p>
+          <a:p>
+            <a:pPr indent="0" marL="0">
+              <a:buNone/>
+            </a:pPr>
+            <a:r>
+              <a:rPr lang="en-US" sz="1000" b="1" dirty="0">
+                <a:solidFill>
+                  <a:srgbClr val="2F7A60"/>
+                </a:solidFill>
+                <a:latin typeface="Calibri" pitchFamily="34" charset="0"/>
+                <a:ea typeface="Calibri" pitchFamily="34" charset="-122"/>
+                <a:cs typeface="Calibri" pitchFamily="34" charset="-120"/>
+              </a:rPr>
+              <a:t>LiveKit Agents</a:t>
+            </a:r>
+            <a:endParaRPr lang="en-US" sz="1000" dirty="0"/>
+          </a:p>
+          <a:p>
+            <a:pPr indent="0" marL="0">
+              <a:buNone/>
+            </a:pPr>
+            <a:r>
+              <a:rPr lang="en-US" sz="1000" b="1" dirty="0">
+                <a:solidFill>
+                  <a:srgbClr val="2F7A60"/>
+                </a:solidFill>
+                <a:latin typeface="Calibri" pitchFamily="34" charset="0"/>
+                <a:ea typeface="Calibri" pitchFamily="34" charset="-122"/>
+                <a:cs typeface="Calibri" pitchFamily="34" charset="-120"/>
+              </a:rPr>
+              <a:t>TEN Framework</a:t>
+            </a:r>
+            <a:endParaRPr lang="en-US" sz="1000" dirty="0"/>
           </a:p>
         </p:txBody>
       </p:sp>
@@ -3245,7 +4329,7 @@
     <p:bg>
       <p:bgPr>
         <a:solidFill>
-          <a:srgbClr val="FFFFFF"/>
+          <a:srgbClr val="E6F2EA"/>
         </a:solidFill>
       </p:bgPr>
     </p:bg>
@@ -3288,17 +4372,17 @@
               <a:buNone/>
             </a:pPr>
             <a:r>
-              <a:rPr lang="en-US" sz="3400" b="1" dirty="0">
-                <a:solidFill>
-                  <a:srgbClr val="24163A"/>
+              <a:rPr lang="en-US" sz="3200" b="1" dirty="0">
+                <a:solidFill>
+                  <a:srgbClr val="0E3B2E"/>
                 </a:solidFill>
                 <a:latin typeface="Cambria" pitchFamily="34" charset="0"/>
                 <a:ea typeface="Cambria" pitchFamily="34" charset="-122"/>
                 <a:cs typeface="Cambria" pitchFamily="34" charset="-120"/>
               </a:rPr>
-              <a:t>The Trade-offs</a:t>
-            </a:r>
-            <a:endParaRPr lang="en-US" sz="3400" dirty="0"/>
+              <a:t>Why Cascaded Works</a:t>
+            </a:r>
+            <a:endParaRPr lang="en-US" sz="3200" dirty="0"/>
           </a:p>
         </p:txBody>
       </p:sp>
@@ -3329,13 +4413,13 @@
             <a:r>
               <a:rPr lang="en-US" sz="1500" dirty="0">
                 <a:solidFill>
-                  <a:srgbClr val="6B6480"/>
-                </a:solidFill>
-                <a:latin typeface="Calibri" pitchFamily="34" charset="0"/>
-                <a:ea typeface="Calibri" pitchFamily="34" charset="-122"/>
-                <a:cs typeface="Calibri" pitchFamily="34" charset="-120"/>
-              </a:rPr>
-              <a:t>What gets lost — and what gets expensive — when speech becomes text.</a:t>
+                  <a:srgbClr val="4F6559"/>
+                </a:solidFill>
+                <a:latin typeface="Calibri" pitchFamily="34" charset="0"/>
+                <a:ea typeface="Calibri" pitchFamily="34" charset="-122"/>
+                <a:cs typeface="Calibri" pitchFamily="34" charset="-120"/>
+              </a:rPr>
+              <a:t>Text in the middle buys control, clarity and flexibility.</a:t>
             </a:r>
             <a:endParaRPr lang="en-US" sz="1500" dirty="0"/>
           </a:p>
@@ -3349,26 +4433,53 @@
         </p:nvSpPr>
         <p:spPr>
           <a:xfrm>
-            <a:off x="457200" y="1527048"/>
-            <a:ext cx="502920" cy="502920"/>
-          </a:xfrm>
-          <a:prstGeom prst="ellipse">
-            <a:avLst/>
+            <a:off x="457200" y="1481328"/>
+            <a:ext cx="3977640" cy="1554480"/>
+          </a:xfrm>
+          <a:prstGeom prst="roundRect">
+            <a:avLst>
+              <a:gd name="adj" fmla="val 5882"/>
+            </a:avLst>
           </a:prstGeom>
           <a:solidFill>
-            <a:srgbClr val="F2545B"/>
+            <a:srgbClr val="FFFFFF"/>
           </a:solidFill>
           <a:ln w="12700">
             <a:solidFill>
-              <a:srgbClr val="F2545B"/>
+              <a:srgbClr val="CFE6D6"/>
             </a:solidFill>
             <a:prstDash val="solid"/>
           </a:ln>
         </p:spPr>
       </p:sp>
+      <p:sp>
+        <p:nvSpPr>
+          <p:cNvPr id="5" name="Shape 3"/>
+          <p:cNvSpPr/>
+          <p:nvPr/>
+        </p:nvSpPr>
+        <p:spPr>
+          <a:xfrm>
+            <a:off x="685800" y="1709928"/>
+            <a:ext cx="502920" cy="502920"/>
+          </a:xfrm>
+          <a:prstGeom prst="ellipse">
+            <a:avLst/>
+          </a:prstGeom>
+          <a:solidFill>
+            <a:srgbClr val="0E3B2E"/>
+          </a:solidFill>
+          <a:ln w="12700">
+            <a:solidFill>
+              <a:srgbClr val="0E3B2E"/>
+            </a:solidFill>
+            <a:prstDash val="solid"/>
+          </a:ln>
+        </p:spPr>
+      </p:sp>
       <p:pic>
         <p:nvPicPr>
-          <p:cNvPr id="5" name="Image 0" descr="preencoded.png">    </p:cNvPr>
+          <p:cNvPr id="6" name="Image 0" descr="preencoded.png">    </p:cNvPr>
           <p:cNvPicPr>
             <a:picLocks noChangeAspect="1"/>
           </p:cNvPicPr>
@@ -3382,7 +4493,7 @@
         </p:blipFill>
         <p:spPr>
           <a:xfrm>
-            <a:off x="585216" y="1655064"/>
+            <a:off x="813816" y="1837944"/>
             <a:ext cx="246888" cy="246888"/>
           </a:xfrm>
           <a:prstGeom prst="rect">
@@ -3392,14 +4503,14 @@
       </p:pic>
       <p:sp>
         <p:nvSpPr>
-          <p:cNvPr id="6" name="Text 3"/>
+          <p:cNvPr id="7" name="Text 4"/>
           <p:cNvSpPr txBox="1"/>
           <p:nvPr/>
         </p:nvSpPr>
         <p:spPr>
           <a:xfrm>
-            <a:off x="1143000" y="1481328"/>
-            <a:ext cx="3566160" cy="292608"/>
+            <a:off x="1325880" y="1709928"/>
+            <a:ext cx="2926080" cy="502920"/>
           </a:xfrm>
           <a:prstGeom prst="rect">
             <a:avLst/>
@@ -3415,30 +4526,30 @@
               <a:buNone/>
             </a:pPr>
             <a:r>
-              <a:rPr lang="en-US" sz="1500" b="1" dirty="0">
-                <a:solidFill>
-                  <a:srgbClr val="24163A"/>
-                </a:solidFill>
-                <a:latin typeface="Calibri" pitchFamily="34" charset="0"/>
-                <a:ea typeface="Calibri" pitchFamily="34" charset="-122"/>
-                <a:cs typeface="Calibri" pitchFamily="34" charset="-120"/>
-              </a:rPr>
-              <a:t>Paralinguistic blind spot</a:t>
-            </a:r>
-            <a:endParaRPr lang="en-US" sz="1500" dirty="0"/>
-          </a:p>
-        </p:txBody>
-      </p:sp>
-      <p:sp>
-        <p:nvSpPr>
-          <p:cNvPr id="7" name="Text 4"/>
+              <a:rPr lang="en-US" sz="1600" b="1" dirty="0">
+                <a:solidFill>
+                  <a:srgbClr val="0E3B2E"/>
+                </a:solidFill>
+                <a:latin typeface="Calibri" pitchFamily="34" charset="0"/>
+                <a:ea typeface="Calibri" pitchFamily="34" charset="-122"/>
+                <a:cs typeface="Calibri" pitchFamily="34" charset="-120"/>
+              </a:rPr>
+              <a:t>Best-in-class reasoning &amp; RAG</a:t>
+            </a:r>
+            <a:endParaRPr lang="en-US" sz="1600" dirty="0"/>
+          </a:p>
+        </p:txBody>
+      </p:sp>
+      <p:sp>
+        <p:nvSpPr>
+          <p:cNvPr id="8" name="Text 5"/>
           <p:cNvSpPr txBox="1"/>
           <p:nvPr/>
         </p:nvSpPr>
         <p:spPr>
           <a:xfrm>
-            <a:off x="1143000" y="1783080"/>
-            <a:ext cx="3566160" cy="603504"/>
+            <a:off x="685800" y="2304288"/>
+            <a:ext cx="3520440" cy="640080"/>
           </a:xfrm>
           <a:prstGeom prst="rect">
             <a:avLst/>
@@ -3456,13 +4567,13 @@
             <a:r>
               <a:rPr lang="en-US" sz="1200" dirty="0">
                 <a:solidFill>
-                  <a:srgbClr val="1E1A28"/>
-                </a:solidFill>
-                <a:latin typeface="Calibri" pitchFamily="34" charset="0"/>
-                <a:ea typeface="Calibri" pitchFamily="34" charset="-122"/>
-                <a:cs typeface="Calibri" pitchFamily="34" charset="-120"/>
-              </a:rPr>
-              <a:t>Text strips tone. A heavy sigh plus “Yeah, sure, whatever” is transcribed as agreement — and answered cheerfully.</a:t>
+                  <a:srgbClr val="15241E"/>
+                </a:solidFill>
+                <a:latin typeface="Calibri" pitchFamily="34" charset="0"/>
+                <a:ea typeface="Calibri" pitchFamily="34" charset="-122"/>
+                <a:cs typeface="Calibri" pitchFamily="34" charset="-120"/>
+              </a:rPr>
+              <a:t>Text LLMs lead on logic, JSON output and RAG — 100k tokens of manuals is easy in text, painful in an audio KV cache.</a:t>
             </a:r>
             <a:endParaRPr lang="en-US" sz="1200" dirty="0"/>
           </a:p>
@@ -3470,32 +4581,59 @@
       </p:sp>
       <p:sp>
         <p:nvSpPr>
-          <p:cNvPr id="8" name="Shape 5"/>
+          <p:cNvPr id="9" name="Shape 6"/>
           <p:cNvSpPr/>
           <p:nvPr/>
         </p:nvSpPr>
         <p:spPr>
           <a:xfrm>
-            <a:off x="457200" y="2532888"/>
-            <a:ext cx="502920" cy="502920"/>
-          </a:xfrm>
-          <a:prstGeom prst="ellipse">
-            <a:avLst/>
+            <a:off x="4709160" y="1481328"/>
+            <a:ext cx="3977640" cy="1554480"/>
+          </a:xfrm>
+          <a:prstGeom prst="roundRect">
+            <a:avLst>
+              <a:gd name="adj" fmla="val 5882"/>
+            </a:avLst>
           </a:prstGeom>
           <a:solidFill>
-            <a:srgbClr val="F2545B"/>
+            <a:srgbClr val="FFFFFF"/>
           </a:solidFill>
           <a:ln w="12700">
             <a:solidFill>
-              <a:srgbClr val="F2545B"/>
+              <a:srgbClr val="CFE6D6"/>
             </a:solidFill>
             <a:prstDash val="solid"/>
           </a:ln>
         </p:spPr>
       </p:sp>
+      <p:sp>
+        <p:nvSpPr>
+          <p:cNvPr id="10" name="Shape 7"/>
+          <p:cNvSpPr/>
+          <p:nvPr/>
+        </p:nvSpPr>
+        <p:spPr>
+          <a:xfrm>
+            <a:off x="4937760" y="1709928"/>
+            <a:ext cx="502920" cy="502920"/>
+          </a:xfrm>
+          <a:prstGeom prst="ellipse">
+            <a:avLst/>
+          </a:prstGeom>
+          <a:solidFill>
+            <a:srgbClr val="0E3B2E"/>
+          </a:solidFill>
+          <a:ln w="12700">
+            <a:solidFill>
+              <a:srgbClr val="0E3B2E"/>
+            </a:solidFill>
+            <a:prstDash val="solid"/>
+          </a:ln>
+        </p:spPr>
+      </p:sp>
       <p:pic>
         <p:nvPicPr>
-          <p:cNvPr id="9" name="Image 1" descr="preencoded.png">    </p:cNvPr>
+          <p:cNvPr id="11" name="Image 1" descr="preencoded.png">    </p:cNvPr>
           <p:cNvPicPr>
             <a:picLocks noChangeAspect="1"/>
           </p:cNvPicPr>
@@ -3509,7 +4647,7 @@
         </p:blipFill>
         <p:spPr>
           <a:xfrm>
-            <a:off x="585216" y="2660904"/>
+            <a:off x="5065776" y="1837944"/>
             <a:ext cx="246888" cy="246888"/>
           </a:xfrm>
           <a:prstGeom prst="rect">
@@ -3519,14 +4657,14 @@
       </p:pic>
       <p:sp>
         <p:nvSpPr>
-          <p:cNvPr id="10" name="Text 6"/>
+          <p:cNvPr id="12" name="Text 8"/>
           <p:cNvSpPr txBox="1"/>
           <p:nvPr/>
         </p:nvSpPr>
         <p:spPr>
           <a:xfrm>
-            <a:off x="1143000" y="2487168"/>
-            <a:ext cx="3566160" cy="292608"/>
+            <a:off x="5577840" y="1709928"/>
+            <a:ext cx="2926080" cy="502920"/>
           </a:xfrm>
           <a:prstGeom prst="rect">
             <a:avLst/>
@@ -3542,30 +4680,30 @@
               <a:buNone/>
             </a:pPr>
             <a:r>
-              <a:rPr lang="en-US" sz="1500" b="1" dirty="0">
-                <a:solidFill>
-                  <a:srgbClr val="24163A"/>
-                </a:solidFill>
-                <a:latin typeface="Calibri" pitchFamily="34" charset="0"/>
-                <a:ea typeface="Calibri" pitchFamily="34" charset="-122"/>
-                <a:cs typeface="Calibri" pitchFamily="34" charset="-120"/>
-              </a:rPr>
-              <a:t>The latency tax</a:t>
-            </a:r>
-            <a:endParaRPr lang="en-US" sz="1500" dirty="0"/>
-          </a:p>
-        </p:txBody>
-      </p:sp>
-      <p:sp>
-        <p:nvSpPr>
-          <p:cNvPr id="11" name="Text 7"/>
+              <a:rPr lang="en-US" sz="1600" b="1" dirty="0">
+                <a:solidFill>
+                  <a:srgbClr val="0E3B2E"/>
+                </a:solidFill>
+                <a:latin typeface="Calibri" pitchFamily="34" charset="0"/>
+                <a:ea typeface="Calibri" pitchFamily="34" charset="-122"/>
+                <a:cs typeface="Calibri" pitchFamily="34" charset="-120"/>
+              </a:rPr>
+              <a:t>Modular &amp; swappable</a:t>
+            </a:r>
+            <a:endParaRPr lang="en-US" sz="1600" dirty="0"/>
+          </a:p>
+        </p:txBody>
+      </p:sp>
+      <p:sp>
+        <p:nvSpPr>
+          <p:cNvPr id="13" name="Text 9"/>
           <p:cNvSpPr txBox="1"/>
           <p:nvPr/>
         </p:nvSpPr>
         <p:spPr>
           <a:xfrm>
-            <a:off x="1143000" y="2788920"/>
-            <a:ext cx="3566160" cy="603504"/>
+            <a:off x="4937760" y="2304288"/>
+            <a:ext cx="3520440" cy="640080"/>
           </a:xfrm>
           <a:prstGeom prst="rect">
             <a:avLst/>
@@ -3583,13 +4721,13 @@
             <a:r>
               <a:rPr lang="en-US" sz="1200" dirty="0">
                 <a:solidFill>
-                  <a:srgbClr val="1E1A28"/>
-                </a:solidFill>
-                <a:latin typeface="Calibri" pitchFamily="34" charset="0"/>
-                <a:ea typeface="Calibri" pitchFamily="34" charset="-122"/>
-                <a:cs typeface="Calibri" pitchFamily="34" charset="-120"/>
-              </a:rPr>
-              <a:t>Time-to-first-audio is the sum of every stage. Sub-800 ms takes heroic engineering.</a:t>
+                  <a:srgbClr val="15241E"/>
+                </a:solidFill>
+                <a:latin typeface="Calibri" pitchFamily="34" charset="0"/>
+                <a:ea typeface="Calibri" pitchFamily="34" charset="-122"/>
+                <a:cs typeface="Calibri" pitchFamily="34" charset="-120"/>
+              </a:rPr>
+              <a:t>Need a new voice? Swap only the TTS model. STT and LLM stay untouched; each stage upgrades on its own schedule.</a:t>
             </a:r>
             <a:endParaRPr lang="en-US" sz="1200" dirty="0"/>
           </a:p>
@@ -3597,32 +4735,59 @@
       </p:sp>
       <p:sp>
         <p:nvSpPr>
-          <p:cNvPr id="12" name="Shape 8"/>
+          <p:cNvPr id="14" name="Shape 10"/>
           <p:cNvSpPr/>
           <p:nvPr/>
         </p:nvSpPr>
         <p:spPr>
           <a:xfrm>
-            <a:off x="457200" y="3538728"/>
-            <a:ext cx="502920" cy="502920"/>
-          </a:xfrm>
-          <a:prstGeom prst="ellipse">
-            <a:avLst/>
+            <a:off x="457200" y="3310128"/>
+            <a:ext cx="3977640" cy="1554480"/>
+          </a:xfrm>
+          <a:prstGeom prst="roundRect">
+            <a:avLst>
+              <a:gd name="adj" fmla="val 5882"/>
+            </a:avLst>
           </a:prstGeom>
           <a:solidFill>
-            <a:srgbClr val="F2545B"/>
+            <a:srgbClr val="FFFFFF"/>
           </a:solidFill>
           <a:ln w="12700">
             <a:solidFill>
-              <a:srgbClr val="F2545B"/>
+              <a:srgbClr val="CFE6D6"/>
             </a:solidFill>
             <a:prstDash val="solid"/>
           </a:ln>
         </p:spPr>
       </p:sp>
+      <p:sp>
+        <p:nvSpPr>
+          <p:cNvPr id="15" name="Shape 11"/>
+          <p:cNvSpPr/>
+          <p:nvPr/>
+        </p:nvSpPr>
+        <p:spPr>
+          <a:xfrm>
+            <a:off x="685800" y="3538728"/>
+            <a:ext cx="502920" cy="502920"/>
+          </a:xfrm>
+          <a:prstGeom prst="ellipse">
+            <a:avLst/>
+          </a:prstGeom>
+          <a:solidFill>
+            <a:srgbClr val="0E3B2E"/>
+          </a:solidFill>
+          <a:ln w="12700">
+            <a:solidFill>
+              <a:srgbClr val="0E3B2E"/>
+            </a:solidFill>
+            <a:prstDash val="solid"/>
+          </a:ln>
+        </p:spPr>
+      </p:sp>
       <p:pic>
         <p:nvPicPr>
-          <p:cNvPr id="13" name="Image 2" descr="preencoded.png">    </p:cNvPr>
+          <p:cNvPr id="16" name="Image 2" descr="preencoded.png">    </p:cNvPr>
           <p:cNvPicPr>
             <a:picLocks noChangeAspect="1"/>
           </p:cNvPicPr>
@@ -3636,7 +4801,7 @@
         </p:blipFill>
         <p:spPr>
           <a:xfrm>
-            <a:off x="585216" y="3666744"/>
+            <a:off x="813816" y="3666744"/>
             <a:ext cx="246888" cy="246888"/>
           </a:xfrm>
           <a:prstGeom prst="rect">
@@ -3646,14 +4811,14 @@
       </p:pic>
       <p:sp>
         <p:nvSpPr>
-          <p:cNvPr id="14" name="Text 9"/>
+          <p:cNvPr id="17" name="Text 12"/>
           <p:cNvSpPr txBox="1"/>
           <p:nvPr/>
         </p:nvSpPr>
         <p:spPr>
           <a:xfrm>
-            <a:off x="1143000" y="3493008"/>
-            <a:ext cx="3566160" cy="292608"/>
+            <a:off x="1325880" y="3538728"/>
+            <a:ext cx="2926080" cy="502920"/>
           </a:xfrm>
           <a:prstGeom prst="rect">
             <a:avLst/>
@@ -3669,30 +4834,30 @@
               <a:buNone/>
             </a:pPr>
             <a:r>
-              <a:rPr lang="en-US" sz="1500" b="1" dirty="0">
-                <a:solidFill>
-                  <a:srgbClr val="24163A"/>
-                </a:solidFill>
-                <a:latin typeface="Calibri" pitchFamily="34" charset="0"/>
-                <a:ea typeface="Calibri" pitchFamily="34" charset="-122"/>
-                <a:cs typeface="Calibri" pitchFamily="34" charset="-120"/>
-              </a:rPr>
-              <a:t>Barge-in complexity</a:t>
-            </a:r>
-            <a:endParaRPr lang="en-US" sz="1500" dirty="0"/>
-          </a:p>
-        </p:txBody>
-      </p:sp>
-      <p:sp>
-        <p:nvSpPr>
-          <p:cNvPr id="15" name="Text 10"/>
+              <a:rPr lang="en-US" sz="1600" b="1" dirty="0">
+                <a:solidFill>
+                  <a:srgbClr val="0E3B2E"/>
+                </a:solidFill>
+                <a:latin typeface="Calibri" pitchFamily="34" charset="0"/>
+                <a:ea typeface="Calibri" pitchFamily="34" charset="-122"/>
+                <a:cs typeface="Calibri" pitchFamily="34" charset="-120"/>
+              </a:rPr>
+              <a:t>Easy guardrails</a:t>
+            </a:r>
+            <a:endParaRPr lang="en-US" sz="1600" dirty="0"/>
+          </a:p>
+        </p:txBody>
+      </p:sp>
+      <p:sp>
+        <p:nvSpPr>
+          <p:cNvPr id="18" name="Text 13"/>
           <p:cNvSpPr txBox="1"/>
           <p:nvPr/>
         </p:nvSpPr>
         <p:spPr>
           <a:xfrm>
-            <a:off x="1143000" y="3794760"/>
-            <a:ext cx="3566160" cy="603504"/>
+            <a:off x="685800" y="4133088"/>
+            <a:ext cx="3520440" cy="640080"/>
           </a:xfrm>
           <a:prstGeom prst="rect">
             <a:avLst/>
@@ -3710,13 +4875,13 @@
             <a:r>
               <a:rPr lang="en-US" sz="1200" dirty="0">
                 <a:solidFill>
-                  <a:srgbClr val="1E1A28"/>
-                </a:solidFill>
-                <a:latin typeface="Calibri" pitchFamily="34" charset="0"/>
-                <a:ea typeface="Calibri" pitchFamily="34" charset="-122"/>
-                <a:cs typeface="Calibri" pitchFamily="34" charset="-120"/>
-              </a:rPr>
-              <a:t>Interruptions need a separate VAD, instant TTS cancellation, buffer flushes and race-free state handling.</a:t>
+                  <a:srgbClr val="15241E"/>
+                </a:solidFill>
+                <a:latin typeface="Calibri" pitchFamily="34" charset="0"/>
+                <a:ea typeface="Calibri" pitchFamily="34" charset="-122"/>
+                <a:cs typeface="Calibri" pitchFamily="34" charset="-120"/>
+              </a:rPr>
+              <a:t>Run regex, NeMo Guardrails or Llama Guard on the intermediate text and block unsafe output before it ever reaches TTS.</a:t>
             </a:r>
             <a:endParaRPr lang="en-US" sz="1200" dirty="0"/>
           </a:p>
@@ -3724,26 +4889,26 @@
       </p:sp>
       <p:sp>
         <p:nvSpPr>
-          <p:cNvPr id="16" name="Shape 11"/>
+          <p:cNvPr id="19" name="Shape 14"/>
           <p:cNvSpPr/>
           <p:nvPr/>
         </p:nvSpPr>
         <p:spPr>
           <a:xfrm>
-            <a:off x="5029200" y="1417320"/>
-            <a:ext cx="3657600" cy="3246120"/>
+            <a:off x="4709160" y="3310128"/>
+            <a:ext cx="3977640" cy="1554480"/>
           </a:xfrm>
           <a:prstGeom prst="roundRect">
             <a:avLst>
-              <a:gd name="adj" fmla="val 2817"/>
+              <a:gd name="adj" fmla="val 5882"/>
             </a:avLst>
           </a:prstGeom>
           <a:solidFill>
-            <a:srgbClr val="24163A"/>
+            <a:srgbClr val="FFFFFF"/>
           </a:solidFill>
           <a:ln w="12700">
             <a:solidFill>
-              <a:srgbClr val="24163A"/>
+              <a:srgbClr val="CFE6D6"/>
             </a:solidFill>
             <a:prstDash val="solid"/>
           </a:ln>
@@ -3751,195 +4916,63 @@
       </p:sp>
       <p:sp>
         <p:nvSpPr>
-          <p:cNvPr id="17" name="Text 12"/>
-          <p:cNvSpPr txBox="1"/>
-          <p:nvPr/>
-        </p:nvSpPr>
-        <p:spPr>
-          <a:xfrm>
-            <a:off x="5257800" y="1600200"/>
-            <a:ext cx="3200400" cy="292608"/>
-          </a:xfrm>
-          <a:prstGeom prst="rect">
-            <a:avLst/>
-          </a:prstGeom>
-          <a:noFill/>
-          <a:ln/>
-        </p:spPr>
-        <p:txBody>
-          <a:bodyPr wrap="square" lIns="0" tIns="0" rIns="0" bIns="0" rtlCol="0" anchor="ctr"/>
-          <a:lstStyle/>
-          <a:p>
-            <a:pPr indent="0" marL="0">
-              <a:buNone/>
-            </a:pPr>
-            <a:r>
-              <a:rPr lang="en-US" sz="1400" b="1" dirty="0">
-                <a:solidFill>
-                  <a:srgbClr val="FFFFFF"/>
-                </a:solidFill>
-                <a:latin typeface="Calibri" pitchFamily="34" charset="0"/>
-                <a:ea typeface="Calibri" pitchFamily="34" charset="-122"/>
-                <a:cs typeface="Calibri" pitchFamily="34" charset="-120"/>
-              </a:rPr>
-              <a:t>Where time-to-first-audio goes</a:t>
-            </a:r>
-            <a:endParaRPr lang="en-US" sz="1400" dirty="0"/>
-          </a:p>
-        </p:txBody>
-      </p:sp>
-      <p:sp>
-        <p:nvSpPr>
-          <p:cNvPr id="18" name="Text 13"/>
-          <p:cNvSpPr txBox="1"/>
-          <p:nvPr/>
-        </p:nvSpPr>
-        <p:spPr>
-          <a:xfrm>
-            <a:off x="5257800" y="1874520"/>
-            <a:ext cx="3200400" cy="237744"/>
-          </a:xfrm>
-          <a:prstGeom prst="rect">
-            <a:avLst/>
-          </a:prstGeom>
-          <a:noFill/>
-          <a:ln/>
-        </p:spPr>
-        <p:txBody>
-          <a:bodyPr wrap="square" lIns="0" tIns="0" rIns="0" bIns="0" rtlCol="0" anchor="ctr"/>
-          <a:lstStyle/>
-          <a:p>
-            <a:pPr indent="0" marL="0">
-              <a:buNone/>
-            </a:pPr>
-            <a:r>
-              <a:rPr lang="en-US" sz="1000" i="1" dirty="0">
-                <a:solidFill>
-                  <a:srgbClr val="E4DDF0"/>
-                </a:solidFill>
-                <a:latin typeface="Calibri" pitchFamily="34" charset="0"/>
-                <a:ea typeface="Calibri" pitchFamily="34" charset="-122"/>
-                <a:cs typeface="Calibri" pitchFamily="34" charset="-120"/>
-              </a:rPr>
-              <a:t>Illustrative budget for an ~800 ms target</a:t>
-            </a:r>
-            <a:endParaRPr lang="en-US" sz="1000" dirty="0"/>
-          </a:p>
-        </p:txBody>
-      </p:sp>
-      <p:sp>
-        <p:nvSpPr>
-          <p:cNvPr id="19" name="Text 14"/>
-          <p:cNvSpPr txBox="1"/>
-          <p:nvPr/>
-        </p:nvSpPr>
-        <p:spPr>
-          <a:xfrm>
-            <a:off x="5257800" y="2286000"/>
-            <a:ext cx="3200400" cy="237744"/>
-          </a:xfrm>
-          <a:prstGeom prst="rect">
-            <a:avLst/>
-          </a:prstGeom>
-          <a:noFill/>
-          <a:ln/>
-        </p:spPr>
-        <p:txBody>
-          <a:bodyPr wrap="square" lIns="0" tIns="0" rIns="0" bIns="0" rtlCol="0" anchor="ctr"/>
-          <a:lstStyle/>
-          <a:p>
-            <a:pPr indent="0" marL="0">
-              <a:buNone/>
-            </a:pPr>
-            <a:r>
-              <a:rPr lang="en-US" sz="1100" dirty="0">
-                <a:solidFill>
-                  <a:srgbClr val="FFFFFF"/>
-                </a:solidFill>
-                <a:latin typeface="Calibri" pitchFamily="34" charset="0"/>
-                <a:ea typeface="Calibri" pitchFamily="34" charset="-122"/>
-                <a:cs typeface="Calibri" pitchFamily="34" charset="-120"/>
-              </a:rPr>
-              <a:t>VAD tail-padding</a:t>
-            </a:r>
-            <a:pPr indent="0" marL="0">
-              <a:buNone/>
-            </a:pPr>
-            <a:r>
-              <a:rPr lang="en-US" sz="1100" b="1" dirty="0">
-                <a:solidFill>
-                  <a:srgbClr val="E4DDF0"/>
-                </a:solidFill>
-                <a:latin typeface="Calibri" pitchFamily="34" charset="0"/>
-                <a:ea typeface="Calibri" pitchFamily="34" charset="-122"/>
-                <a:cs typeface="Calibri" pitchFamily="34" charset="-120"/>
-              </a:rPr>
-              <a:t>  200 ms</a:t>
-            </a:r>
-            <a:endParaRPr lang="en-US" sz="1100" dirty="0"/>
-          </a:p>
-        </p:txBody>
-      </p:sp>
-      <p:sp>
-        <p:nvSpPr>
           <p:cNvPr id="20" name="Shape 15"/>
           <p:cNvSpPr/>
           <p:nvPr/>
         </p:nvSpPr>
         <p:spPr>
           <a:xfrm>
-            <a:off x="5257800" y="2560320"/>
-            <a:ext cx="3200400" cy="146304"/>
-          </a:xfrm>
-          <a:prstGeom prst="rect">
+            <a:off x="4937760" y="3538728"/>
+            <a:ext cx="502920" cy="502920"/>
+          </a:xfrm>
+          <a:prstGeom prst="ellipse">
             <a:avLst/>
           </a:prstGeom>
           <a:solidFill>
-            <a:srgbClr val="3A2757"/>
+            <a:srgbClr val="0E3B2E"/>
           </a:solidFill>
           <a:ln w="12700">
             <a:solidFill>
-              <a:srgbClr val="3A2757"/>
+              <a:srgbClr val="0E3B2E"/>
             </a:solidFill>
             <a:prstDash val="solid"/>
           </a:ln>
         </p:spPr>
       </p:sp>
-      <p:sp>
-        <p:nvSpPr>
-          <p:cNvPr id="21" name="Shape 16"/>
-          <p:cNvSpPr/>
-          <p:nvPr/>
-        </p:nvSpPr>
-        <p:spPr>
-          <a:xfrm>
-            <a:off x="5257800" y="2560320"/>
-            <a:ext cx="800100" cy="146304"/>
-          </a:xfrm>
-          <a:prstGeom prst="rect">
-            <a:avLst/>
-          </a:prstGeom>
-          <a:solidFill>
-            <a:srgbClr val="E4DDF0"/>
-          </a:solidFill>
-          <a:ln w="12700">
-            <a:solidFill>
-              <a:srgbClr val="E4DDF0"/>
-            </a:solidFill>
-            <a:prstDash val="solid"/>
-          </a:ln>
-        </p:spPr>
-      </p:sp>
-      <p:sp>
-        <p:nvSpPr>
-          <p:cNvPr id="22" name="Text 17"/>
+      <p:pic>
+        <p:nvPicPr>
+          <p:cNvPr id="21" name="Image 3" descr="preencoded.png">    </p:cNvPr>
+          <p:cNvPicPr>
+            <a:picLocks noChangeAspect="1"/>
+          </p:cNvPicPr>
+          <p:nvPr/>
+        </p:nvPicPr>
+        <p:blipFill>
+          <a:blip r:embed="rId4"/>
+          <a:stretch>
+            <a:fillRect/>
+          </a:stretch>
+        </p:blipFill>
+        <p:spPr>
+          <a:xfrm>
+            <a:off x="5065776" y="3666744"/>
+            <a:ext cx="246888" cy="246888"/>
+          </a:xfrm>
+          <a:prstGeom prst="rect">
+            <a:avLst/>
+          </a:prstGeom>
+        </p:spPr>
+      </p:pic>
+      <p:sp>
+        <p:nvSpPr>
+          <p:cNvPr id="22" name="Text 16"/>
           <p:cNvSpPr txBox="1"/>
           <p:nvPr/>
         </p:nvSpPr>
         <p:spPr>
           <a:xfrm>
-            <a:off x="5257800" y="2834640"/>
-            <a:ext cx="3200400" cy="237744"/>
+            <a:off x="5577840" y="3538728"/>
+            <a:ext cx="2926080" cy="502920"/>
           </a:xfrm>
           <a:prstGeom prst="rect">
             <a:avLst/>
@@ -3955,94 +4988,30 @@
               <a:buNone/>
             </a:pPr>
             <a:r>
-              <a:rPr lang="en-US" sz="1100" dirty="0">
-                <a:solidFill>
-                  <a:srgbClr val="FFFFFF"/>
-                </a:solidFill>
-                <a:latin typeface="Calibri" pitchFamily="34" charset="0"/>
-                <a:ea typeface="Calibri" pitchFamily="34" charset="-122"/>
-                <a:cs typeface="Calibri" pitchFamily="34" charset="-120"/>
-              </a:rPr>
-              <a:t>STT inference</a:t>
-            </a:r>
-            <a:pPr indent="0" marL="0">
-              <a:buNone/>
-            </a:pPr>
-            <a:r>
-              <a:rPr lang="en-US" sz="1100" b="1" dirty="0">
-                <a:solidFill>
-                  <a:srgbClr val="2BB3A3"/>
-                </a:solidFill>
-                <a:latin typeface="Calibri" pitchFamily="34" charset="0"/>
-                <a:ea typeface="Calibri" pitchFamily="34" charset="-122"/>
-                <a:cs typeface="Calibri" pitchFamily="34" charset="-120"/>
-              </a:rPr>
-              <a:t>  150 ms</a:t>
-            </a:r>
-            <a:endParaRPr lang="en-US" sz="1100" dirty="0"/>
-          </a:p>
-        </p:txBody>
-      </p:sp>
-      <p:sp>
-        <p:nvSpPr>
-          <p:cNvPr id="23" name="Shape 18"/>
-          <p:cNvSpPr/>
-          <p:nvPr/>
-        </p:nvSpPr>
-        <p:spPr>
-          <a:xfrm>
-            <a:off x="5257800" y="3108960"/>
-            <a:ext cx="3200400" cy="146304"/>
-          </a:xfrm>
-          <a:prstGeom prst="rect">
-            <a:avLst/>
-          </a:prstGeom>
-          <a:solidFill>
-            <a:srgbClr val="3A2757"/>
-          </a:solidFill>
-          <a:ln w="12700">
-            <a:solidFill>
-              <a:srgbClr val="3A2757"/>
-            </a:solidFill>
-            <a:prstDash val="solid"/>
-          </a:ln>
-        </p:spPr>
-      </p:sp>
-      <p:sp>
-        <p:nvSpPr>
-          <p:cNvPr id="24" name="Shape 19"/>
-          <p:cNvSpPr/>
-          <p:nvPr/>
-        </p:nvSpPr>
-        <p:spPr>
-          <a:xfrm>
-            <a:off x="5257800" y="3108960"/>
-            <a:ext cx="600075" cy="146304"/>
-          </a:xfrm>
-          <a:prstGeom prst="rect">
-            <a:avLst/>
-          </a:prstGeom>
-          <a:solidFill>
-            <a:srgbClr val="2BB3A3"/>
-          </a:solidFill>
-          <a:ln w="12700">
-            <a:solidFill>
-              <a:srgbClr val="2BB3A3"/>
-            </a:solidFill>
-            <a:prstDash val="solid"/>
-          </a:ln>
-        </p:spPr>
-      </p:sp>
-      <p:sp>
-        <p:nvSpPr>
-          <p:cNvPr id="25" name="Text 20"/>
+              <a:rPr lang="en-US" sz="1600" b="1" dirty="0">
+                <a:solidFill>
+                  <a:srgbClr val="0E3B2E"/>
+                </a:solidFill>
+                <a:latin typeface="Calibri" pitchFamily="34" charset="0"/>
+                <a:ea typeface="Calibri" pitchFamily="34" charset="-122"/>
+                <a:cs typeface="Calibri" pitchFamily="34" charset="-120"/>
+              </a:rPr>
+              <a:t>Full observability</a:t>
+            </a:r>
+            <a:endParaRPr lang="en-US" sz="1600" dirty="0"/>
+          </a:p>
+        </p:txBody>
+      </p:sp>
+      <p:sp>
+        <p:nvSpPr>
+          <p:cNvPr id="23" name="Text 17"/>
           <p:cNvSpPr txBox="1"/>
           <p:nvPr/>
         </p:nvSpPr>
         <p:spPr>
           <a:xfrm>
-            <a:off x="5257800" y="3383280"/>
-            <a:ext cx="3200400" cy="237744"/>
+            <a:off x="4937760" y="4133088"/>
+            <a:ext cx="3520440" cy="640080"/>
           </a:xfrm>
           <a:prstGeom prst="rect">
             <a:avLst/>
@@ -4051,193 +5020,26 @@
           <a:ln/>
         </p:spPr>
         <p:txBody>
-          <a:bodyPr wrap="square" lIns="0" tIns="0" rIns="0" bIns="0" rtlCol="0" anchor="ctr"/>
+          <a:bodyPr wrap="square" lIns="0" tIns="0" rIns="0" bIns="0" rtlCol="0" anchor="t"/>
           <a:lstStyle/>
           <a:p>
             <a:pPr indent="0" marL="0">
               <a:buNone/>
             </a:pPr>
             <a:r>
-              <a:rPr lang="en-US" sz="1100" dirty="0">
-                <a:solidFill>
-                  <a:srgbClr val="FFFFFF"/>
-                </a:solidFill>
-                <a:latin typeface="Calibri" pitchFamily="34" charset="0"/>
-                <a:ea typeface="Calibri" pitchFamily="34" charset="-122"/>
-                <a:cs typeface="Calibri" pitchFamily="34" charset="-120"/>
-              </a:rPr>
-              <a:t>LLM prefill + 1st token</a:t>
-            </a:r>
-            <a:pPr indent="0" marL="0">
-              <a:buNone/>
-            </a:pPr>
-            <a:r>
-              <a:rPr lang="en-US" sz="1100" b="1" dirty="0">
-                <a:solidFill>
-                  <a:srgbClr val="FFB22E"/>
-                </a:solidFill>
-                <a:latin typeface="Calibri" pitchFamily="34" charset="0"/>
-                <a:ea typeface="Calibri" pitchFamily="34" charset="-122"/>
-                <a:cs typeface="Calibri" pitchFamily="34" charset="-120"/>
-              </a:rPr>
-              <a:t>  250 ms</a:t>
-            </a:r>
-            <a:endParaRPr lang="en-US" sz="1100" dirty="0"/>
-          </a:p>
-        </p:txBody>
-      </p:sp>
-      <p:sp>
-        <p:nvSpPr>
-          <p:cNvPr id="26" name="Shape 21"/>
-          <p:cNvSpPr/>
-          <p:nvPr/>
-        </p:nvSpPr>
-        <p:spPr>
-          <a:xfrm>
-            <a:off x="5257800" y="3657600"/>
-            <a:ext cx="3200400" cy="146304"/>
-          </a:xfrm>
-          <a:prstGeom prst="rect">
-            <a:avLst/>
-          </a:prstGeom>
-          <a:solidFill>
-            <a:srgbClr val="3A2757"/>
-          </a:solidFill>
-          <a:ln w="12700">
-            <a:solidFill>
-              <a:srgbClr val="3A2757"/>
-            </a:solidFill>
-            <a:prstDash val="solid"/>
-          </a:ln>
-        </p:spPr>
-      </p:sp>
-      <p:sp>
-        <p:nvSpPr>
-          <p:cNvPr id="27" name="Shape 22"/>
-          <p:cNvSpPr/>
-          <p:nvPr/>
-        </p:nvSpPr>
-        <p:spPr>
-          <a:xfrm>
-            <a:off x="5257800" y="3657600"/>
-            <a:ext cx="1000125" cy="146304"/>
-          </a:xfrm>
-          <a:prstGeom prst="rect">
-            <a:avLst/>
-          </a:prstGeom>
-          <a:solidFill>
-            <a:srgbClr val="FFB22E"/>
-          </a:solidFill>
-          <a:ln w="12700">
-            <a:solidFill>
-              <a:srgbClr val="FFB22E"/>
-            </a:solidFill>
-            <a:prstDash val="solid"/>
-          </a:ln>
-        </p:spPr>
-      </p:sp>
-      <p:sp>
-        <p:nvSpPr>
-          <p:cNvPr id="28" name="Text 23"/>
-          <p:cNvSpPr txBox="1"/>
-          <p:nvPr/>
-        </p:nvSpPr>
-        <p:spPr>
-          <a:xfrm>
-            <a:off x="5257800" y="3931920"/>
-            <a:ext cx="3200400" cy="237744"/>
-          </a:xfrm>
-          <a:prstGeom prst="rect">
-            <a:avLst/>
-          </a:prstGeom>
-          <a:noFill/>
-          <a:ln/>
-        </p:spPr>
-        <p:txBody>
-          <a:bodyPr wrap="square" lIns="0" tIns="0" rIns="0" bIns="0" rtlCol="0" anchor="ctr"/>
-          <a:lstStyle/>
-          <a:p>
-            <a:pPr indent="0" marL="0">
-              <a:buNone/>
-            </a:pPr>
-            <a:r>
-              <a:rPr lang="en-US" sz="1100" dirty="0">
-                <a:solidFill>
-                  <a:srgbClr val="FFFFFF"/>
-                </a:solidFill>
-                <a:latin typeface="Calibri" pitchFamily="34" charset="0"/>
-                <a:ea typeface="Calibri" pitchFamily="34" charset="-122"/>
-                <a:cs typeface="Calibri" pitchFamily="34" charset="-120"/>
-              </a:rPr>
-              <a:t>TTS prefill + 1st chunk</a:t>
-            </a:r>
-            <a:pPr indent="0" marL="0">
-              <a:buNone/>
-            </a:pPr>
-            <a:r>
-              <a:rPr lang="en-US" sz="1100" b="1" dirty="0">
-                <a:solidFill>
-                  <a:srgbClr val="F2545B"/>
-                </a:solidFill>
-                <a:latin typeface="Calibri" pitchFamily="34" charset="0"/>
-                <a:ea typeface="Calibri" pitchFamily="34" charset="-122"/>
-                <a:cs typeface="Calibri" pitchFamily="34" charset="-120"/>
-              </a:rPr>
-              <a:t>  200 ms</a:t>
-            </a:r>
-            <a:endParaRPr lang="en-US" sz="1100" dirty="0"/>
-          </a:p>
-        </p:txBody>
-      </p:sp>
-      <p:sp>
-        <p:nvSpPr>
-          <p:cNvPr id="29" name="Shape 24"/>
-          <p:cNvSpPr/>
-          <p:nvPr/>
-        </p:nvSpPr>
-        <p:spPr>
-          <a:xfrm>
-            <a:off x="5257800" y="4206240"/>
-            <a:ext cx="3200400" cy="146304"/>
-          </a:xfrm>
-          <a:prstGeom prst="rect">
-            <a:avLst/>
-          </a:prstGeom>
-          <a:solidFill>
-            <a:srgbClr val="3A2757"/>
-          </a:solidFill>
-          <a:ln w="12700">
-            <a:solidFill>
-              <a:srgbClr val="3A2757"/>
-            </a:solidFill>
-            <a:prstDash val="solid"/>
-          </a:ln>
-        </p:spPr>
-      </p:sp>
-      <p:sp>
-        <p:nvSpPr>
-          <p:cNvPr id="30" name="Shape 25"/>
-          <p:cNvSpPr/>
-          <p:nvPr/>
-        </p:nvSpPr>
-        <p:spPr>
-          <a:xfrm>
-            <a:off x="5257800" y="4206240"/>
-            <a:ext cx="800100" cy="146304"/>
-          </a:xfrm>
-          <a:prstGeom prst="rect">
-            <a:avLst/>
-          </a:prstGeom>
-          <a:solidFill>
-            <a:srgbClr val="F2545B"/>
-          </a:solidFill>
-          <a:ln w="12700">
-            <a:solidFill>
-              <a:srgbClr val="F2545B"/>
-            </a:solidFill>
-            <a:prstDash val="solid"/>
-          </a:ln>
-        </p:spPr>
+              <a:rPr lang="en-US" sz="1200" dirty="0">
+                <a:solidFill>
+                  <a:srgbClr val="15241E"/>
+                </a:solidFill>
+                <a:latin typeface="Calibri" pitchFamily="34" charset="0"/>
+                <a:ea typeface="Calibri" pitchFamily="34" charset="-122"/>
+                <a:cs typeface="Calibri" pitchFamily="34" charset="-120"/>
+              </a:rPr>
+              <a:t>An exact transcript of what the user said and what the AI replied makes debugging, QA and auditing straightforward.</a:t>
+            </a:r>
+            <a:endParaRPr lang="en-US" sz="1200" dirty="0"/>
+          </a:p>
+        </p:txBody>
       </p:sp>
     </p:spTree>
   </p:cSld>
@@ -4253,7 +5055,7 @@
     <p:bg>
       <p:bgPr>
         <a:solidFill>
-          <a:srgbClr val="FFFFFF"/>
+          <a:srgbClr val="E6F2EA"/>
         </a:solidFill>
       </p:bgPr>
     </p:bg>
@@ -4279,8 +5081,8 @@
         </p:nvSpPr>
         <p:spPr>
           <a:xfrm>
-            <a:off x="457200" y="320040"/>
-            <a:ext cx="8229600" cy="548640"/>
+            <a:off x="457200" y="365760"/>
+            <a:ext cx="8229600" cy="594360"/>
           </a:xfrm>
           <a:prstGeom prst="rect">
             <a:avLst/>
@@ -4296,14 +5098,1022 @@
               <a:buNone/>
             </a:pPr>
             <a:r>
-              <a:rPr lang="en-US" sz="3000" b="1" dirty="0">
-                <a:solidFill>
-                  <a:srgbClr val="24163A"/>
+              <a:rPr lang="en-US" sz="3200" b="1" dirty="0">
+                <a:solidFill>
+                  <a:srgbClr val="0E3B2E"/>
                 </a:solidFill>
                 <a:latin typeface="Cambria" pitchFamily="34" charset="0"/>
                 <a:ea typeface="Cambria" pitchFamily="34" charset="-122"/>
                 <a:cs typeface="Cambria" pitchFamily="34" charset="-120"/>
               </a:rPr>
+              <a:t>The Trade-offs</a:t>
+            </a:r>
+            <a:endParaRPr lang="en-US" sz="3200" dirty="0"/>
+          </a:p>
+        </p:txBody>
+      </p:sp>
+      <p:sp>
+        <p:nvSpPr>
+          <p:cNvPr id="3" name="Text 1"/>
+          <p:cNvSpPr txBox="1"/>
+          <p:nvPr/>
+        </p:nvSpPr>
+        <p:spPr>
+          <a:xfrm>
+            <a:off x="457200" y="932688"/>
+            <a:ext cx="8229600" cy="320040"/>
+          </a:xfrm>
+          <a:prstGeom prst="rect">
+            <a:avLst/>
+          </a:prstGeom>
+          <a:noFill/>
+          <a:ln/>
+        </p:spPr>
+        <p:txBody>
+          <a:bodyPr wrap="square" lIns="0" tIns="0" rIns="0" bIns="0" rtlCol="0" anchor="ctr"/>
+          <a:lstStyle/>
+          <a:p>
+            <a:pPr indent="0" marL="0">
+              <a:buNone/>
+            </a:pPr>
+            <a:r>
+              <a:rPr lang="en-US" sz="1500" dirty="0">
+                <a:solidFill>
+                  <a:srgbClr val="4F6559"/>
+                </a:solidFill>
+                <a:latin typeface="Calibri" pitchFamily="34" charset="0"/>
+                <a:ea typeface="Calibri" pitchFamily="34" charset="-122"/>
+                <a:cs typeface="Calibri" pitchFamily="34" charset="-120"/>
+              </a:rPr>
+              <a:t>What gets lost — and what gets expensive — when speech becomes text.</a:t>
+            </a:r>
+            <a:endParaRPr lang="en-US" sz="1500" dirty="0"/>
+          </a:p>
+        </p:txBody>
+      </p:sp>
+      <p:sp>
+        <p:nvSpPr>
+          <p:cNvPr id="4" name="Shape 2"/>
+          <p:cNvSpPr/>
+          <p:nvPr/>
+        </p:nvSpPr>
+        <p:spPr>
+          <a:xfrm>
+            <a:off x="457200" y="1527048"/>
+            <a:ext cx="502920" cy="502920"/>
+          </a:xfrm>
+          <a:prstGeom prst="ellipse">
+            <a:avLst/>
+          </a:prstGeom>
+          <a:solidFill>
+            <a:srgbClr val="F2545B"/>
+          </a:solidFill>
+          <a:ln w="12700">
+            <a:solidFill>
+              <a:srgbClr val="F2545B"/>
+            </a:solidFill>
+            <a:prstDash val="solid"/>
+          </a:ln>
+        </p:spPr>
+      </p:sp>
+      <p:pic>
+        <p:nvPicPr>
+          <p:cNvPr id="5" name="Image 0" descr="preencoded.png">    </p:cNvPr>
+          <p:cNvPicPr>
+            <a:picLocks noChangeAspect="1"/>
+          </p:cNvPicPr>
+          <p:nvPr/>
+        </p:nvPicPr>
+        <p:blipFill>
+          <a:blip r:embed="rId1"/>
+          <a:stretch>
+            <a:fillRect/>
+          </a:stretch>
+        </p:blipFill>
+        <p:spPr>
+          <a:xfrm>
+            <a:off x="585216" y="1655064"/>
+            <a:ext cx="246888" cy="246888"/>
+          </a:xfrm>
+          <a:prstGeom prst="rect">
+            <a:avLst/>
+          </a:prstGeom>
+        </p:spPr>
+      </p:pic>
+      <p:sp>
+        <p:nvSpPr>
+          <p:cNvPr id="6" name="Text 3"/>
+          <p:cNvSpPr txBox="1"/>
+          <p:nvPr/>
+        </p:nvSpPr>
+        <p:spPr>
+          <a:xfrm>
+            <a:off x="1143000" y="1481328"/>
+            <a:ext cx="3566160" cy="292608"/>
+          </a:xfrm>
+          <a:prstGeom prst="rect">
+            <a:avLst/>
+          </a:prstGeom>
+          <a:noFill/>
+          <a:ln/>
+        </p:spPr>
+        <p:txBody>
+          <a:bodyPr wrap="square" lIns="0" tIns="0" rIns="0" bIns="0" rtlCol="0" anchor="ctr"/>
+          <a:lstStyle/>
+          <a:p>
+            <a:pPr indent="0" marL="0">
+              <a:buNone/>
+            </a:pPr>
+            <a:r>
+              <a:rPr lang="en-US" sz="1500" b="1" dirty="0">
+                <a:solidFill>
+                  <a:srgbClr val="0E3B2E"/>
+                </a:solidFill>
+                <a:latin typeface="Calibri" pitchFamily="34" charset="0"/>
+                <a:ea typeface="Calibri" pitchFamily="34" charset="-122"/>
+                <a:cs typeface="Calibri" pitchFamily="34" charset="-120"/>
+              </a:rPr>
+              <a:t>Paralinguistic blind spot</a:t>
+            </a:r>
+            <a:endParaRPr lang="en-US" sz="1500" dirty="0"/>
+          </a:p>
+        </p:txBody>
+      </p:sp>
+      <p:sp>
+        <p:nvSpPr>
+          <p:cNvPr id="7" name="Text 4"/>
+          <p:cNvSpPr txBox="1"/>
+          <p:nvPr/>
+        </p:nvSpPr>
+        <p:spPr>
+          <a:xfrm>
+            <a:off x="1143000" y="1783080"/>
+            <a:ext cx="3566160" cy="603504"/>
+          </a:xfrm>
+          <a:prstGeom prst="rect">
+            <a:avLst/>
+          </a:prstGeom>
+          <a:noFill/>
+          <a:ln/>
+        </p:spPr>
+        <p:txBody>
+          <a:bodyPr wrap="square" lIns="0" tIns="0" rIns="0" bIns="0" rtlCol="0" anchor="t"/>
+          <a:lstStyle/>
+          <a:p>
+            <a:pPr indent="0" marL="0">
+              <a:buNone/>
+            </a:pPr>
+            <a:r>
+              <a:rPr lang="en-US" sz="1200" dirty="0">
+                <a:solidFill>
+                  <a:srgbClr val="15241E"/>
+                </a:solidFill>
+                <a:latin typeface="Calibri" pitchFamily="34" charset="0"/>
+                <a:ea typeface="Calibri" pitchFamily="34" charset="-122"/>
+                <a:cs typeface="Calibri" pitchFamily="34" charset="-120"/>
+              </a:rPr>
+              <a:t>Text strips tone. A heavy sigh plus “Yeah, sure, whatever” is transcribed as agreement — and answered cheerfully.</a:t>
+            </a:r>
+            <a:endParaRPr lang="en-US" sz="1200" dirty="0"/>
+          </a:p>
+        </p:txBody>
+      </p:sp>
+      <p:sp>
+        <p:nvSpPr>
+          <p:cNvPr id="8" name="Shape 5"/>
+          <p:cNvSpPr/>
+          <p:nvPr/>
+        </p:nvSpPr>
+        <p:spPr>
+          <a:xfrm>
+            <a:off x="457200" y="2532888"/>
+            <a:ext cx="502920" cy="502920"/>
+          </a:xfrm>
+          <a:prstGeom prst="ellipse">
+            <a:avLst/>
+          </a:prstGeom>
+          <a:solidFill>
+            <a:srgbClr val="F2545B"/>
+          </a:solidFill>
+          <a:ln w="12700">
+            <a:solidFill>
+              <a:srgbClr val="F2545B"/>
+            </a:solidFill>
+            <a:prstDash val="solid"/>
+          </a:ln>
+        </p:spPr>
+      </p:sp>
+      <p:pic>
+        <p:nvPicPr>
+          <p:cNvPr id="9" name="Image 1" descr="preencoded.png">    </p:cNvPr>
+          <p:cNvPicPr>
+            <a:picLocks noChangeAspect="1"/>
+          </p:cNvPicPr>
+          <p:nvPr/>
+        </p:nvPicPr>
+        <p:blipFill>
+          <a:blip r:embed="rId2"/>
+          <a:stretch>
+            <a:fillRect/>
+          </a:stretch>
+        </p:blipFill>
+        <p:spPr>
+          <a:xfrm>
+            <a:off x="585216" y="2660904"/>
+            <a:ext cx="246888" cy="246888"/>
+          </a:xfrm>
+          <a:prstGeom prst="rect">
+            <a:avLst/>
+          </a:prstGeom>
+        </p:spPr>
+      </p:pic>
+      <p:sp>
+        <p:nvSpPr>
+          <p:cNvPr id="10" name="Text 6"/>
+          <p:cNvSpPr txBox="1"/>
+          <p:nvPr/>
+        </p:nvSpPr>
+        <p:spPr>
+          <a:xfrm>
+            <a:off x="1143000" y="2487168"/>
+            <a:ext cx="3566160" cy="292608"/>
+          </a:xfrm>
+          <a:prstGeom prst="rect">
+            <a:avLst/>
+          </a:prstGeom>
+          <a:noFill/>
+          <a:ln/>
+        </p:spPr>
+        <p:txBody>
+          <a:bodyPr wrap="square" lIns="0" tIns="0" rIns="0" bIns="0" rtlCol="0" anchor="ctr"/>
+          <a:lstStyle/>
+          <a:p>
+            <a:pPr indent="0" marL="0">
+              <a:buNone/>
+            </a:pPr>
+            <a:r>
+              <a:rPr lang="en-US" sz="1500" b="1" dirty="0">
+                <a:solidFill>
+                  <a:srgbClr val="0E3B2E"/>
+                </a:solidFill>
+                <a:latin typeface="Calibri" pitchFamily="34" charset="0"/>
+                <a:ea typeface="Calibri" pitchFamily="34" charset="-122"/>
+                <a:cs typeface="Calibri" pitchFamily="34" charset="-120"/>
+              </a:rPr>
+              <a:t>The latency tax</a:t>
+            </a:r>
+            <a:endParaRPr lang="en-US" sz="1500" dirty="0"/>
+          </a:p>
+        </p:txBody>
+      </p:sp>
+      <p:sp>
+        <p:nvSpPr>
+          <p:cNvPr id="11" name="Text 7"/>
+          <p:cNvSpPr txBox="1"/>
+          <p:nvPr/>
+        </p:nvSpPr>
+        <p:spPr>
+          <a:xfrm>
+            <a:off x="1143000" y="2788920"/>
+            <a:ext cx="3566160" cy="603504"/>
+          </a:xfrm>
+          <a:prstGeom prst="rect">
+            <a:avLst/>
+          </a:prstGeom>
+          <a:noFill/>
+          <a:ln/>
+        </p:spPr>
+        <p:txBody>
+          <a:bodyPr wrap="square" lIns="0" tIns="0" rIns="0" bIns="0" rtlCol="0" anchor="t"/>
+          <a:lstStyle/>
+          <a:p>
+            <a:pPr indent="0" marL="0">
+              <a:buNone/>
+            </a:pPr>
+            <a:r>
+              <a:rPr lang="en-US" sz="1200" dirty="0">
+                <a:solidFill>
+                  <a:srgbClr val="15241E"/>
+                </a:solidFill>
+                <a:latin typeface="Calibri" pitchFamily="34" charset="0"/>
+                <a:ea typeface="Calibri" pitchFamily="34" charset="-122"/>
+                <a:cs typeface="Calibri" pitchFamily="34" charset="-120"/>
+              </a:rPr>
+              <a:t>Time-to-first-audio is the sum of every stage. Sub-800 ms takes heroic engineering.</a:t>
+            </a:r>
+            <a:endParaRPr lang="en-US" sz="1200" dirty="0"/>
+          </a:p>
+        </p:txBody>
+      </p:sp>
+      <p:sp>
+        <p:nvSpPr>
+          <p:cNvPr id="12" name="Shape 8"/>
+          <p:cNvSpPr/>
+          <p:nvPr/>
+        </p:nvSpPr>
+        <p:spPr>
+          <a:xfrm>
+            <a:off x="457200" y="3538728"/>
+            <a:ext cx="502920" cy="502920"/>
+          </a:xfrm>
+          <a:prstGeom prst="ellipse">
+            <a:avLst/>
+          </a:prstGeom>
+          <a:solidFill>
+            <a:srgbClr val="F2545B"/>
+          </a:solidFill>
+          <a:ln w="12700">
+            <a:solidFill>
+              <a:srgbClr val="F2545B"/>
+            </a:solidFill>
+            <a:prstDash val="solid"/>
+          </a:ln>
+        </p:spPr>
+      </p:sp>
+      <p:pic>
+        <p:nvPicPr>
+          <p:cNvPr id="13" name="Image 2" descr="preencoded.png">    </p:cNvPr>
+          <p:cNvPicPr>
+            <a:picLocks noChangeAspect="1"/>
+          </p:cNvPicPr>
+          <p:nvPr/>
+        </p:nvPicPr>
+        <p:blipFill>
+          <a:blip r:embed="rId3"/>
+          <a:stretch>
+            <a:fillRect/>
+          </a:stretch>
+        </p:blipFill>
+        <p:spPr>
+          <a:xfrm>
+            <a:off x="585216" y="3666744"/>
+            <a:ext cx="246888" cy="246888"/>
+          </a:xfrm>
+          <a:prstGeom prst="rect">
+            <a:avLst/>
+          </a:prstGeom>
+        </p:spPr>
+      </p:pic>
+      <p:sp>
+        <p:nvSpPr>
+          <p:cNvPr id="14" name="Text 9"/>
+          <p:cNvSpPr txBox="1"/>
+          <p:nvPr/>
+        </p:nvSpPr>
+        <p:spPr>
+          <a:xfrm>
+            <a:off x="1143000" y="3493008"/>
+            <a:ext cx="3566160" cy="292608"/>
+          </a:xfrm>
+          <a:prstGeom prst="rect">
+            <a:avLst/>
+          </a:prstGeom>
+          <a:noFill/>
+          <a:ln/>
+        </p:spPr>
+        <p:txBody>
+          <a:bodyPr wrap="square" lIns="0" tIns="0" rIns="0" bIns="0" rtlCol="0" anchor="ctr"/>
+          <a:lstStyle/>
+          <a:p>
+            <a:pPr indent="0" marL="0">
+              <a:buNone/>
+            </a:pPr>
+            <a:r>
+              <a:rPr lang="en-US" sz="1500" b="1" dirty="0">
+                <a:solidFill>
+                  <a:srgbClr val="0E3B2E"/>
+                </a:solidFill>
+                <a:latin typeface="Calibri" pitchFamily="34" charset="0"/>
+                <a:ea typeface="Calibri" pitchFamily="34" charset="-122"/>
+                <a:cs typeface="Calibri" pitchFamily="34" charset="-120"/>
+              </a:rPr>
+              <a:t>Barge-in complexity</a:t>
+            </a:r>
+            <a:endParaRPr lang="en-US" sz="1500" dirty="0"/>
+          </a:p>
+        </p:txBody>
+      </p:sp>
+      <p:sp>
+        <p:nvSpPr>
+          <p:cNvPr id="15" name="Text 10"/>
+          <p:cNvSpPr txBox="1"/>
+          <p:nvPr/>
+        </p:nvSpPr>
+        <p:spPr>
+          <a:xfrm>
+            <a:off x="1143000" y="3794760"/>
+            <a:ext cx="3566160" cy="603504"/>
+          </a:xfrm>
+          <a:prstGeom prst="rect">
+            <a:avLst/>
+          </a:prstGeom>
+          <a:noFill/>
+          <a:ln/>
+        </p:spPr>
+        <p:txBody>
+          <a:bodyPr wrap="square" lIns="0" tIns="0" rIns="0" bIns="0" rtlCol="0" anchor="t"/>
+          <a:lstStyle/>
+          <a:p>
+            <a:pPr indent="0" marL="0">
+              <a:buNone/>
+            </a:pPr>
+            <a:r>
+              <a:rPr lang="en-US" sz="1200" dirty="0">
+                <a:solidFill>
+                  <a:srgbClr val="15241E"/>
+                </a:solidFill>
+                <a:latin typeface="Calibri" pitchFamily="34" charset="0"/>
+                <a:ea typeface="Calibri" pitchFamily="34" charset="-122"/>
+                <a:cs typeface="Calibri" pitchFamily="34" charset="-120"/>
+              </a:rPr>
+              <a:t>Interruptions need a separate VAD, instant TTS cancellation, buffer flushes and race-free state handling.</a:t>
+            </a:r>
+            <a:endParaRPr lang="en-US" sz="1200" dirty="0"/>
+          </a:p>
+        </p:txBody>
+      </p:sp>
+      <p:sp>
+        <p:nvSpPr>
+          <p:cNvPr id="16" name="Shape 11"/>
+          <p:cNvSpPr/>
+          <p:nvPr/>
+        </p:nvSpPr>
+        <p:spPr>
+          <a:xfrm>
+            <a:off x="5029200" y="1417320"/>
+            <a:ext cx="3657600" cy="3246120"/>
+          </a:xfrm>
+          <a:prstGeom prst="roundRect">
+            <a:avLst>
+              <a:gd name="adj" fmla="val 2817"/>
+            </a:avLst>
+          </a:prstGeom>
+          <a:solidFill>
+            <a:srgbClr val="0E3B2E"/>
+          </a:solidFill>
+          <a:ln w="12700">
+            <a:solidFill>
+              <a:srgbClr val="0E3B2E"/>
+            </a:solidFill>
+            <a:prstDash val="solid"/>
+          </a:ln>
+        </p:spPr>
+      </p:sp>
+      <p:sp>
+        <p:nvSpPr>
+          <p:cNvPr id="17" name="Text 12"/>
+          <p:cNvSpPr txBox="1"/>
+          <p:nvPr/>
+        </p:nvSpPr>
+        <p:spPr>
+          <a:xfrm>
+            <a:off x="5257800" y="1600200"/>
+            <a:ext cx="3200400" cy="292608"/>
+          </a:xfrm>
+          <a:prstGeom prst="rect">
+            <a:avLst/>
+          </a:prstGeom>
+          <a:noFill/>
+          <a:ln/>
+        </p:spPr>
+        <p:txBody>
+          <a:bodyPr wrap="square" lIns="0" tIns="0" rIns="0" bIns="0" rtlCol="0" anchor="ctr"/>
+          <a:lstStyle/>
+          <a:p>
+            <a:pPr indent="0" marL="0">
+              <a:buNone/>
+            </a:pPr>
+            <a:r>
+              <a:rPr lang="en-US" sz="1400" b="1" dirty="0">
+                <a:solidFill>
+                  <a:srgbClr val="FFFFFF"/>
+                </a:solidFill>
+                <a:latin typeface="Calibri" pitchFamily="34" charset="0"/>
+                <a:ea typeface="Calibri" pitchFamily="34" charset="-122"/>
+                <a:cs typeface="Calibri" pitchFamily="34" charset="-120"/>
+              </a:rPr>
+              <a:t>Where time-to-first-audio goes</a:t>
+            </a:r>
+            <a:endParaRPr lang="en-US" sz="1400" dirty="0"/>
+          </a:p>
+        </p:txBody>
+      </p:sp>
+      <p:sp>
+        <p:nvSpPr>
+          <p:cNvPr id="18" name="Text 13"/>
+          <p:cNvSpPr txBox="1"/>
+          <p:nvPr/>
+        </p:nvSpPr>
+        <p:spPr>
+          <a:xfrm>
+            <a:off x="5257800" y="1874520"/>
+            <a:ext cx="3200400" cy="237744"/>
+          </a:xfrm>
+          <a:prstGeom prst="rect">
+            <a:avLst/>
+          </a:prstGeom>
+          <a:noFill/>
+          <a:ln/>
+        </p:spPr>
+        <p:txBody>
+          <a:bodyPr wrap="square" lIns="0" tIns="0" rIns="0" bIns="0" rtlCol="0" anchor="ctr"/>
+          <a:lstStyle/>
+          <a:p>
+            <a:pPr indent="0" marL="0">
+              <a:buNone/>
+            </a:pPr>
+            <a:r>
+              <a:rPr lang="en-US" sz="1000" i="1" dirty="0">
+                <a:solidFill>
+                  <a:srgbClr val="CFE6D6"/>
+                </a:solidFill>
+                <a:latin typeface="Calibri" pitchFamily="34" charset="0"/>
+                <a:ea typeface="Calibri" pitchFamily="34" charset="-122"/>
+                <a:cs typeface="Calibri" pitchFamily="34" charset="-120"/>
+              </a:rPr>
+              <a:t>Illustrative budget for an ~800 ms target</a:t>
+            </a:r>
+            <a:endParaRPr lang="en-US" sz="1000" dirty="0"/>
+          </a:p>
+        </p:txBody>
+      </p:sp>
+      <p:sp>
+        <p:nvSpPr>
+          <p:cNvPr id="19" name="Text 14"/>
+          <p:cNvSpPr txBox="1"/>
+          <p:nvPr/>
+        </p:nvSpPr>
+        <p:spPr>
+          <a:xfrm>
+            <a:off x="5257800" y="2286000"/>
+            <a:ext cx="3200400" cy="237744"/>
+          </a:xfrm>
+          <a:prstGeom prst="rect">
+            <a:avLst/>
+          </a:prstGeom>
+          <a:noFill/>
+          <a:ln/>
+        </p:spPr>
+        <p:txBody>
+          <a:bodyPr wrap="square" lIns="0" tIns="0" rIns="0" bIns="0" rtlCol="0" anchor="ctr"/>
+          <a:lstStyle/>
+          <a:p>
+            <a:pPr indent="0" marL="0">
+              <a:buNone/>
+            </a:pPr>
+            <a:r>
+              <a:rPr lang="en-US" sz="1100" dirty="0">
+                <a:solidFill>
+                  <a:srgbClr val="FFFFFF"/>
+                </a:solidFill>
+                <a:latin typeface="Calibri" pitchFamily="34" charset="0"/>
+                <a:ea typeface="Calibri" pitchFamily="34" charset="-122"/>
+                <a:cs typeface="Calibri" pitchFamily="34" charset="-120"/>
+              </a:rPr>
+              <a:t>VAD tail-padding</a:t>
+            </a:r>
+            <a:pPr indent="0" marL="0">
+              <a:buNone/>
+            </a:pPr>
+            <a:r>
+              <a:rPr lang="en-US" sz="1100" b="1" dirty="0">
+                <a:solidFill>
+                  <a:srgbClr val="CFE6D6"/>
+                </a:solidFill>
+                <a:latin typeface="Calibri" pitchFamily="34" charset="0"/>
+                <a:ea typeface="Calibri" pitchFamily="34" charset="-122"/>
+                <a:cs typeface="Calibri" pitchFamily="34" charset="-120"/>
+              </a:rPr>
+              <a:t>  200 ms</a:t>
+            </a:r>
+            <a:endParaRPr lang="en-US" sz="1100" dirty="0"/>
+          </a:p>
+        </p:txBody>
+      </p:sp>
+      <p:sp>
+        <p:nvSpPr>
+          <p:cNvPr id="20" name="Shape 15"/>
+          <p:cNvSpPr/>
+          <p:nvPr/>
+        </p:nvSpPr>
+        <p:spPr>
+          <a:xfrm>
+            <a:off x="5257800" y="2560320"/>
+            <a:ext cx="3200400" cy="146304"/>
+          </a:xfrm>
+          <a:prstGeom prst="rect">
+            <a:avLst/>
+          </a:prstGeom>
+          <a:solidFill>
+            <a:srgbClr val="185443"/>
+          </a:solidFill>
+          <a:ln w="12700">
+            <a:solidFill>
+              <a:srgbClr val="185443"/>
+            </a:solidFill>
+            <a:prstDash val="solid"/>
+          </a:ln>
+        </p:spPr>
+      </p:sp>
+      <p:sp>
+        <p:nvSpPr>
+          <p:cNvPr id="21" name="Shape 16"/>
+          <p:cNvSpPr/>
+          <p:nvPr/>
+        </p:nvSpPr>
+        <p:spPr>
+          <a:xfrm>
+            <a:off x="5257800" y="2560320"/>
+            <a:ext cx="800100" cy="146304"/>
+          </a:xfrm>
+          <a:prstGeom prst="rect">
+            <a:avLst/>
+          </a:prstGeom>
+          <a:solidFill>
+            <a:srgbClr val="CFE6D6"/>
+          </a:solidFill>
+          <a:ln w="12700">
+            <a:solidFill>
+              <a:srgbClr val="CFE6D6"/>
+            </a:solidFill>
+            <a:prstDash val="solid"/>
+          </a:ln>
+        </p:spPr>
+      </p:sp>
+      <p:sp>
+        <p:nvSpPr>
+          <p:cNvPr id="22" name="Text 17"/>
+          <p:cNvSpPr txBox="1"/>
+          <p:nvPr/>
+        </p:nvSpPr>
+        <p:spPr>
+          <a:xfrm>
+            <a:off x="5257800" y="2834640"/>
+            <a:ext cx="3200400" cy="237744"/>
+          </a:xfrm>
+          <a:prstGeom prst="rect">
+            <a:avLst/>
+          </a:prstGeom>
+          <a:noFill/>
+          <a:ln/>
+        </p:spPr>
+        <p:txBody>
+          <a:bodyPr wrap="square" lIns="0" tIns="0" rIns="0" bIns="0" rtlCol="0" anchor="ctr"/>
+          <a:lstStyle/>
+          <a:p>
+            <a:pPr indent="0" marL="0">
+              <a:buNone/>
+            </a:pPr>
+            <a:r>
+              <a:rPr lang="en-US" sz="1100" dirty="0">
+                <a:solidFill>
+                  <a:srgbClr val="FFFFFF"/>
+                </a:solidFill>
+                <a:latin typeface="Calibri" pitchFamily="34" charset="0"/>
+                <a:ea typeface="Calibri" pitchFamily="34" charset="-122"/>
+                <a:cs typeface="Calibri" pitchFamily="34" charset="-120"/>
+              </a:rPr>
+              <a:t>STT inference</a:t>
+            </a:r>
+            <a:pPr indent="0" marL="0">
+              <a:buNone/>
+            </a:pPr>
+            <a:r>
+              <a:rPr lang="en-US" sz="1100" b="1" dirty="0">
+                <a:solidFill>
+                  <a:srgbClr val="3FA7D6"/>
+                </a:solidFill>
+                <a:latin typeface="Calibri" pitchFamily="34" charset="0"/>
+                <a:ea typeface="Calibri" pitchFamily="34" charset="-122"/>
+                <a:cs typeface="Calibri" pitchFamily="34" charset="-120"/>
+              </a:rPr>
+              <a:t>  150 ms</a:t>
+            </a:r>
+            <a:endParaRPr lang="en-US" sz="1100" dirty="0"/>
+          </a:p>
+        </p:txBody>
+      </p:sp>
+      <p:sp>
+        <p:nvSpPr>
+          <p:cNvPr id="23" name="Shape 18"/>
+          <p:cNvSpPr/>
+          <p:nvPr/>
+        </p:nvSpPr>
+        <p:spPr>
+          <a:xfrm>
+            <a:off x="5257800" y="3108960"/>
+            <a:ext cx="3200400" cy="146304"/>
+          </a:xfrm>
+          <a:prstGeom prst="rect">
+            <a:avLst/>
+          </a:prstGeom>
+          <a:solidFill>
+            <a:srgbClr val="185443"/>
+          </a:solidFill>
+          <a:ln w="12700">
+            <a:solidFill>
+              <a:srgbClr val="185443"/>
+            </a:solidFill>
+            <a:prstDash val="solid"/>
+          </a:ln>
+        </p:spPr>
+      </p:sp>
+      <p:sp>
+        <p:nvSpPr>
+          <p:cNvPr id="24" name="Shape 19"/>
+          <p:cNvSpPr/>
+          <p:nvPr/>
+        </p:nvSpPr>
+        <p:spPr>
+          <a:xfrm>
+            <a:off x="5257800" y="3108960"/>
+            <a:ext cx="600075" cy="146304"/>
+          </a:xfrm>
+          <a:prstGeom prst="rect">
+            <a:avLst/>
+          </a:prstGeom>
+          <a:solidFill>
+            <a:srgbClr val="3FA7D6"/>
+          </a:solidFill>
+          <a:ln w="12700">
+            <a:solidFill>
+              <a:srgbClr val="3FA7D6"/>
+            </a:solidFill>
+            <a:prstDash val="solid"/>
+          </a:ln>
+        </p:spPr>
+      </p:sp>
+      <p:sp>
+        <p:nvSpPr>
+          <p:cNvPr id="25" name="Text 20"/>
+          <p:cNvSpPr txBox="1"/>
+          <p:nvPr/>
+        </p:nvSpPr>
+        <p:spPr>
+          <a:xfrm>
+            <a:off x="5257800" y="3383280"/>
+            <a:ext cx="3200400" cy="237744"/>
+          </a:xfrm>
+          <a:prstGeom prst="rect">
+            <a:avLst/>
+          </a:prstGeom>
+          <a:noFill/>
+          <a:ln/>
+        </p:spPr>
+        <p:txBody>
+          <a:bodyPr wrap="square" lIns="0" tIns="0" rIns="0" bIns="0" rtlCol="0" anchor="ctr"/>
+          <a:lstStyle/>
+          <a:p>
+            <a:pPr indent="0" marL="0">
+              <a:buNone/>
+            </a:pPr>
+            <a:r>
+              <a:rPr lang="en-US" sz="1100" dirty="0">
+                <a:solidFill>
+                  <a:srgbClr val="FFFFFF"/>
+                </a:solidFill>
+                <a:latin typeface="Calibri" pitchFamily="34" charset="0"/>
+                <a:ea typeface="Calibri" pitchFamily="34" charset="-122"/>
+                <a:cs typeface="Calibri" pitchFamily="34" charset="-120"/>
+              </a:rPr>
+              <a:t>LLM prefill + 1st token</a:t>
+            </a:r>
+            <a:pPr indent="0" marL="0">
+              <a:buNone/>
+            </a:pPr>
+            <a:r>
+              <a:rPr lang="en-US" sz="1100" b="1" dirty="0">
+                <a:solidFill>
+                  <a:srgbClr val="FFB22E"/>
+                </a:solidFill>
+                <a:latin typeface="Calibri" pitchFamily="34" charset="0"/>
+                <a:ea typeface="Calibri" pitchFamily="34" charset="-122"/>
+                <a:cs typeface="Calibri" pitchFamily="34" charset="-120"/>
+              </a:rPr>
+              <a:t>  250 ms</a:t>
+            </a:r>
+            <a:endParaRPr lang="en-US" sz="1100" dirty="0"/>
+          </a:p>
+        </p:txBody>
+      </p:sp>
+      <p:sp>
+        <p:nvSpPr>
+          <p:cNvPr id="26" name="Shape 21"/>
+          <p:cNvSpPr/>
+          <p:nvPr/>
+        </p:nvSpPr>
+        <p:spPr>
+          <a:xfrm>
+            <a:off x="5257800" y="3657600"/>
+            <a:ext cx="3200400" cy="146304"/>
+          </a:xfrm>
+          <a:prstGeom prst="rect">
+            <a:avLst/>
+          </a:prstGeom>
+          <a:solidFill>
+            <a:srgbClr val="185443"/>
+          </a:solidFill>
+          <a:ln w="12700">
+            <a:solidFill>
+              <a:srgbClr val="185443"/>
+            </a:solidFill>
+            <a:prstDash val="solid"/>
+          </a:ln>
+        </p:spPr>
+      </p:sp>
+      <p:sp>
+        <p:nvSpPr>
+          <p:cNvPr id="27" name="Shape 22"/>
+          <p:cNvSpPr/>
+          <p:nvPr/>
+        </p:nvSpPr>
+        <p:spPr>
+          <a:xfrm>
+            <a:off x="5257800" y="3657600"/>
+            <a:ext cx="1000125" cy="146304"/>
+          </a:xfrm>
+          <a:prstGeom prst="rect">
+            <a:avLst/>
+          </a:prstGeom>
+          <a:solidFill>
+            <a:srgbClr val="FFB22E"/>
+          </a:solidFill>
+          <a:ln w="12700">
+            <a:solidFill>
+              <a:srgbClr val="FFB22E"/>
+            </a:solidFill>
+            <a:prstDash val="solid"/>
+          </a:ln>
+        </p:spPr>
+      </p:sp>
+      <p:sp>
+        <p:nvSpPr>
+          <p:cNvPr id="28" name="Text 23"/>
+          <p:cNvSpPr txBox="1"/>
+          <p:nvPr/>
+        </p:nvSpPr>
+        <p:spPr>
+          <a:xfrm>
+            <a:off x="5257800" y="3931920"/>
+            <a:ext cx="3200400" cy="237744"/>
+          </a:xfrm>
+          <a:prstGeom prst="rect">
+            <a:avLst/>
+          </a:prstGeom>
+          <a:noFill/>
+          <a:ln/>
+        </p:spPr>
+        <p:txBody>
+          <a:bodyPr wrap="square" lIns="0" tIns="0" rIns="0" bIns="0" rtlCol="0" anchor="ctr"/>
+          <a:lstStyle/>
+          <a:p>
+            <a:pPr indent="0" marL="0">
+              <a:buNone/>
+            </a:pPr>
+            <a:r>
+              <a:rPr lang="en-US" sz="1100" dirty="0">
+                <a:solidFill>
+                  <a:srgbClr val="FFFFFF"/>
+                </a:solidFill>
+                <a:latin typeface="Calibri" pitchFamily="34" charset="0"/>
+                <a:ea typeface="Calibri" pitchFamily="34" charset="-122"/>
+                <a:cs typeface="Calibri" pitchFamily="34" charset="-120"/>
+              </a:rPr>
+              <a:t>TTS prefill + 1st chunk</a:t>
+            </a:r>
+            <a:pPr indent="0" marL="0">
+              <a:buNone/>
+            </a:pPr>
+            <a:r>
+              <a:rPr lang="en-US" sz="1100" b="1" dirty="0">
+                <a:solidFill>
+                  <a:srgbClr val="F2545B"/>
+                </a:solidFill>
+                <a:latin typeface="Calibri" pitchFamily="34" charset="0"/>
+                <a:ea typeface="Calibri" pitchFamily="34" charset="-122"/>
+                <a:cs typeface="Calibri" pitchFamily="34" charset="-120"/>
+              </a:rPr>
+              <a:t>  200 ms</a:t>
+            </a:r>
+            <a:endParaRPr lang="en-US" sz="1100" dirty="0"/>
+          </a:p>
+        </p:txBody>
+      </p:sp>
+      <p:sp>
+        <p:nvSpPr>
+          <p:cNvPr id="29" name="Shape 24"/>
+          <p:cNvSpPr/>
+          <p:nvPr/>
+        </p:nvSpPr>
+        <p:spPr>
+          <a:xfrm>
+            <a:off x="5257800" y="4206240"/>
+            <a:ext cx="3200400" cy="146304"/>
+          </a:xfrm>
+          <a:prstGeom prst="rect">
+            <a:avLst/>
+          </a:prstGeom>
+          <a:solidFill>
+            <a:srgbClr val="185443"/>
+          </a:solidFill>
+          <a:ln w="12700">
+            <a:solidFill>
+              <a:srgbClr val="185443"/>
+            </a:solidFill>
+            <a:prstDash val="solid"/>
+          </a:ln>
+        </p:spPr>
+      </p:sp>
+      <p:sp>
+        <p:nvSpPr>
+          <p:cNvPr id="30" name="Shape 25"/>
+          <p:cNvSpPr/>
+          <p:nvPr/>
+        </p:nvSpPr>
+        <p:spPr>
+          <a:xfrm>
+            <a:off x="5257800" y="4206240"/>
+            <a:ext cx="800100" cy="146304"/>
+          </a:xfrm>
+          <a:prstGeom prst="rect">
+            <a:avLst/>
+          </a:prstGeom>
+          <a:solidFill>
+            <a:srgbClr val="F2545B"/>
+          </a:solidFill>
+          <a:ln w="12700">
+            <a:solidFill>
+              <a:srgbClr val="F2545B"/>
+            </a:solidFill>
+            <a:prstDash val="solid"/>
+          </a:ln>
+        </p:spPr>
+      </p:sp>
+    </p:spTree>
+  </p:cSld>
+  <p:clrMapOvr>
+    <a:masterClrMapping/>
+  </p:clrMapOvr>
+</p:sld>
+</file>
+
+<file path=ppt/slides/slide5.xml><?xml version="1.0" encoding="utf-8"?>
+<p:sld xmlns:a="http://schemas.openxmlformats.org/drawingml/2006/main" xmlns:r="http://schemas.openxmlformats.org/officeDocument/2006/relationships" xmlns:p="http://schemas.openxmlformats.org/presentationml/2006/main">
+  <p:cSld name="Slide 5">
+    <p:bg>
+      <p:bgPr>
+        <a:solidFill>
+          <a:srgbClr val="E6F2EA"/>
+        </a:solidFill>
+      </p:bgPr>
+    </p:bg>
+    <p:spTree>
+      <p:nvGrpSpPr>
+        <p:cNvPr id="1" name=""/>
+        <p:cNvGrpSpPr/>
+        <p:nvPr/>
+      </p:nvGrpSpPr>
+      <p:grpSpPr>
+        <a:xfrm>
+          <a:off x="0" y="0"/>
+          <a:ext cx="0" cy="0"/>
+          <a:chOff x="0" y="0"/>
+          <a:chExt cx="0" cy="0"/>
+        </a:xfrm>
+      </p:grpSpPr>
+      <p:sp>
+        <p:nvSpPr>
+          <p:cNvPr id="2" name="Text 0"/>
+          <p:cNvSpPr txBox="1"/>
+          <p:nvPr/>
+        </p:nvSpPr>
+        <p:spPr>
+          <a:xfrm>
+            <a:off x="457200" y="320040"/>
+            <a:ext cx="8229600" cy="548640"/>
+          </a:xfrm>
+          <a:prstGeom prst="rect">
+            <a:avLst/>
+          </a:prstGeom>
+          <a:noFill/>
+          <a:ln/>
+        </p:spPr>
+        <p:txBody>
+          <a:bodyPr wrap="square" lIns="0" tIns="0" rIns="0" bIns="0" rtlCol="0" anchor="ctr"/>
+          <a:lstStyle/>
+          <a:p>
+            <a:pPr indent="0" marL="0">
+              <a:buNone/>
+            </a:pPr>
+            <a:r>
+              <a:rPr lang="en-US" sz="3000" b="1" dirty="0">
+                <a:solidFill>
+                  <a:srgbClr val="0E3B2E"/>
+                </a:solidFill>
+                <a:latin typeface="Cambria" pitchFamily="34" charset="0"/>
+                <a:ea typeface="Cambria" pitchFamily="34" charset="-122"/>
+                <a:cs typeface="Cambria" pitchFamily="34" charset="-120"/>
+              </a:rPr>
               <a:t>Cascaded vs. Omni (Native Audio)</a:t>
             </a:r>
             <a:endParaRPr lang="en-US" sz="3000" dirty="0"/>
@@ -4312,7 +6122,7 @@
       </p:sp>
       <p:graphicFrame>
         <p:nvGraphicFramePr>
-          <p:cNvPr id="5" name="Table 0"/>
+          <p:cNvPr id="6" name="Table 0"/>
           <p:cNvGraphicFramePr>
             <a:graphicFrameLocks noGrp="1"/>
           </p:cNvGraphicFramePr>
@@ -4367,7 +6177,7 @@
                   <a:tcPr marL="91440" marR="91440" marT="0" marB="0" anchor="ctr">
                     <a:lnL w="9525" cap="flat" cmpd="sng" algn="ctr">
                       <a:solidFill>
-                        <a:srgbClr val="E4DDF0"/>
+                        <a:srgbClr val="CFE6D6"/>
                       </a:solidFill>
                       <a:prstDash val="solid"/>
                       <a:round/>
@@ -4376,7 +6186,7 @@
                     </a:lnL>
                     <a:lnR w="9525" cap="flat" cmpd="sng" algn="ctr">
                       <a:solidFill>
-                        <a:srgbClr val="E4DDF0"/>
+                        <a:srgbClr val="CFE6D6"/>
                       </a:solidFill>
                       <a:prstDash val="solid"/>
                       <a:round/>
@@ -4385,7 +6195,7 @@
                     </a:lnR>
                     <a:lnT w="9525" cap="flat" cmpd="sng" algn="ctr">
                       <a:solidFill>
-                        <a:srgbClr val="E4DDF0"/>
+                        <a:srgbClr val="CFE6D6"/>
                       </a:solidFill>
                       <a:prstDash val="solid"/>
                       <a:round/>
@@ -4394,7 +6204,7 @@
                     </a:lnT>
                     <a:lnB w="9525" cap="flat" cmpd="sng" algn="ctr">
                       <a:solidFill>
-                        <a:srgbClr val="E4DDF0"/>
+                        <a:srgbClr val="CFE6D6"/>
                       </a:solidFill>
                       <a:prstDash val="solid"/>
                       <a:round/>
@@ -4402,7 +6212,7 @@
                       <a:tailEnd type="none" w="med" len="med"/>
                     </a:lnB>
                     <a:solidFill>
-                      <a:srgbClr val="24163A"/>
+                      <a:srgbClr val="0E3B2E"/>
                     </a:solidFill>
                   </a:tcPr>
                 </a:tc>
@@ -4435,7 +6245,7 @@
                   <a:tcPr marL="91440" marR="91440" marT="0" marB="0" anchor="ctr">
                     <a:lnL w="9525" cap="flat" cmpd="sng" algn="ctr">
                       <a:solidFill>
-                        <a:srgbClr val="E4DDF0"/>
+                        <a:srgbClr val="CFE6D6"/>
                       </a:solidFill>
                       <a:prstDash val="solid"/>
                       <a:round/>
@@ -4444,7 +6254,7 @@
                     </a:lnL>
                     <a:lnR w="9525" cap="flat" cmpd="sng" algn="ctr">
                       <a:solidFill>
-                        <a:srgbClr val="E4DDF0"/>
+                        <a:srgbClr val="CFE6D6"/>
                       </a:solidFill>
                       <a:prstDash val="solid"/>
                       <a:round/>
@@ -4453,7 +6263,7 @@
                     </a:lnR>
                     <a:lnT w="9525" cap="flat" cmpd="sng" algn="ctr">
                       <a:solidFill>
-                        <a:srgbClr val="E4DDF0"/>
+                        <a:srgbClr val="CFE6D6"/>
                       </a:solidFill>
                       <a:prstDash val="solid"/>
                       <a:round/>
@@ -4462,7 +6272,7 @@
                     </a:lnT>
                     <a:lnB w="9525" cap="flat" cmpd="sng" algn="ctr">
                       <a:solidFill>
-                        <a:srgbClr val="E4DDF0"/>
+                        <a:srgbClr val="CFE6D6"/>
                       </a:solidFill>
                       <a:prstDash val="solid"/>
                       <a:round/>
@@ -4470,7 +6280,7 @@
                       <a:tailEnd type="none" w="med" len="med"/>
                     </a:lnB>
                     <a:solidFill>
-                      <a:srgbClr val="24163A"/>
+                      <a:srgbClr val="0E3B2E"/>
                     </a:solidFill>
                   </a:tcPr>
                 </a:tc>
@@ -4503,7 +6313,7 @@
                   <a:tcPr marL="91440" marR="91440" marT="0" marB="0" anchor="ctr">
                     <a:lnL w="9525" cap="flat" cmpd="sng" algn="ctr">
                       <a:solidFill>
-                        <a:srgbClr val="E4DDF0"/>
+                        <a:srgbClr val="CFE6D6"/>
                       </a:solidFill>
                       <a:prstDash val="solid"/>
                       <a:round/>
@@ -4512,7 +6322,7 @@
                     </a:lnL>
                     <a:lnR w="9525" cap="flat" cmpd="sng" algn="ctr">
                       <a:solidFill>
-                        <a:srgbClr val="E4DDF0"/>
+                        <a:srgbClr val="CFE6D6"/>
                       </a:solidFill>
                       <a:prstDash val="solid"/>
                       <a:round/>
@@ -4521,7 +6331,7 @@
                     </a:lnR>
                     <a:lnT w="9525" cap="flat" cmpd="sng" algn="ctr">
                       <a:solidFill>
-                        <a:srgbClr val="E4DDF0"/>
+                        <a:srgbClr val="CFE6D6"/>
                       </a:solidFill>
                       <a:prstDash val="solid"/>
                       <a:round/>
@@ -4530,7 +6340,7 @@
                     </a:lnT>
                     <a:lnB w="9525" cap="flat" cmpd="sng" algn="ctr">
                       <a:solidFill>
-                        <a:srgbClr val="E4DDF0"/>
+                        <a:srgbClr val="CFE6D6"/>
                       </a:solidFill>
                       <a:prstDash val="solid"/>
                       <a:round/>
@@ -4538,7 +6348,7 @@
                       <a:tailEnd type="none" w="med" len="med"/>
                     </a:lnB>
                     <a:solidFill>
-                      <a:srgbClr val="24163A"/>
+                      <a:srgbClr val="0E3B2E"/>
                     </a:solidFill>
                   </a:tcPr>
                 </a:tc>
@@ -4555,7 +6365,7 @@
                       <a:r>
                         <a:rPr lang="en-US" sz="1100" b="1" dirty="0">
                           <a:solidFill>
-                            <a:srgbClr val="24163A"/>
+                            <a:srgbClr val="0E3B2E"/>
                           </a:solidFill>
                           <a:latin typeface="Calibri" pitchFamily="34" charset="0"/>
                           <a:ea typeface="Calibri" pitchFamily="34" charset="-122"/>
@@ -4573,7 +6383,7 @@
                   <a:tcPr marL="91440" marR="91440" marT="0" marB="0" anchor="ctr">
                     <a:lnL w="9525" cap="flat" cmpd="sng" algn="ctr">
                       <a:solidFill>
-                        <a:srgbClr val="E4DDF0"/>
+                        <a:srgbClr val="CFE6D6"/>
                       </a:solidFill>
                       <a:prstDash val="solid"/>
                       <a:round/>
@@ -4582,7 +6392,7 @@
                     </a:lnL>
                     <a:lnR w="9525" cap="flat" cmpd="sng" algn="ctr">
                       <a:solidFill>
-                        <a:srgbClr val="E4DDF0"/>
+                        <a:srgbClr val="CFE6D6"/>
                       </a:solidFill>
                       <a:prstDash val="solid"/>
                       <a:round/>
@@ -4591,7 +6401,7 @@
                     </a:lnR>
                     <a:lnT w="9525" cap="flat" cmpd="sng" algn="ctr">
                       <a:solidFill>
-                        <a:srgbClr val="E4DDF0"/>
+                        <a:srgbClr val="CFE6D6"/>
                       </a:solidFill>
                       <a:prstDash val="solid"/>
                       <a:round/>
@@ -4600,7 +6410,7 @@
                     </a:lnT>
                     <a:lnB w="9525" cap="flat" cmpd="sng" algn="ctr">
                       <a:solidFill>
-                        <a:srgbClr val="E4DDF0"/>
+                        <a:srgbClr val="CFE6D6"/>
                       </a:solidFill>
                       <a:prstDash val="solid"/>
                       <a:round/>
@@ -4641,7 +6451,7 @@
                   <a:tcPr marL="91440" marR="91440" marT="0" marB="0" anchor="ctr">
                     <a:lnL w="9525" cap="flat" cmpd="sng" algn="ctr">
                       <a:solidFill>
-                        <a:srgbClr val="E4DDF0"/>
+                        <a:srgbClr val="CFE6D6"/>
                       </a:solidFill>
                       <a:prstDash val="solid"/>
                       <a:round/>
@@ -4650,7 +6460,7 @@
                     </a:lnL>
                     <a:lnR w="9525" cap="flat" cmpd="sng" algn="ctr">
                       <a:solidFill>
-                        <a:srgbClr val="E4DDF0"/>
+                        <a:srgbClr val="CFE6D6"/>
                       </a:solidFill>
                       <a:prstDash val="solid"/>
                       <a:round/>
@@ -4659,7 +6469,7 @@
                     </a:lnR>
                     <a:lnT w="9525" cap="flat" cmpd="sng" algn="ctr">
                       <a:solidFill>
-                        <a:srgbClr val="E4DDF0"/>
+                        <a:srgbClr val="CFE6D6"/>
                       </a:solidFill>
                       <a:prstDash val="solid"/>
                       <a:round/>
@@ -4668,7 +6478,7 @@
                     </a:lnT>
                     <a:lnB w="9525" cap="flat" cmpd="sng" algn="ctr">
                       <a:solidFill>
-                        <a:srgbClr val="E4DDF0"/>
+                        <a:srgbClr val="CFE6D6"/>
                       </a:solidFill>
                       <a:prstDash val="solid"/>
                       <a:round/>
@@ -4691,7 +6501,7 @@
                       <a:r>
                         <a:rPr lang="en-US" sz="1100" b="1" dirty="0">
                           <a:solidFill>
-                            <a:srgbClr val="1E7A6F"/>
+                            <a:srgbClr val="1E7A4F"/>
                           </a:solidFill>
                           <a:latin typeface="Calibri" pitchFamily="34" charset="0"/>
                           <a:ea typeface="Calibri" pitchFamily="34" charset="-122"/>
@@ -4709,7 +6519,7 @@
                   <a:tcPr marL="91440" marR="91440" marT="0" marB="0" anchor="ctr">
                     <a:lnL w="9525" cap="flat" cmpd="sng" algn="ctr">
                       <a:solidFill>
-                        <a:srgbClr val="E4DDF0"/>
+                        <a:srgbClr val="CFE6D6"/>
                       </a:solidFill>
                       <a:prstDash val="solid"/>
                       <a:round/>
@@ -4718,7 +6528,7 @@
                     </a:lnL>
                     <a:lnR w="9525" cap="flat" cmpd="sng" algn="ctr">
                       <a:solidFill>
-                        <a:srgbClr val="E4DDF0"/>
+                        <a:srgbClr val="CFE6D6"/>
                       </a:solidFill>
                       <a:prstDash val="solid"/>
                       <a:round/>
@@ -4727,7 +6537,7 @@
                     </a:lnR>
                     <a:lnT w="9525" cap="flat" cmpd="sng" algn="ctr">
                       <a:solidFill>
-                        <a:srgbClr val="E4DDF0"/>
+                        <a:srgbClr val="CFE6D6"/>
                       </a:solidFill>
                       <a:prstDash val="solid"/>
                       <a:round/>
@@ -4736,7 +6546,7 @@
                     </a:lnT>
                     <a:lnB w="9525" cap="flat" cmpd="sng" algn="ctr">
                       <a:solidFill>
-                        <a:srgbClr val="E4DDF0"/>
+                        <a:srgbClr val="CFE6D6"/>
                       </a:solidFill>
                       <a:prstDash val="solid"/>
                       <a:round/>
@@ -4761,7 +6571,7 @@
                       <a:r>
                         <a:rPr lang="en-US" sz="1100" b="1" dirty="0">
                           <a:solidFill>
-                            <a:srgbClr val="24163A"/>
+                            <a:srgbClr val="0E3B2E"/>
                           </a:solidFill>
                           <a:latin typeface="Calibri" pitchFamily="34" charset="0"/>
                           <a:ea typeface="Calibri" pitchFamily="34" charset="-122"/>
@@ -4779,7 +6589,7 @@
                   <a:tcPr marL="91440" marR="91440" marT="0" marB="0" anchor="ctr">
                     <a:lnL w="9525" cap="flat" cmpd="sng" algn="ctr">
                       <a:solidFill>
-                        <a:srgbClr val="E4DDF0"/>
+                        <a:srgbClr val="CFE6D6"/>
                       </a:solidFill>
                       <a:prstDash val="solid"/>
                       <a:round/>
@@ -4788,7 +6598,7 @@
                     </a:lnL>
                     <a:lnR w="9525" cap="flat" cmpd="sng" algn="ctr">
                       <a:solidFill>
-                        <a:srgbClr val="E4DDF0"/>
+                        <a:srgbClr val="CFE6D6"/>
                       </a:solidFill>
                       <a:prstDash val="solid"/>
                       <a:round/>
@@ -4797,7 +6607,7 @@
                     </a:lnR>
                     <a:lnT w="9525" cap="flat" cmpd="sng" algn="ctr">
                       <a:solidFill>
-                        <a:srgbClr val="E4DDF0"/>
+                        <a:srgbClr val="CFE6D6"/>
                       </a:solidFill>
                       <a:prstDash val="solid"/>
                       <a:round/>
@@ -4806,7 +6616,7 @@
                     </a:lnT>
                     <a:lnB w="9525" cap="flat" cmpd="sng" algn="ctr">
                       <a:solidFill>
-                        <a:srgbClr val="E4DDF0"/>
+                        <a:srgbClr val="CFE6D6"/>
                       </a:solidFill>
                       <a:prstDash val="solid"/>
                       <a:round/>
@@ -4847,7 +6657,7 @@
                   <a:tcPr marL="91440" marR="91440" marT="0" marB="0" anchor="ctr">
                     <a:lnL w="9525" cap="flat" cmpd="sng" algn="ctr">
                       <a:solidFill>
-                        <a:srgbClr val="E4DDF0"/>
+                        <a:srgbClr val="CFE6D6"/>
                       </a:solidFill>
                       <a:prstDash val="solid"/>
                       <a:round/>
@@ -4856,7 +6666,7 @@
                     </a:lnL>
                     <a:lnR w="9525" cap="flat" cmpd="sng" algn="ctr">
                       <a:solidFill>
-                        <a:srgbClr val="E4DDF0"/>
+                        <a:srgbClr val="CFE6D6"/>
                       </a:solidFill>
                       <a:prstDash val="solid"/>
                       <a:round/>
@@ -4865,7 +6675,7 @@
                     </a:lnR>
                     <a:lnT w="9525" cap="flat" cmpd="sng" algn="ctr">
                       <a:solidFill>
-                        <a:srgbClr val="E4DDF0"/>
+                        <a:srgbClr val="CFE6D6"/>
                       </a:solidFill>
                       <a:prstDash val="solid"/>
                       <a:round/>
@@ -4874,7 +6684,7 @@
                     </a:lnT>
                     <a:lnB w="9525" cap="flat" cmpd="sng" algn="ctr">
                       <a:solidFill>
-                        <a:srgbClr val="E4DDF0"/>
+                        <a:srgbClr val="CFE6D6"/>
                       </a:solidFill>
                       <a:prstDash val="solid"/>
                       <a:round/>
@@ -4897,7 +6707,7 @@
                       <a:r>
                         <a:rPr lang="en-US" sz="1100" b="1" dirty="0">
                           <a:solidFill>
-                            <a:srgbClr val="1E7A6F"/>
+                            <a:srgbClr val="1E7A4F"/>
                           </a:solidFill>
                           <a:latin typeface="Calibri" pitchFamily="34" charset="0"/>
                           <a:ea typeface="Calibri" pitchFamily="34" charset="-122"/>
@@ -4915,7 +6725,7 @@
                   <a:tcPr marL="91440" marR="91440" marT="0" marB="0" anchor="ctr">
                     <a:lnL w="9525" cap="flat" cmpd="sng" algn="ctr">
                       <a:solidFill>
-                        <a:srgbClr val="E4DDF0"/>
+                        <a:srgbClr val="CFE6D6"/>
                       </a:solidFill>
                       <a:prstDash val="solid"/>
                       <a:round/>
@@ -4924,7 +6734,7 @@
                     </a:lnL>
                     <a:lnR w="9525" cap="flat" cmpd="sng" algn="ctr">
                       <a:solidFill>
-                        <a:srgbClr val="E4DDF0"/>
+                        <a:srgbClr val="CFE6D6"/>
                       </a:solidFill>
                       <a:prstDash val="solid"/>
                       <a:round/>
@@ -4933,7 +6743,7 @@
                     </a:lnR>
                     <a:lnT w="9525" cap="flat" cmpd="sng" algn="ctr">
                       <a:solidFill>
-                        <a:srgbClr val="E4DDF0"/>
+                        <a:srgbClr val="CFE6D6"/>
                       </a:solidFill>
                       <a:prstDash val="solid"/>
                       <a:round/>
@@ -4942,7 +6752,7 @@
                     </a:lnT>
                     <a:lnB w="9525" cap="flat" cmpd="sng" algn="ctr">
                       <a:solidFill>
-                        <a:srgbClr val="E4DDF0"/>
+                        <a:srgbClr val="CFE6D6"/>
                       </a:solidFill>
                       <a:prstDash val="solid"/>
                       <a:round/>
@@ -4967,7 +6777,7 @@
                       <a:r>
                         <a:rPr lang="en-US" sz="1100" b="1" dirty="0">
                           <a:solidFill>
-                            <a:srgbClr val="24163A"/>
+                            <a:srgbClr val="0E3B2E"/>
                           </a:solidFill>
                           <a:latin typeface="Calibri" pitchFamily="34" charset="0"/>
                           <a:ea typeface="Calibri" pitchFamily="34" charset="-122"/>
@@ -4985,7 +6795,7 @@
                   <a:tcPr marL="91440" marR="91440" marT="0" marB="0" anchor="ctr">
                     <a:lnL w="9525" cap="flat" cmpd="sng" algn="ctr">
                       <a:solidFill>
-                        <a:srgbClr val="E4DDF0"/>
+                        <a:srgbClr val="CFE6D6"/>
                       </a:solidFill>
                       <a:prstDash val="solid"/>
                       <a:round/>
@@ -4994,7 +6804,7 @@
                     </a:lnL>
                     <a:lnR w="9525" cap="flat" cmpd="sng" algn="ctr">
                       <a:solidFill>
-                        <a:srgbClr val="E4DDF0"/>
+                        <a:srgbClr val="CFE6D6"/>
                       </a:solidFill>
                       <a:prstDash val="solid"/>
                       <a:round/>
@@ -5003,7 +6813,7 @@
                     </a:lnR>
                     <a:lnT w="9525" cap="flat" cmpd="sng" algn="ctr">
                       <a:solidFill>
-                        <a:srgbClr val="E4DDF0"/>
+                        <a:srgbClr val="CFE6D6"/>
                       </a:solidFill>
                       <a:prstDash val="solid"/>
                       <a:round/>
@@ -5012,7 +6822,7 @@
                     </a:lnT>
                     <a:lnB w="9525" cap="flat" cmpd="sng" algn="ctr">
                       <a:solidFill>
-                        <a:srgbClr val="E4DDF0"/>
+                        <a:srgbClr val="CFE6D6"/>
                       </a:solidFill>
                       <a:prstDash val="solid"/>
                       <a:round/>
@@ -5053,7 +6863,7 @@
                   <a:tcPr marL="91440" marR="91440" marT="0" marB="0" anchor="ctr">
                     <a:lnL w="9525" cap="flat" cmpd="sng" algn="ctr">
                       <a:solidFill>
-                        <a:srgbClr val="E4DDF0"/>
+                        <a:srgbClr val="CFE6D6"/>
                       </a:solidFill>
                       <a:prstDash val="solid"/>
                       <a:round/>
@@ -5062,7 +6872,7 @@
                     </a:lnL>
                     <a:lnR w="9525" cap="flat" cmpd="sng" algn="ctr">
                       <a:solidFill>
-                        <a:srgbClr val="E4DDF0"/>
+                        <a:srgbClr val="CFE6D6"/>
                       </a:solidFill>
                       <a:prstDash val="solid"/>
                       <a:round/>
@@ -5071,7 +6881,7 @@
                     </a:lnR>
                     <a:lnT w="9525" cap="flat" cmpd="sng" algn="ctr">
                       <a:solidFill>
-                        <a:srgbClr val="E4DDF0"/>
+                        <a:srgbClr val="CFE6D6"/>
                       </a:solidFill>
                       <a:prstDash val="solid"/>
                       <a:round/>
@@ -5080,7 +6890,7 @@
                     </a:lnT>
                     <a:lnB w="9525" cap="flat" cmpd="sng" algn="ctr">
                       <a:solidFill>
-                        <a:srgbClr val="E4DDF0"/>
+                        <a:srgbClr val="CFE6D6"/>
                       </a:solidFill>
                       <a:prstDash val="solid"/>
                       <a:round/>
@@ -5103,7 +6913,7 @@
                       <a:r>
                         <a:rPr lang="en-US" sz="1100" b="1" dirty="0">
                           <a:solidFill>
-                            <a:srgbClr val="1E7A6F"/>
+                            <a:srgbClr val="1E7A4F"/>
                           </a:solidFill>
                           <a:latin typeface="Calibri" pitchFamily="34" charset="0"/>
                           <a:ea typeface="Calibri" pitchFamily="34" charset="-122"/>
@@ -5121,7 +6931,7 @@
                   <a:tcPr marL="91440" marR="91440" marT="0" marB="0" anchor="ctr">
                     <a:lnL w="9525" cap="flat" cmpd="sng" algn="ctr">
                       <a:solidFill>
-                        <a:srgbClr val="E4DDF0"/>
+                        <a:srgbClr val="CFE6D6"/>
                       </a:solidFill>
                       <a:prstDash val="solid"/>
                       <a:round/>
@@ -5130,7 +6940,7 @@
                     </a:lnL>
                     <a:lnR w="9525" cap="flat" cmpd="sng" algn="ctr">
                       <a:solidFill>
-                        <a:srgbClr val="E4DDF0"/>
+                        <a:srgbClr val="CFE6D6"/>
                       </a:solidFill>
                       <a:prstDash val="solid"/>
                       <a:round/>
@@ -5139,7 +6949,7 @@
                     </a:lnR>
                     <a:lnT w="9525" cap="flat" cmpd="sng" algn="ctr">
                       <a:solidFill>
-                        <a:srgbClr val="E4DDF0"/>
+                        <a:srgbClr val="CFE6D6"/>
                       </a:solidFill>
                       <a:prstDash val="solid"/>
                       <a:round/>
@@ -5148,7 +6958,7 @@
                     </a:lnT>
                     <a:lnB w="9525" cap="flat" cmpd="sng" algn="ctr">
                       <a:solidFill>
-                        <a:srgbClr val="E4DDF0"/>
+                        <a:srgbClr val="CFE6D6"/>
                       </a:solidFill>
                       <a:prstDash val="solid"/>
                       <a:round/>
@@ -5173,7 +6983,7 @@
                       <a:r>
                         <a:rPr lang="en-US" sz="1100" b="1" dirty="0">
                           <a:solidFill>
-                            <a:srgbClr val="24163A"/>
+                            <a:srgbClr val="0E3B2E"/>
                           </a:solidFill>
                           <a:latin typeface="Calibri" pitchFamily="34" charset="0"/>
                           <a:ea typeface="Calibri" pitchFamily="34" charset="-122"/>
@@ -5191,7 +7001,7 @@
                   <a:tcPr marL="91440" marR="91440" marT="0" marB="0" anchor="ctr">
                     <a:lnL w="9525" cap="flat" cmpd="sng" algn="ctr">
                       <a:solidFill>
-                        <a:srgbClr val="E4DDF0"/>
+                        <a:srgbClr val="CFE6D6"/>
                       </a:solidFill>
                       <a:prstDash val="solid"/>
                       <a:round/>
@@ -5200,7 +7010,7 @@
                     </a:lnL>
                     <a:lnR w="9525" cap="flat" cmpd="sng" algn="ctr">
                       <a:solidFill>
-                        <a:srgbClr val="E4DDF0"/>
+                        <a:srgbClr val="CFE6D6"/>
                       </a:solidFill>
                       <a:prstDash val="solid"/>
                       <a:round/>
@@ -5209,7 +7019,7 @@
                     </a:lnR>
                     <a:lnT w="9525" cap="flat" cmpd="sng" algn="ctr">
                       <a:solidFill>
-                        <a:srgbClr val="E4DDF0"/>
+                        <a:srgbClr val="CFE6D6"/>
                       </a:solidFill>
                       <a:prstDash val="solid"/>
                       <a:round/>
@@ -5218,7 +7028,7 @@
                     </a:lnT>
                     <a:lnB w="9525" cap="flat" cmpd="sng" algn="ctr">
                       <a:solidFill>
-                        <a:srgbClr val="E4DDF0"/>
+                        <a:srgbClr val="CFE6D6"/>
                       </a:solidFill>
                       <a:prstDash val="solid"/>
                       <a:round/>
@@ -5241,7 +7051,7 @@
                       <a:r>
                         <a:rPr lang="en-US" sz="1100" b="1" dirty="0">
                           <a:solidFill>
-                            <a:srgbClr val="1E7A6F"/>
+                            <a:srgbClr val="1E7A4F"/>
                           </a:solidFill>
                           <a:latin typeface="Calibri" pitchFamily="34" charset="0"/>
                           <a:ea typeface="Calibri" pitchFamily="34" charset="-122"/>
@@ -5259,7 +7069,7 @@
                   <a:tcPr marL="91440" marR="91440" marT="0" marB="0" anchor="ctr">
                     <a:lnL w="9525" cap="flat" cmpd="sng" algn="ctr">
                       <a:solidFill>
-                        <a:srgbClr val="E4DDF0"/>
+                        <a:srgbClr val="CFE6D6"/>
                       </a:solidFill>
                       <a:prstDash val="solid"/>
                       <a:round/>
@@ -5268,7 +7078,7 @@
                     </a:lnL>
                     <a:lnR w="9525" cap="flat" cmpd="sng" algn="ctr">
                       <a:solidFill>
-                        <a:srgbClr val="E4DDF0"/>
+                        <a:srgbClr val="CFE6D6"/>
                       </a:solidFill>
                       <a:prstDash val="solid"/>
                       <a:round/>
@@ -5277,7 +7087,7 @@
                     </a:lnR>
                     <a:lnT w="9525" cap="flat" cmpd="sng" algn="ctr">
                       <a:solidFill>
-                        <a:srgbClr val="E4DDF0"/>
+                        <a:srgbClr val="CFE6D6"/>
                       </a:solidFill>
                       <a:prstDash val="solid"/>
                       <a:round/>
@@ -5286,7 +7096,7 @@
                     </a:lnT>
                     <a:lnB w="9525" cap="flat" cmpd="sng" algn="ctr">
                       <a:solidFill>
-                        <a:srgbClr val="E4DDF0"/>
+                        <a:srgbClr val="CFE6D6"/>
                       </a:solidFill>
                       <a:prstDash val="solid"/>
                       <a:round/>
@@ -5327,7 +7137,7 @@
                   <a:tcPr marL="91440" marR="91440" marT="0" marB="0" anchor="ctr">
                     <a:lnL w="9525" cap="flat" cmpd="sng" algn="ctr">
                       <a:solidFill>
-                        <a:srgbClr val="E4DDF0"/>
+                        <a:srgbClr val="CFE6D6"/>
                       </a:solidFill>
                       <a:prstDash val="solid"/>
                       <a:round/>
@@ -5336,7 +7146,7 @@
                     </a:lnL>
                     <a:lnR w="9525" cap="flat" cmpd="sng" algn="ctr">
                       <a:solidFill>
-                        <a:srgbClr val="E4DDF0"/>
+                        <a:srgbClr val="CFE6D6"/>
                       </a:solidFill>
                       <a:prstDash val="solid"/>
                       <a:round/>
@@ -5345,7 +7155,7 @@
                     </a:lnR>
                     <a:lnT w="9525" cap="flat" cmpd="sng" algn="ctr">
                       <a:solidFill>
-                        <a:srgbClr val="E4DDF0"/>
+                        <a:srgbClr val="CFE6D6"/>
                       </a:solidFill>
                       <a:prstDash val="solid"/>
                       <a:round/>
@@ -5354,7 +7164,7 @@
                     </a:lnT>
                     <a:lnB w="9525" cap="flat" cmpd="sng" algn="ctr">
                       <a:solidFill>
-                        <a:srgbClr val="E4DDF0"/>
+                        <a:srgbClr val="CFE6D6"/>
                       </a:solidFill>
                       <a:prstDash val="solid"/>
                       <a:round/>
@@ -5379,7 +7189,7 @@
                       <a:r>
                         <a:rPr lang="en-US" sz="1100" b="1" dirty="0">
                           <a:solidFill>
-                            <a:srgbClr val="24163A"/>
+                            <a:srgbClr val="0E3B2E"/>
                           </a:solidFill>
                           <a:latin typeface="Calibri" pitchFamily="34" charset="0"/>
                           <a:ea typeface="Calibri" pitchFamily="34" charset="-122"/>
@@ -5397,7 +7207,7 @@
                   <a:tcPr marL="91440" marR="91440" marT="0" marB="0" anchor="ctr">
                     <a:lnL w="9525" cap="flat" cmpd="sng" algn="ctr">
                       <a:solidFill>
-                        <a:srgbClr val="E4DDF0"/>
+                        <a:srgbClr val="CFE6D6"/>
                       </a:solidFill>
                       <a:prstDash val="solid"/>
                       <a:round/>
@@ -5406,7 +7216,7 @@
                     </a:lnL>
                     <a:lnR w="9525" cap="flat" cmpd="sng" algn="ctr">
                       <a:solidFill>
-                        <a:srgbClr val="E4DDF0"/>
+                        <a:srgbClr val="CFE6D6"/>
                       </a:solidFill>
                       <a:prstDash val="solid"/>
                       <a:round/>
@@ -5415,7 +7225,7 @@
                     </a:lnR>
                     <a:lnT w="9525" cap="flat" cmpd="sng" algn="ctr">
                       <a:solidFill>
-                        <a:srgbClr val="E4DDF0"/>
+                        <a:srgbClr val="CFE6D6"/>
                       </a:solidFill>
                       <a:prstDash val="solid"/>
                       <a:round/>
@@ -5424,7 +7234,7 @@
                     </a:lnT>
                     <a:lnB w="9525" cap="flat" cmpd="sng" algn="ctr">
                       <a:solidFill>
-                        <a:srgbClr val="E4DDF0"/>
+                        <a:srgbClr val="CFE6D6"/>
                       </a:solidFill>
                       <a:prstDash val="solid"/>
                       <a:round/>
@@ -5447,7 +7257,7 @@
                       <a:r>
                         <a:rPr lang="en-US" sz="1100" b="1" dirty="0">
                           <a:solidFill>
-                            <a:srgbClr val="1E7A6F"/>
+                            <a:srgbClr val="1E7A4F"/>
                           </a:solidFill>
                           <a:latin typeface="Calibri" pitchFamily="34" charset="0"/>
                           <a:ea typeface="Calibri" pitchFamily="34" charset="-122"/>
@@ -5465,7 +7275,7 @@
                   <a:tcPr marL="91440" marR="91440" marT="0" marB="0" anchor="ctr">
                     <a:lnL w="9525" cap="flat" cmpd="sng" algn="ctr">
                       <a:solidFill>
-                        <a:srgbClr val="E4DDF0"/>
+                        <a:srgbClr val="CFE6D6"/>
                       </a:solidFill>
                       <a:prstDash val="solid"/>
                       <a:round/>
@@ -5474,7 +7284,7 @@
                     </a:lnL>
                     <a:lnR w="9525" cap="flat" cmpd="sng" algn="ctr">
                       <a:solidFill>
-                        <a:srgbClr val="E4DDF0"/>
+                        <a:srgbClr val="CFE6D6"/>
                       </a:solidFill>
                       <a:prstDash val="solid"/>
                       <a:round/>
@@ -5483,7 +7293,7 @@
                     </a:lnR>
                     <a:lnT w="9525" cap="flat" cmpd="sng" algn="ctr">
                       <a:solidFill>
-                        <a:srgbClr val="E4DDF0"/>
+                        <a:srgbClr val="CFE6D6"/>
                       </a:solidFill>
                       <a:prstDash val="solid"/>
                       <a:round/>
@@ -5492,7 +7302,7 @@
                     </a:lnT>
                     <a:lnB w="9525" cap="flat" cmpd="sng" algn="ctr">
                       <a:solidFill>
-                        <a:srgbClr val="E4DDF0"/>
+                        <a:srgbClr val="CFE6D6"/>
                       </a:solidFill>
                       <a:prstDash val="solid"/>
                       <a:round/>
@@ -5533,7 +7343,7 @@
                   <a:tcPr marL="91440" marR="91440" marT="0" marB="0" anchor="ctr">
                     <a:lnL w="9525" cap="flat" cmpd="sng" algn="ctr">
                       <a:solidFill>
-                        <a:srgbClr val="E4DDF0"/>
+                        <a:srgbClr val="CFE6D6"/>
                       </a:solidFill>
                       <a:prstDash val="solid"/>
                       <a:round/>
@@ -5542,7 +7352,7 @@
                     </a:lnL>
                     <a:lnR w="9525" cap="flat" cmpd="sng" algn="ctr">
                       <a:solidFill>
-                        <a:srgbClr val="E4DDF0"/>
+                        <a:srgbClr val="CFE6D6"/>
                       </a:solidFill>
                       <a:prstDash val="solid"/>
                       <a:round/>
@@ -5551,7 +7361,7 @@
                     </a:lnR>
                     <a:lnT w="9525" cap="flat" cmpd="sng" algn="ctr">
                       <a:solidFill>
-                        <a:srgbClr val="E4DDF0"/>
+                        <a:srgbClr val="CFE6D6"/>
                       </a:solidFill>
                       <a:prstDash val="solid"/>
                       <a:round/>
@@ -5560,7 +7370,7 @@
                     </a:lnT>
                     <a:lnB w="9525" cap="flat" cmpd="sng" algn="ctr">
                       <a:solidFill>
-                        <a:srgbClr val="E4DDF0"/>
+                        <a:srgbClr val="CFE6D6"/>
                       </a:solidFill>
                       <a:prstDash val="solid"/>
                       <a:round/>
@@ -5585,7 +7395,7 @@
                       <a:r>
                         <a:rPr lang="en-US" sz="1100" b="1" dirty="0">
                           <a:solidFill>
-                            <a:srgbClr val="24163A"/>
+                            <a:srgbClr val="0E3B2E"/>
                           </a:solidFill>
                           <a:latin typeface="Calibri" pitchFamily="34" charset="0"/>
                           <a:ea typeface="Calibri" pitchFamily="34" charset="-122"/>
@@ -5603,7 +7413,7 @@
                   <a:tcPr marL="91440" marR="91440" marT="0" marB="0" anchor="ctr">
                     <a:lnL w="9525" cap="flat" cmpd="sng" algn="ctr">
                       <a:solidFill>
-                        <a:srgbClr val="E4DDF0"/>
+                        <a:srgbClr val="CFE6D6"/>
                       </a:solidFill>
                       <a:prstDash val="solid"/>
                       <a:round/>
@@ -5612,7 +7422,7 @@
                     </a:lnL>
                     <a:lnR w="9525" cap="flat" cmpd="sng" algn="ctr">
                       <a:solidFill>
-                        <a:srgbClr val="E4DDF0"/>
+                        <a:srgbClr val="CFE6D6"/>
                       </a:solidFill>
                       <a:prstDash val="solid"/>
                       <a:round/>
@@ -5621,7 +7431,7 @@
                     </a:lnR>
                     <a:lnT w="9525" cap="flat" cmpd="sng" algn="ctr">
                       <a:solidFill>
-                        <a:srgbClr val="E4DDF0"/>
+                        <a:srgbClr val="CFE6D6"/>
                       </a:solidFill>
                       <a:prstDash val="solid"/>
                       <a:round/>
@@ -5630,7 +7440,7 @@
                     </a:lnT>
                     <a:lnB w="9525" cap="flat" cmpd="sng" algn="ctr">
                       <a:solidFill>
-                        <a:srgbClr val="E4DDF0"/>
+                        <a:srgbClr val="CFE6D6"/>
                       </a:solidFill>
                       <a:prstDash val="solid"/>
                       <a:round/>
@@ -5653,7 +7463,7 @@
                       <a:r>
                         <a:rPr lang="en-US" sz="1100" b="1" dirty="0">
                           <a:solidFill>
-                            <a:srgbClr val="1E7A6F"/>
+                            <a:srgbClr val="1E7A4F"/>
                           </a:solidFill>
                           <a:latin typeface="Calibri" pitchFamily="34" charset="0"/>
                           <a:ea typeface="Calibri" pitchFamily="34" charset="-122"/>
@@ -5671,7 +7481,7 @@
                   <a:tcPr marL="91440" marR="91440" marT="0" marB="0" anchor="ctr">
                     <a:lnL w="9525" cap="flat" cmpd="sng" algn="ctr">
                       <a:solidFill>
-                        <a:srgbClr val="E4DDF0"/>
+                        <a:srgbClr val="CFE6D6"/>
                       </a:solidFill>
                       <a:prstDash val="solid"/>
                       <a:round/>
@@ -5680,7 +7490,7 @@
                     </a:lnL>
                     <a:lnR w="9525" cap="flat" cmpd="sng" algn="ctr">
                       <a:solidFill>
-                        <a:srgbClr val="E4DDF0"/>
+                        <a:srgbClr val="CFE6D6"/>
                       </a:solidFill>
                       <a:prstDash val="solid"/>
                       <a:round/>
@@ -5689,7 +7499,7 @@
                     </a:lnR>
                     <a:lnT w="9525" cap="flat" cmpd="sng" algn="ctr">
                       <a:solidFill>
-                        <a:srgbClr val="E4DDF0"/>
+                        <a:srgbClr val="CFE6D6"/>
                       </a:solidFill>
                       <a:prstDash val="solid"/>
                       <a:round/>
@@ -5698,7 +7508,7 @@
                     </a:lnT>
                     <a:lnB w="9525" cap="flat" cmpd="sng" algn="ctr">
                       <a:solidFill>
-                        <a:srgbClr val="E4DDF0"/>
+                        <a:srgbClr val="CFE6D6"/>
                       </a:solidFill>
                       <a:prstDash val="solid"/>
                       <a:round/>
@@ -5739,7 +7549,7 @@
                   <a:tcPr marL="91440" marR="91440" marT="0" marB="0" anchor="ctr">
                     <a:lnL w="9525" cap="flat" cmpd="sng" algn="ctr">
                       <a:solidFill>
-                        <a:srgbClr val="E4DDF0"/>
+                        <a:srgbClr val="CFE6D6"/>
                       </a:solidFill>
                       <a:prstDash val="solid"/>
                       <a:round/>
@@ -5748,7 +7558,7 @@
                     </a:lnL>
                     <a:lnR w="9525" cap="flat" cmpd="sng" algn="ctr">
                       <a:solidFill>
-                        <a:srgbClr val="E4DDF0"/>
+                        <a:srgbClr val="CFE6D6"/>
                       </a:solidFill>
                       <a:prstDash val="solid"/>
                       <a:round/>
@@ -5757,7 +7567,7 @@
                     </a:lnR>
                     <a:lnT w="9525" cap="flat" cmpd="sng" algn="ctr">
                       <a:solidFill>
-                        <a:srgbClr val="E4DDF0"/>
+                        <a:srgbClr val="CFE6D6"/>
                       </a:solidFill>
                       <a:prstDash val="solid"/>
                       <a:round/>
@@ -5766,7 +7576,7 @@
                     </a:lnT>
                     <a:lnB w="9525" cap="flat" cmpd="sng" algn="ctr">
                       <a:solidFill>
-                        <a:srgbClr val="E4DDF0"/>
+                        <a:srgbClr val="CFE6D6"/>
                       </a:solidFill>
                       <a:prstDash val="solid"/>
                       <a:round/>
@@ -5791,7 +7601,7 @@
                       <a:r>
                         <a:rPr lang="en-US" sz="1100" b="1" dirty="0">
                           <a:solidFill>
-                            <a:srgbClr val="24163A"/>
+                            <a:srgbClr val="0E3B2E"/>
                           </a:solidFill>
                           <a:latin typeface="Calibri" pitchFamily="34" charset="0"/>
                           <a:ea typeface="Calibri" pitchFamily="34" charset="-122"/>
@@ -5809,7 +7619,7 @@
                   <a:tcPr marL="91440" marR="91440" marT="0" marB="0" anchor="ctr">
                     <a:lnL w="9525" cap="flat" cmpd="sng" algn="ctr">
                       <a:solidFill>
-                        <a:srgbClr val="E4DDF0"/>
+                        <a:srgbClr val="CFE6D6"/>
                       </a:solidFill>
                       <a:prstDash val="solid"/>
                       <a:round/>
@@ -5818,7 +7628,7 @@
                     </a:lnL>
                     <a:lnR w="9525" cap="flat" cmpd="sng" algn="ctr">
                       <a:solidFill>
-                        <a:srgbClr val="E4DDF0"/>
+                        <a:srgbClr val="CFE6D6"/>
                       </a:solidFill>
                       <a:prstDash val="solid"/>
                       <a:round/>
@@ -5827,7 +7637,7 @@
                     </a:lnR>
                     <a:lnT w="9525" cap="flat" cmpd="sng" algn="ctr">
                       <a:solidFill>
-                        <a:srgbClr val="E4DDF0"/>
+                        <a:srgbClr val="CFE6D6"/>
                       </a:solidFill>
                       <a:prstDash val="solid"/>
                       <a:round/>
@@ -5836,7 +7646,7 @@
                     </a:lnT>
                     <a:lnB w="9525" cap="flat" cmpd="sng" algn="ctr">
                       <a:solidFill>
-                        <a:srgbClr val="E4DDF0"/>
+                        <a:srgbClr val="CFE6D6"/>
                       </a:solidFill>
                       <a:prstDash val="solid"/>
                       <a:round/>
@@ -5859,7 +7669,7 @@
                       <a:r>
                         <a:rPr lang="en-US" sz="1100" b="1" dirty="0">
                           <a:solidFill>
-                            <a:srgbClr val="1E7A6F"/>
+                            <a:srgbClr val="1E7A4F"/>
                           </a:solidFill>
                           <a:latin typeface="Calibri" pitchFamily="34" charset="0"/>
                           <a:ea typeface="Calibri" pitchFamily="34" charset="-122"/>
@@ -5877,7 +7687,7 @@
                   <a:tcPr marL="91440" marR="91440" marT="0" marB="0" anchor="ctr">
                     <a:lnL w="9525" cap="flat" cmpd="sng" algn="ctr">
                       <a:solidFill>
-                        <a:srgbClr val="E4DDF0"/>
+                        <a:srgbClr val="CFE6D6"/>
                       </a:solidFill>
                       <a:prstDash val="solid"/>
                       <a:round/>
@@ -5886,7 +7696,7 @@
                     </a:lnL>
                     <a:lnR w="9525" cap="flat" cmpd="sng" algn="ctr">
                       <a:solidFill>
-                        <a:srgbClr val="E4DDF0"/>
+                        <a:srgbClr val="CFE6D6"/>
                       </a:solidFill>
                       <a:prstDash val="solid"/>
                       <a:round/>
@@ -5895,7 +7705,7 @@
                     </a:lnR>
                     <a:lnT w="9525" cap="flat" cmpd="sng" algn="ctr">
                       <a:solidFill>
-                        <a:srgbClr val="E4DDF0"/>
+                        <a:srgbClr val="CFE6D6"/>
                       </a:solidFill>
                       <a:prstDash val="solid"/>
                       <a:round/>
@@ -5904,7 +7714,7 @@
                     </a:lnT>
                     <a:lnB w="9525" cap="flat" cmpd="sng" algn="ctr">
                       <a:solidFill>
-                        <a:srgbClr val="E4DDF0"/>
+                        <a:srgbClr val="CFE6D6"/>
                       </a:solidFill>
                       <a:prstDash val="solid"/>
                       <a:round/>
@@ -5945,7 +7755,7 @@
                   <a:tcPr marL="91440" marR="91440" marT="0" marB="0" anchor="ctr">
                     <a:lnL w="9525" cap="flat" cmpd="sng" algn="ctr">
                       <a:solidFill>
-                        <a:srgbClr val="E4DDF0"/>
+                        <a:srgbClr val="CFE6D6"/>
                       </a:solidFill>
                       <a:prstDash val="solid"/>
                       <a:round/>
@@ -5954,7 +7764,7 @@
                     </a:lnL>
                     <a:lnR w="9525" cap="flat" cmpd="sng" algn="ctr">
                       <a:solidFill>
-                        <a:srgbClr val="E4DDF0"/>
+                        <a:srgbClr val="CFE6D6"/>
                       </a:solidFill>
                       <a:prstDash val="solid"/>
                       <a:round/>
@@ -5963,7 +7773,7 @@
                     </a:lnR>
                     <a:lnT w="9525" cap="flat" cmpd="sng" algn="ctr">
                       <a:solidFill>
-                        <a:srgbClr val="E4DDF0"/>
+                        <a:srgbClr val="CFE6D6"/>
                       </a:solidFill>
                       <a:prstDash val="solid"/>
                       <a:round/>
@@ -5972,7 +7782,7 @@
                     </a:lnT>
                     <a:lnB w="9525" cap="flat" cmpd="sng" algn="ctr">
                       <a:solidFill>
-                        <a:srgbClr val="E4DDF0"/>
+                        <a:srgbClr val="CFE6D6"/>
                       </a:solidFill>
                       <a:prstDash val="solid"/>
                       <a:round/>
@@ -5997,7 +7807,7 @@
                       <a:r>
                         <a:rPr lang="en-US" sz="1100" b="1" dirty="0">
                           <a:solidFill>
-                            <a:srgbClr val="24163A"/>
+                            <a:srgbClr val="0E3B2E"/>
                           </a:solidFill>
                           <a:latin typeface="Calibri" pitchFamily="34" charset="0"/>
                           <a:ea typeface="Calibri" pitchFamily="34" charset="-122"/>
@@ -6015,7 +7825,7 @@
                   <a:tcPr marL="91440" marR="91440" marT="0" marB="0" anchor="ctr">
                     <a:lnL w="9525" cap="flat" cmpd="sng" algn="ctr">
                       <a:solidFill>
-                        <a:srgbClr val="E4DDF0"/>
+                        <a:srgbClr val="CFE6D6"/>
                       </a:solidFill>
                       <a:prstDash val="solid"/>
                       <a:round/>
@@ -6024,7 +7834,7 @@
                     </a:lnL>
                     <a:lnR w="9525" cap="flat" cmpd="sng" algn="ctr">
                       <a:solidFill>
-                        <a:srgbClr val="E4DDF0"/>
+                        <a:srgbClr val="CFE6D6"/>
                       </a:solidFill>
                       <a:prstDash val="solid"/>
                       <a:round/>
@@ -6033,7 +7843,7 @@
                     </a:lnR>
                     <a:lnT w="9525" cap="flat" cmpd="sng" algn="ctr">
                       <a:solidFill>
-                        <a:srgbClr val="E4DDF0"/>
+                        <a:srgbClr val="CFE6D6"/>
                       </a:solidFill>
                       <a:prstDash val="solid"/>
                       <a:round/>
@@ -6042,7 +7852,7 @@
                     </a:lnT>
                     <a:lnB w="9525" cap="flat" cmpd="sng" algn="ctr">
                       <a:solidFill>
-                        <a:srgbClr val="E4DDF0"/>
+                        <a:srgbClr val="CFE6D6"/>
                       </a:solidFill>
                       <a:prstDash val="solid"/>
                       <a:round/>
@@ -6065,7 +7875,7 @@
                       <a:r>
                         <a:rPr lang="en-US" sz="1100" dirty="0">
                           <a:solidFill>
-                            <a:srgbClr val="1E1A28"/>
+                            <a:srgbClr val="15241E"/>
                           </a:solidFill>
                           <a:latin typeface="Calibri" pitchFamily="34" charset="0"/>
                           <a:ea typeface="Calibri" pitchFamily="34" charset="-122"/>
@@ -6083,7 +7893,7 @@
                   <a:tcPr marL="91440" marR="91440" marT="0" marB="0" anchor="ctr">
                     <a:lnL w="9525" cap="flat" cmpd="sng" algn="ctr">
                       <a:solidFill>
-                        <a:srgbClr val="E4DDF0"/>
+                        <a:srgbClr val="CFE6D6"/>
                       </a:solidFill>
                       <a:prstDash val="solid"/>
                       <a:round/>
@@ -6092,7 +7902,7 @@
                     </a:lnL>
                     <a:lnR w="9525" cap="flat" cmpd="sng" algn="ctr">
                       <a:solidFill>
-                        <a:srgbClr val="E4DDF0"/>
+                        <a:srgbClr val="CFE6D6"/>
                       </a:solidFill>
                       <a:prstDash val="solid"/>
                       <a:round/>
@@ -6101,7 +7911,7 @@
                     </a:lnR>
                     <a:lnT w="9525" cap="flat" cmpd="sng" algn="ctr">
                       <a:solidFill>
-                        <a:srgbClr val="E4DDF0"/>
+                        <a:srgbClr val="CFE6D6"/>
                       </a:solidFill>
                       <a:prstDash val="solid"/>
                       <a:round/>
@@ -6110,7 +7920,7 @@
                     </a:lnT>
                     <a:lnB w="9525" cap="flat" cmpd="sng" algn="ctr">
                       <a:solidFill>
-                        <a:srgbClr val="E4DDF0"/>
+                        <a:srgbClr val="CFE6D6"/>
                       </a:solidFill>
                       <a:prstDash val="solid"/>
                       <a:round/>
@@ -6133,7 +7943,7 @@
                       <a:r>
                         <a:rPr lang="en-US" sz="1100" dirty="0">
                           <a:solidFill>
-                            <a:srgbClr val="1E1A28"/>
+                            <a:srgbClr val="15241E"/>
                           </a:solidFill>
                           <a:latin typeface="Calibri" pitchFamily="34" charset="0"/>
                           <a:ea typeface="Calibri" pitchFamily="34" charset="-122"/>
@@ -6151,7 +7961,7 @@
                   <a:tcPr marL="91440" marR="91440" marT="0" marB="0" anchor="ctr">
                     <a:lnL w="9525" cap="flat" cmpd="sng" algn="ctr">
                       <a:solidFill>
-                        <a:srgbClr val="E4DDF0"/>
+                        <a:srgbClr val="CFE6D6"/>
                       </a:solidFill>
                       <a:prstDash val="solid"/>
                       <a:round/>
@@ -6160,7 +7970,7 @@
                     </a:lnL>
                     <a:lnR w="9525" cap="flat" cmpd="sng" algn="ctr">
                       <a:solidFill>
-                        <a:srgbClr val="E4DDF0"/>
+                        <a:srgbClr val="CFE6D6"/>
                       </a:solidFill>
                       <a:prstDash val="solid"/>
                       <a:round/>
@@ -6169,7 +7979,7 @@
                     </a:lnR>
                     <a:lnT w="9525" cap="flat" cmpd="sng" algn="ctr">
                       <a:solidFill>
-                        <a:srgbClr val="E4DDF0"/>
+                        <a:srgbClr val="CFE6D6"/>
                       </a:solidFill>
                       <a:prstDash val="solid"/>
                       <a:round/>
@@ -6178,7 +7988,7 @@
                     </a:lnT>
                     <a:lnB w="9525" cap="flat" cmpd="sng" algn="ctr">
                       <a:solidFill>
-                        <a:srgbClr val="E4DDF0"/>
+                        <a:srgbClr val="CFE6D6"/>
                       </a:solidFill>
                       <a:prstDash val="solid"/>
                       <a:round/>
@@ -6203,7 +8013,7 @@
                       <a:r>
                         <a:rPr lang="en-US" sz="1100" b="1" dirty="0">
                           <a:solidFill>
-                            <a:srgbClr val="24163A"/>
+                            <a:srgbClr val="0E3B2E"/>
                           </a:solidFill>
                           <a:latin typeface="Calibri" pitchFamily="34" charset="0"/>
                           <a:ea typeface="Calibri" pitchFamily="34" charset="-122"/>
@@ -6221,7 +8031,7 @@
                   <a:tcPr marL="91440" marR="91440" marT="0" marB="0" anchor="ctr">
                     <a:lnL w="9525" cap="flat" cmpd="sng" algn="ctr">
                       <a:solidFill>
-                        <a:srgbClr val="E4DDF0"/>
+                        <a:srgbClr val="CFE6D6"/>
                       </a:solidFill>
                       <a:prstDash val="solid"/>
                       <a:round/>
@@ -6230,7 +8040,7 @@
                     </a:lnL>
                     <a:lnR w="9525" cap="flat" cmpd="sng" algn="ctr">
                       <a:solidFill>
-                        <a:srgbClr val="E4DDF0"/>
+                        <a:srgbClr val="CFE6D6"/>
                       </a:solidFill>
                       <a:prstDash val="solid"/>
                       <a:round/>
@@ -6239,7 +8049,7 @@
                     </a:lnR>
                     <a:lnT w="9525" cap="flat" cmpd="sng" algn="ctr">
                       <a:solidFill>
-                        <a:srgbClr val="E4DDF0"/>
+                        <a:srgbClr val="CFE6D6"/>
                       </a:solidFill>
                       <a:prstDash val="solid"/>
                       <a:round/>
@@ -6248,7 +8058,7 @@
                     </a:lnT>
                     <a:lnB w="9525" cap="flat" cmpd="sng" algn="ctr">
                       <a:solidFill>
-                        <a:srgbClr val="E4DDF0"/>
+                        <a:srgbClr val="CFE6D6"/>
                       </a:solidFill>
                       <a:prstDash val="solid"/>
                       <a:round/>
@@ -6271,7 +8081,7 @@
                       <a:r>
                         <a:rPr lang="en-US" sz="1100" b="1" dirty="0">
                           <a:solidFill>
-                            <a:srgbClr val="1E7A6F"/>
+                            <a:srgbClr val="1E7A4F"/>
                           </a:solidFill>
                           <a:latin typeface="Calibri" pitchFamily="34" charset="0"/>
                           <a:ea typeface="Calibri" pitchFamily="34" charset="-122"/>
@@ -6289,7 +8099,7 @@
                   <a:tcPr marL="91440" marR="91440" marT="0" marB="0" anchor="ctr">
                     <a:lnL w="9525" cap="flat" cmpd="sng" algn="ctr">
                       <a:solidFill>
-                        <a:srgbClr val="E4DDF0"/>
+                        <a:srgbClr val="CFE6D6"/>
                       </a:solidFill>
                       <a:prstDash val="solid"/>
                       <a:round/>
@@ -6298,7 +8108,7 @@
                     </a:lnL>
                     <a:lnR w="9525" cap="flat" cmpd="sng" algn="ctr">
                       <a:solidFill>
-                        <a:srgbClr val="E4DDF0"/>
+                        <a:srgbClr val="CFE6D6"/>
                       </a:solidFill>
                       <a:prstDash val="solid"/>
                       <a:round/>
@@ -6307,7 +8117,7 @@
                     </a:lnR>
                     <a:lnT w="9525" cap="flat" cmpd="sng" algn="ctr">
                       <a:solidFill>
-                        <a:srgbClr val="E4DDF0"/>
+                        <a:srgbClr val="CFE6D6"/>
                       </a:solidFill>
                       <a:prstDash val="solid"/>
                       <a:round/>
@@ -6316,7 +8126,7 @@
                     </a:lnT>
                     <a:lnB w="9525" cap="flat" cmpd="sng" algn="ctr">
                       <a:solidFill>
-                        <a:srgbClr val="E4DDF0"/>
+                        <a:srgbClr val="CFE6D6"/>
                       </a:solidFill>
                       <a:prstDash val="solid"/>
                       <a:round/>
@@ -6357,7 +8167,7 @@
                   <a:tcPr marL="91440" marR="91440" marT="0" marB="0" anchor="ctr">
                     <a:lnL w="9525" cap="flat" cmpd="sng" algn="ctr">
                       <a:solidFill>
-                        <a:srgbClr val="E4DDF0"/>
+                        <a:srgbClr val="CFE6D6"/>
                       </a:solidFill>
                       <a:prstDash val="solid"/>
                       <a:round/>
@@ -6366,7 +8176,7 @@
                     </a:lnL>
                     <a:lnR w="9525" cap="flat" cmpd="sng" algn="ctr">
                       <a:solidFill>
-                        <a:srgbClr val="E4DDF0"/>
+                        <a:srgbClr val="CFE6D6"/>
                       </a:solidFill>
                       <a:prstDash val="solid"/>
                       <a:round/>
@@ -6375,7 +8185,7 @@
                     </a:lnR>
                     <a:lnT w="9525" cap="flat" cmpd="sng" algn="ctr">
                       <a:solidFill>
-                        <a:srgbClr val="E4DDF0"/>
+                        <a:srgbClr val="CFE6D6"/>
                       </a:solidFill>
                       <a:prstDash val="solid"/>
                       <a:round/>
@@ -6384,7 +8194,7 @@
                     </a:lnT>
                     <a:lnB w="9525" cap="flat" cmpd="sng" algn="ctr">
                       <a:solidFill>
-                        <a:srgbClr val="E4DDF0"/>
+                        <a:srgbClr val="CFE6D6"/>
                       </a:solidFill>
                       <a:prstDash val="solid"/>
                       <a:round/>
@@ -6428,7 +8238,7 @@
             <a:r>
               <a:rPr lang="en-US" sz="1000" i="1" dirty="0">
                 <a:solidFill>
-                  <a:srgbClr val="6B6480"/>
+                  <a:srgbClr val="4F6559"/>
                 </a:solidFill>
                 <a:latin typeface="Calibri" pitchFamily="34" charset="0"/>
                 <a:ea typeface="Calibri" pitchFamily="34" charset="-122"/>
@@ -6448,13 +8258,13 @@
 </p:sld>
 </file>
 
-<file path=ppt/slides/slide5.xml><?xml version="1.0" encoding="utf-8"?>
+<file path=ppt/slides/slide6.xml><?xml version="1.0" encoding="utf-8"?>
 <p:sld xmlns:a="http://schemas.openxmlformats.org/drawingml/2006/main" xmlns:r="http://schemas.openxmlformats.org/officeDocument/2006/relationships" xmlns:p="http://schemas.openxmlformats.org/presentationml/2006/main">
-  <p:cSld name="Slide 5">
+  <p:cSld name="Slide 6">
     <p:bg>
       <p:bgPr>
         <a:solidFill>
-          <a:srgbClr val="24163A"/>
+          <a:srgbClr val="0E3B2E"/>
         </a:solidFill>
       </p:bgPr>
     </p:bg>
@@ -6480,7 +8290,7 @@
         </p:nvSpPr>
         <p:spPr>
           <a:xfrm>
-            <a:off x="457200" y="411480"/>
+            <a:off x="457200" y="365760"/>
             <a:ext cx="8229600" cy="594360"/>
           </a:xfrm>
           <a:prstGeom prst="rect">
@@ -6497,7 +8307,7 @@
               <a:buNone/>
             </a:pPr>
             <a:r>
-              <a:rPr lang="en-US" sz="3400" b="1" dirty="0">
+              <a:rPr lang="en-US" sz="3200" b="1" dirty="0">
                 <a:solidFill>
                   <a:srgbClr val="FFFFFF"/>
                 </a:solidFill>
@@ -6507,32 +8317,71 @@
               </a:rPr>
               <a:t>Choosing an Architecture</a:t>
             </a:r>
-            <a:endParaRPr lang="en-US" sz="3400" dirty="0"/>
-          </a:p>
-        </p:txBody>
-      </p:sp>
-      <p:sp>
-        <p:nvSpPr>
-          <p:cNvPr id="3" name="Shape 1"/>
+            <a:endParaRPr lang="en-US" sz="3200" dirty="0"/>
+          </a:p>
+        </p:txBody>
+      </p:sp>
+      <p:sp>
+        <p:nvSpPr>
+          <p:cNvPr id="3" name="Text 1"/>
+          <p:cNvSpPr txBox="1"/>
+          <p:nvPr/>
+        </p:nvSpPr>
+        <p:spPr>
+          <a:xfrm>
+            <a:off x="457200" y="932688"/>
+            <a:ext cx="8229600" cy="320040"/>
+          </a:xfrm>
+          <a:prstGeom prst="rect">
+            <a:avLst/>
+          </a:prstGeom>
+          <a:noFill/>
+          <a:ln/>
+        </p:spPr>
+        <p:txBody>
+          <a:bodyPr wrap="square" lIns="0" tIns="0" rIns="0" bIns="0" rtlCol="0" anchor="ctr"/>
+          <a:lstStyle/>
+          <a:p>
+            <a:pPr indent="0" marL="0">
+              <a:buNone/>
+            </a:pPr>
+            <a:r>
+              <a:rPr lang="en-US" sz="1500" dirty="0">
+                <a:solidFill>
+                  <a:srgbClr val="CFE6D6"/>
+                </a:solidFill>
+                <a:latin typeface="Calibri" pitchFamily="34" charset="0"/>
+                <a:ea typeface="Calibri" pitchFamily="34" charset="-122"/>
+                <a:cs typeface="Calibri" pitchFamily="34" charset="-120"/>
+              </a:rPr>
+              <a:t>Cascaded trades latency and emotional nuance for control, accuracy and flexibility.</a:t>
+            </a:r>
+            <a:endParaRPr lang="en-US" sz="1500" dirty="0"/>
+          </a:p>
+        </p:txBody>
+      </p:sp>
+      <p:sp>
+        <p:nvSpPr>
+          <p:cNvPr id="4" name="Shape 2"/>
           <p:cNvSpPr/>
           <p:nvPr/>
         </p:nvSpPr>
         <p:spPr>
           <a:xfrm>
-            <a:off x="457200" y="1234440"/>
-            <a:ext cx="3977640" cy="2606040"/>
+            <a:off x="457200" y="1417320"/>
+            <a:ext cx="3977640" cy="1783080"/>
           </a:xfrm>
           <a:prstGeom prst="roundRect">
             <a:avLst>
-              <a:gd name="adj" fmla="val 3509"/>
+              <a:gd name="adj" fmla="val 5128"/>
             </a:avLst>
           </a:prstGeom>
           <a:solidFill>
-            <a:srgbClr val="3A2757"/>
+            <a:srgbClr val="185443"/>
           </a:solidFill>
           <a:ln w="12700">
             <a:solidFill>
-              <a:srgbClr val="5B4580"/>
+              <a:srgbClr val="2F7A60"/>
             </a:solidFill>
             <a:prstDash val="solid"/>
           </a:ln>
@@ -6540,14 +8389,14 @@
       </p:sp>
       <p:sp>
         <p:nvSpPr>
-          <p:cNvPr id="4" name="Shape 2"/>
+          <p:cNvPr id="5" name="Shape 3"/>
           <p:cNvSpPr/>
           <p:nvPr/>
         </p:nvSpPr>
         <p:spPr>
           <a:xfrm>
-            <a:off x="685800" y="1463040"/>
-            <a:ext cx="457200" cy="457200"/>
+            <a:off x="658368" y="1581912"/>
+            <a:ext cx="402336" cy="402336"/>
           </a:xfrm>
           <a:prstGeom prst="ellipse">
             <a:avLst/>
@@ -6565,7 +8414,7 @@
       </p:sp>
       <p:pic>
         <p:nvPicPr>
-          <p:cNvPr id="5" name="Image 0" descr="preencoded.png">    </p:cNvPr>
+          <p:cNvPr id="6" name="Image 0" descr="preencoded.png">    </p:cNvPr>
           <p:cNvPicPr>
             <a:picLocks noChangeAspect="1"/>
           </p:cNvPicPr>
@@ -6579,8 +8428,8 @@
         </p:blipFill>
         <p:spPr>
           <a:xfrm>
-            <a:off x="795528" y="1572768"/>
-            <a:ext cx="237744" cy="237744"/>
+            <a:off x="758952" y="1682496"/>
+            <a:ext cx="201168" cy="201168"/>
           </a:xfrm>
           <a:prstGeom prst="rect">
             <a:avLst/>
@@ -6589,14 +8438,14 @@
       </p:pic>
       <p:sp>
         <p:nvSpPr>
-          <p:cNvPr id="6" name="Text 3"/>
+          <p:cNvPr id="7" name="Text 4"/>
           <p:cNvSpPr txBox="1"/>
           <p:nvPr/>
         </p:nvSpPr>
         <p:spPr>
           <a:xfrm>
-            <a:off x="1280160" y="1463040"/>
-            <a:ext cx="2971800" cy="457200"/>
+            <a:off x="1188720" y="1581912"/>
+            <a:ext cx="3063240" cy="402336"/>
           </a:xfrm>
           <a:prstGeom prst="rect">
             <a:avLst/>
@@ -6612,7 +8461,7 @@
               <a:buNone/>
             </a:pPr>
             <a:r>
-              <a:rPr lang="en-US" sz="1700" b="1" dirty="0">
+              <a:rPr lang="en-US" sz="1600" b="1" dirty="0">
                 <a:solidFill>
                   <a:srgbClr val="FFB22E"/>
                 </a:solidFill>
@@ -6622,20 +8471,20 @@
               </a:rPr>
               <a:t>Cascaded fits when…</a:t>
             </a:r>
-            <a:endParaRPr lang="en-US" sz="1700" dirty="0"/>
-          </a:p>
-        </p:txBody>
-      </p:sp>
-      <p:sp>
-        <p:nvSpPr>
-          <p:cNvPr id="7" name="Text 4"/>
+            <a:endParaRPr lang="en-US" sz="1600" dirty="0"/>
+          </a:p>
+        </p:txBody>
+      </p:sp>
+      <p:sp>
+        <p:nvSpPr>
+          <p:cNvPr id="8" name="Text 5"/>
           <p:cNvSpPr txBox="1"/>
           <p:nvPr/>
         </p:nvSpPr>
         <p:spPr>
           <a:xfrm>
-            <a:off x="685800" y="2103120"/>
-            <a:ext cx="3520440" cy="1554480"/>
+            <a:off x="658368" y="2103120"/>
+            <a:ext cx="3575304" cy="960120"/>
           </a:xfrm>
           <a:prstGeom prst="rect">
             <a:avLst/>
@@ -6649,13 +8498,13 @@
           <a:p>
             <a:pPr marL="342900" indent="-342900">
               <a:spcAft>
-                <a:spcPts val="600"/>
+                <a:spcPts val="400"/>
               </a:spcAft>
               <a:buSzPct val="100000"/>
               <a:buChar char="•"/>
             </a:pPr>
             <a:r>
-              <a:rPr lang="en-US" sz="1300" dirty="0">
+              <a:rPr lang="en-US" sz="1200" dirty="0">
                 <a:solidFill>
                   <a:srgbClr val="FFFFFF"/>
                 </a:solidFill>
@@ -6665,18 +8514,18 @@
               </a:rPr>
               <a:t>Answers depend on documents, tools or strict JSON</a:t>
             </a:r>
-            <a:endParaRPr lang="en-US" sz="1300" dirty="0"/>
+            <a:endParaRPr lang="en-US" sz="1200" dirty="0"/>
           </a:p>
           <a:p>
             <a:pPr marL="342900" indent="-342900">
               <a:spcAft>
-                <a:spcPts val="600"/>
+                <a:spcPts val="400"/>
               </a:spcAft>
               <a:buSzPct val="100000"/>
               <a:buChar char="•"/>
             </a:pPr>
             <a:r>
-              <a:rPr lang="en-US" sz="1300" dirty="0">
+              <a:rPr lang="en-US" sz="1200" dirty="0">
                 <a:solidFill>
                   <a:srgbClr val="FFFFFF"/>
                 </a:solidFill>
@@ -6684,20 +8533,20 @@
                 <a:ea typeface="Calibri" pitchFamily="34" charset="-122"/>
                 <a:cs typeface="Calibri" pitchFamily="34" charset="-120"/>
               </a:rPr>
-              <a:t>Compliance needs auditable transcripts and text guardrails</a:t>
-            </a:r>
-            <a:endParaRPr lang="en-US" sz="1300" dirty="0"/>
+              <a:t>Compliance needs transcripts and text guardrails</a:t>
+            </a:r>
+            <a:endParaRPr lang="en-US" sz="1200" dirty="0"/>
           </a:p>
           <a:p>
             <a:pPr marL="342900" indent="-342900">
               <a:spcAft>
-                <a:spcPts val="600"/>
+                <a:spcPts val="400"/>
               </a:spcAft>
               <a:buSzPct val="100000"/>
               <a:buChar char="•"/>
             </a:pPr>
             <a:r>
-              <a:rPr lang="en-US" sz="1300" dirty="0">
+              <a:rPr lang="en-US" sz="1200" dirty="0">
                 <a:solidFill>
                   <a:srgbClr val="FFFFFF"/>
                 </a:solidFill>
@@ -6707,53 +8556,32 @@
               </a:rPr>
               <a:t>Brand voices must be swappable</a:t>
             </a:r>
-            <a:endParaRPr lang="en-US" sz="1300" dirty="0"/>
-          </a:p>
-          <a:p>
-            <a:pPr marL="342900" indent="-342900">
-              <a:spcAft>
-                <a:spcPts val="600"/>
-              </a:spcAft>
-              <a:buSzPct val="100000"/>
-              <a:buChar char="•"/>
-            </a:pPr>
-            <a:r>
-              <a:rPr lang="en-US" sz="1300" dirty="0">
-                <a:solidFill>
-                  <a:srgbClr val="FFFFFF"/>
-                </a:solidFill>
-                <a:latin typeface="Calibri" pitchFamily="34" charset="0"/>
-                <a:ea typeface="Calibri" pitchFamily="34" charset="-122"/>
-                <a:cs typeface="Calibri" pitchFamily="34" charset="-120"/>
-              </a:rPr>
-              <a:t>Cost and independent scaling matter</a:t>
-            </a:r>
-            <a:endParaRPr lang="en-US" sz="1300" dirty="0"/>
-          </a:p>
-        </p:txBody>
-      </p:sp>
-      <p:sp>
-        <p:nvSpPr>
-          <p:cNvPr id="8" name="Shape 5"/>
+            <a:endParaRPr lang="en-US" sz="1200" dirty="0"/>
+          </a:p>
+        </p:txBody>
+      </p:sp>
+      <p:sp>
+        <p:nvSpPr>
+          <p:cNvPr id="9" name="Shape 6"/>
           <p:cNvSpPr/>
           <p:nvPr/>
         </p:nvSpPr>
         <p:spPr>
           <a:xfrm>
-            <a:off x="4709160" y="1234440"/>
-            <a:ext cx="3977640" cy="2606040"/>
+            <a:off x="4709160" y="1417320"/>
+            <a:ext cx="3977640" cy="1783080"/>
           </a:xfrm>
           <a:prstGeom prst="roundRect">
             <a:avLst>
-              <a:gd name="adj" fmla="val 3509"/>
+              <a:gd name="adj" fmla="val 5128"/>
             </a:avLst>
           </a:prstGeom>
           <a:solidFill>
-            <a:srgbClr val="3A2757"/>
+            <a:srgbClr val="185443"/>
           </a:solidFill>
           <a:ln w="12700">
             <a:solidFill>
-              <a:srgbClr val="5B4580"/>
+              <a:srgbClr val="2F7A60"/>
             </a:solidFill>
             <a:prstDash val="solid"/>
           </a:ln>
@@ -6761,24 +8589,24 @@
       </p:sp>
       <p:sp>
         <p:nvSpPr>
-          <p:cNvPr id="9" name="Shape 6"/>
+          <p:cNvPr id="10" name="Shape 7"/>
           <p:cNvSpPr/>
           <p:nvPr/>
         </p:nvSpPr>
         <p:spPr>
           <a:xfrm>
-            <a:off x="4937760" y="1463040"/>
-            <a:ext cx="457200" cy="457200"/>
+            <a:off x="4910328" y="1581912"/>
+            <a:ext cx="402336" cy="402336"/>
           </a:xfrm>
           <a:prstGeom prst="ellipse">
             <a:avLst/>
           </a:prstGeom>
           <a:solidFill>
-            <a:srgbClr val="2BB3A3"/>
+            <a:srgbClr val="3FA7D6"/>
           </a:solidFill>
           <a:ln w="12700">
             <a:solidFill>
-              <a:srgbClr val="2BB3A3"/>
+              <a:srgbClr val="3FA7D6"/>
             </a:solidFill>
             <a:prstDash val="solid"/>
           </a:ln>
@@ -6786,7 +8614,7 @@
       </p:sp>
       <p:pic>
         <p:nvPicPr>
-          <p:cNvPr id="10" name="Image 1" descr="preencoded.png">    </p:cNvPr>
+          <p:cNvPr id="11" name="Image 1" descr="preencoded.png">    </p:cNvPr>
           <p:cNvPicPr>
             <a:picLocks noChangeAspect="1"/>
           </p:cNvPicPr>
@@ -6800,8 +8628,8 @@
         </p:blipFill>
         <p:spPr>
           <a:xfrm>
-            <a:off x="5047488" y="1572768"/>
-            <a:ext cx="237744" cy="237744"/>
+            <a:off x="5010912" y="1682496"/>
+            <a:ext cx="201168" cy="201168"/>
           </a:xfrm>
           <a:prstGeom prst="rect">
             <a:avLst/>
@@ -6810,14 +8638,14 @@
       </p:pic>
       <p:sp>
         <p:nvSpPr>
-          <p:cNvPr id="11" name="Text 7"/>
+          <p:cNvPr id="12" name="Text 8"/>
           <p:cNvSpPr txBox="1"/>
           <p:nvPr/>
         </p:nvSpPr>
         <p:spPr>
           <a:xfrm>
-            <a:off x="5532120" y="1463040"/>
-            <a:ext cx="2971800" cy="457200"/>
+            <a:off x="5440680" y="1581912"/>
+            <a:ext cx="3063240" cy="402336"/>
           </a:xfrm>
           <a:prstGeom prst="rect">
             <a:avLst/>
@@ -6833,9 +8661,9 @@
               <a:buNone/>
             </a:pPr>
             <a:r>
-              <a:rPr lang="en-US" sz="1700" b="1" dirty="0">
-                <a:solidFill>
-                  <a:srgbClr val="2BB3A3"/>
+              <a:rPr lang="en-US" sz="1600" b="1" dirty="0">
+                <a:solidFill>
+                  <a:srgbClr val="3FA7D6"/>
                 </a:solidFill>
                 <a:latin typeface="Calibri" pitchFamily="34" charset="0"/>
                 <a:ea typeface="Calibri" pitchFamily="34" charset="-122"/>
@@ -6843,20 +8671,20 @@
               </a:rPr>
               <a:t>Omni fits when…</a:t>
             </a:r>
-            <a:endParaRPr lang="en-US" sz="1700" dirty="0"/>
-          </a:p>
-        </p:txBody>
-      </p:sp>
-      <p:sp>
-        <p:nvSpPr>
-          <p:cNvPr id="12" name="Text 8"/>
+            <a:endParaRPr lang="en-US" sz="1600" dirty="0"/>
+          </a:p>
+        </p:txBody>
+      </p:sp>
+      <p:sp>
+        <p:nvSpPr>
+          <p:cNvPr id="13" name="Text 9"/>
           <p:cNvSpPr txBox="1"/>
           <p:nvPr/>
         </p:nvSpPr>
         <p:spPr>
           <a:xfrm>
-            <a:off x="4937760" y="2103120"/>
-            <a:ext cx="3520440" cy="1554480"/>
+            <a:off x="4910328" y="2103120"/>
+            <a:ext cx="3575304" cy="960120"/>
           </a:xfrm>
           <a:prstGeom prst="rect">
             <a:avLst/>
@@ -6870,13 +8698,13 @@
           <a:p>
             <a:pPr marL="342900" indent="-342900">
               <a:spcAft>
-                <a:spcPts val="600"/>
+                <a:spcPts val="400"/>
               </a:spcAft>
               <a:buSzPct val="100000"/>
               <a:buChar char="•"/>
             </a:pPr>
             <a:r>
-              <a:rPr lang="en-US" sz="1300" dirty="0">
+              <a:rPr lang="en-US" sz="1200" dirty="0">
                 <a:solidFill>
                   <a:srgbClr val="FFFFFF"/>
                 </a:solidFill>
@@ -6886,18 +8714,18 @@
               </a:rPr>
               <a:t>Natural, sub-500 ms conversation is the product</a:t>
             </a:r>
-            <a:endParaRPr lang="en-US" sz="1300" dirty="0"/>
+            <a:endParaRPr lang="en-US" sz="1200" dirty="0"/>
           </a:p>
           <a:p>
             <a:pPr marL="342900" indent="-342900">
               <a:spcAft>
-                <a:spcPts val="600"/>
+                <a:spcPts val="400"/>
               </a:spcAft>
               <a:buSzPct val="100000"/>
               <a:buChar char="•"/>
             </a:pPr>
             <a:r>
-              <a:rPr lang="en-US" sz="1300" dirty="0">
+              <a:rPr lang="en-US" sz="1200" dirty="0">
                 <a:solidFill>
                   <a:srgbClr val="FFFFFF"/>
                 </a:solidFill>
@@ -6907,18 +8735,18 @@
               </a:rPr>
               <a:t>Tone and emotion must be heard and mirrored</a:t>
             </a:r>
-            <a:endParaRPr lang="en-US" sz="1300" dirty="0"/>
+            <a:endParaRPr lang="en-US" sz="1200" dirty="0"/>
           </a:p>
           <a:p>
             <a:pPr marL="342900" indent="-342900">
               <a:spcAft>
-                <a:spcPts val="600"/>
+                <a:spcPts val="400"/>
               </a:spcAft>
               <a:buSzPct val="100000"/>
               <a:buChar char="•"/>
             </a:pPr>
             <a:r>
-              <a:rPr lang="en-US" sz="1300" dirty="0">
+              <a:rPr lang="en-US" sz="1200" dirty="0">
                 <a:solidFill>
                   <a:srgbClr val="FFFFFF"/>
                 </a:solidFill>
@@ -6926,43 +8754,22 @@
                 <a:ea typeface="Calibri" pitchFamily="34" charset="-122"/>
                 <a:cs typeface="Calibri" pitchFamily="34" charset="-120"/>
               </a:rPr>
-              <a:t>Users interrupt often</a:t>
-            </a:r>
-            <a:endParaRPr lang="en-US" sz="1300" dirty="0"/>
-          </a:p>
-          <a:p>
-            <a:pPr marL="342900" indent="-342900">
-              <a:spcAft>
-                <a:spcPts val="600"/>
-              </a:spcAft>
-              <a:buSzPct val="100000"/>
-              <a:buChar char="•"/>
-            </a:pPr>
-            <a:r>
-              <a:rPr lang="en-US" sz="1300" dirty="0">
-                <a:solidFill>
-                  <a:srgbClr val="FFFFFF"/>
-                </a:solidFill>
-                <a:latin typeface="Calibri" pitchFamily="34" charset="0"/>
-                <a:ea typeface="Calibri" pitchFamily="34" charset="-122"/>
-                <a:cs typeface="Calibri" pitchFamily="34" charset="-120"/>
-              </a:rPr>
-              <a:t>Reasoning depth is modest</a:t>
-            </a:r>
-            <a:endParaRPr lang="en-US" sz="1300" dirty="0"/>
-          </a:p>
-        </p:txBody>
-      </p:sp>
-      <p:sp>
-        <p:nvSpPr>
-          <p:cNvPr id="13" name="Text 9"/>
+              <a:t>Users interrupt often; reasoning is modest</a:t>
+            </a:r>
+            <a:endParaRPr lang="en-US" sz="1200" dirty="0"/>
+          </a:p>
+        </p:txBody>
+      </p:sp>
+      <p:sp>
+        <p:nvSpPr>
+          <p:cNvPr id="14" name="Text 10"/>
           <p:cNvSpPr txBox="1"/>
           <p:nvPr/>
         </p:nvSpPr>
         <p:spPr>
           <a:xfrm>
-            <a:off x="457200" y="4297680"/>
-            <a:ext cx="8229600" cy="365760"/>
+            <a:off x="457200" y="3429000"/>
+            <a:ext cx="8229600" cy="228600"/>
           </a:xfrm>
           <a:prstGeom prst="rect">
             <a:avLst/>
@@ -6978,17 +8785,647 @@
               <a:buNone/>
             </a:pPr>
             <a:r>
-              <a:rPr lang="en-US" sz="1600" i="1" dirty="0">
-                <a:solidFill>
-                  <a:srgbClr val="E4DDF0"/>
-                </a:solidFill>
-                <a:latin typeface="Cambria" pitchFamily="34" charset="0"/>
-                <a:ea typeface="Cambria" pitchFamily="34" charset="-122"/>
-                <a:cs typeface="Cambria" pitchFamily="34" charset="-120"/>
-              </a:rPr>
-              <a:t>Cascaded trades latency and emotional nuance for control, accuracy and flexibility.</a:t>
-            </a:r>
-            <a:endParaRPr lang="en-US" sz="1600" dirty="0"/>
+              <a:rPr lang="en-US" sz="1100" b="1" spc="200" kern="0" dirty="0">
+                <a:solidFill>
+                  <a:srgbClr val="FFB22E"/>
+                </a:solidFill>
+                <a:latin typeface="Calibri" pitchFamily="34" charset="0"/>
+                <a:ea typeface="Calibri" pitchFamily="34" charset="-122"/>
+                <a:cs typeface="Calibri" pitchFamily="34" charset="-120"/>
+              </a:rPr>
+              <a:t>EXAMPLE OMNI / SPEECH-TO-SPEECH MODELS</a:t>
+            </a:r>
+            <a:endParaRPr lang="en-US" sz="1100" dirty="0"/>
+          </a:p>
+        </p:txBody>
+      </p:sp>
+      <p:sp>
+        <p:nvSpPr>
+          <p:cNvPr id="15" name="Shape 11"/>
+          <p:cNvSpPr/>
+          <p:nvPr/>
+        </p:nvSpPr>
+        <p:spPr>
+          <a:xfrm>
+            <a:off x="457200" y="3749040"/>
+            <a:ext cx="1280160" cy="777240"/>
+          </a:xfrm>
+          <a:prstGeom prst="roundRect">
+            <a:avLst>
+              <a:gd name="adj" fmla="val 11765"/>
+            </a:avLst>
+          </a:prstGeom>
+          <a:solidFill>
+            <a:srgbClr val="FFFFFF"/>
+          </a:solidFill>
+          <a:ln w="12700">
+            <a:solidFill>
+              <a:srgbClr val="FFFFFF"/>
+            </a:solidFill>
+            <a:prstDash val="solid"/>
+          </a:ln>
+        </p:spPr>
+      </p:sp>
+      <p:sp>
+        <p:nvSpPr>
+          <p:cNvPr id="16" name="Text 12"/>
+          <p:cNvSpPr txBox="1"/>
+          <p:nvPr/>
+        </p:nvSpPr>
+        <p:spPr>
+          <a:xfrm>
+            <a:off x="457200" y="3877056"/>
+            <a:ext cx="1280160" cy="292608"/>
+          </a:xfrm>
+          <a:prstGeom prst="rect">
+            <a:avLst/>
+          </a:prstGeom>
+          <a:noFill/>
+          <a:ln/>
+        </p:spPr>
+        <p:txBody>
+          <a:bodyPr wrap="square" lIns="0" tIns="0" rIns="0" bIns="0" rtlCol="0" anchor="ctr"/>
+          <a:lstStyle/>
+          <a:p>
+            <a:pPr algn="ctr" indent="0" marL="0">
+              <a:buNone/>
+            </a:pPr>
+            <a:r>
+              <a:rPr lang="en-US" sz="1300" b="1" dirty="0">
+                <a:solidFill>
+                  <a:srgbClr val="0E3B2E"/>
+                </a:solidFill>
+                <a:latin typeface="Calibri" pitchFamily="34" charset="0"/>
+                <a:ea typeface="Calibri" pitchFamily="34" charset="-122"/>
+                <a:cs typeface="Calibri" pitchFamily="34" charset="-120"/>
+              </a:rPr>
+              <a:t>Qwen3-Omni</a:t>
+            </a:r>
+            <a:endParaRPr lang="en-US" sz="1300" dirty="0"/>
+          </a:p>
+        </p:txBody>
+      </p:sp>
+      <p:sp>
+        <p:nvSpPr>
+          <p:cNvPr id="17" name="Text 13"/>
+          <p:cNvSpPr txBox="1"/>
+          <p:nvPr/>
+        </p:nvSpPr>
+        <p:spPr>
+          <a:xfrm>
+            <a:off x="457200" y="4178808"/>
+            <a:ext cx="1280160" cy="237744"/>
+          </a:xfrm>
+          <a:prstGeom prst="rect">
+            <a:avLst/>
+          </a:prstGeom>
+          <a:noFill/>
+          <a:ln/>
+        </p:spPr>
+        <p:txBody>
+          <a:bodyPr wrap="square" lIns="0" tIns="0" rIns="0" bIns="0" rtlCol="0" anchor="ctr"/>
+          <a:lstStyle/>
+          <a:p>
+            <a:pPr algn="ctr" indent="0" marL="0">
+              <a:buNone/>
+            </a:pPr>
+            <a:r>
+              <a:rPr lang="en-US" sz="1000" dirty="0">
+                <a:solidFill>
+                  <a:srgbClr val="4F6559"/>
+                </a:solidFill>
+                <a:latin typeface="Calibri" pitchFamily="34" charset="0"/>
+                <a:ea typeface="Calibri" pitchFamily="34" charset="-122"/>
+                <a:cs typeface="Calibri" pitchFamily="34" charset="-120"/>
+              </a:rPr>
+              <a:t>Alibaba · open</a:t>
+            </a:r>
+            <a:endParaRPr lang="en-US" sz="1000" dirty="0"/>
+          </a:p>
+        </p:txBody>
+      </p:sp>
+      <p:sp>
+        <p:nvSpPr>
+          <p:cNvPr id="18" name="Shape 14"/>
+          <p:cNvSpPr/>
+          <p:nvPr/>
+        </p:nvSpPr>
+        <p:spPr>
+          <a:xfrm>
+            <a:off x="1847088" y="3749040"/>
+            <a:ext cx="1280160" cy="777240"/>
+          </a:xfrm>
+          <a:prstGeom prst="roundRect">
+            <a:avLst>
+              <a:gd name="adj" fmla="val 11765"/>
+            </a:avLst>
+          </a:prstGeom>
+          <a:solidFill>
+            <a:srgbClr val="FFFFFF"/>
+          </a:solidFill>
+          <a:ln w="12700">
+            <a:solidFill>
+              <a:srgbClr val="FFFFFF"/>
+            </a:solidFill>
+            <a:prstDash val="solid"/>
+          </a:ln>
+        </p:spPr>
+      </p:sp>
+      <p:sp>
+        <p:nvSpPr>
+          <p:cNvPr id="19" name="Text 15"/>
+          <p:cNvSpPr txBox="1"/>
+          <p:nvPr/>
+        </p:nvSpPr>
+        <p:spPr>
+          <a:xfrm>
+            <a:off x="1847088" y="3877056"/>
+            <a:ext cx="1280160" cy="292608"/>
+          </a:xfrm>
+          <a:prstGeom prst="rect">
+            <a:avLst/>
+          </a:prstGeom>
+          <a:noFill/>
+          <a:ln/>
+        </p:spPr>
+        <p:txBody>
+          <a:bodyPr wrap="square" lIns="0" tIns="0" rIns="0" bIns="0" rtlCol="0" anchor="ctr"/>
+          <a:lstStyle/>
+          <a:p>
+            <a:pPr algn="ctr" indent="0" marL="0">
+              <a:buNone/>
+            </a:pPr>
+            <a:r>
+              <a:rPr lang="en-US" sz="1300" b="1" dirty="0">
+                <a:solidFill>
+                  <a:srgbClr val="0E3B2E"/>
+                </a:solidFill>
+                <a:latin typeface="Calibri" pitchFamily="34" charset="0"/>
+                <a:ea typeface="Calibri" pitchFamily="34" charset="-122"/>
+                <a:cs typeface="Calibri" pitchFamily="34" charset="-120"/>
+              </a:rPr>
+              <a:t>Moshi</a:t>
+            </a:r>
+            <a:endParaRPr lang="en-US" sz="1300" dirty="0"/>
+          </a:p>
+        </p:txBody>
+      </p:sp>
+      <p:sp>
+        <p:nvSpPr>
+          <p:cNvPr id="20" name="Text 16"/>
+          <p:cNvSpPr txBox="1"/>
+          <p:nvPr/>
+        </p:nvSpPr>
+        <p:spPr>
+          <a:xfrm>
+            <a:off x="1847088" y="4178808"/>
+            <a:ext cx="1280160" cy="237744"/>
+          </a:xfrm>
+          <a:prstGeom prst="rect">
+            <a:avLst/>
+          </a:prstGeom>
+          <a:noFill/>
+          <a:ln/>
+        </p:spPr>
+        <p:txBody>
+          <a:bodyPr wrap="square" lIns="0" tIns="0" rIns="0" bIns="0" rtlCol="0" anchor="ctr"/>
+          <a:lstStyle/>
+          <a:p>
+            <a:pPr algn="ctr" indent="0" marL="0">
+              <a:buNone/>
+            </a:pPr>
+            <a:r>
+              <a:rPr lang="en-US" sz="1000" dirty="0">
+                <a:solidFill>
+                  <a:srgbClr val="4F6559"/>
+                </a:solidFill>
+                <a:latin typeface="Calibri" pitchFamily="34" charset="0"/>
+                <a:ea typeface="Calibri" pitchFamily="34" charset="-122"/>
+                <a:cs typeface="Calibri" pitchFamily="34" charset="-120"/>
+              </a:rPr>
+              <a:t>Kyutai · open</a:t>
+            </a:r>
+            <a:endParaRPr lang="en-US" sz="1000" dirty="0"/>
+          </a:p>
+        </p:txBody>
+      </p:sp>
+      <p:sp>
+        <p:nvSpPr>
+          <p:cNvPr id="21" name="Shape 17"/>
+          <p:cNvSpPr/>
+          <p:nvPr/>
+        </p:nvSpPr>
+        <p:spPr>
+          <a:xfrm>
+            <a:off x="3236976" y="3749040"/>
+            <a:ext cx="1280160" cy="777240"/>
+          </a:xfrm>
+          <a:prstGeom prst="roundRect">
+            <a:avLst>
+              <a:gd name="adj" fmla="val 11765"/>
+            </a:avLst>
+          </a:prstGeom>
+          <a:solidFill>
+            <a:srgbClr val="FFFFFF"/>
+          </a:solidFill>
+          <a:ln w="12700">
+            <a:solidFill>
+              <a:srgbClr val="FFFFFF"/>
+            </a:solidFill>
+            <a:prstDash val="solid"/>
+          </a:ln>
+        </p:spPr>
+      </p:sp>
+      <p:sp>
+        <p:nvSpPr>
+          <p:cNvPr id="22" name="Text 18"/>
+          <p:cNvSpPr txBox="1"/>
+          <p:nvPr/>
+        </p:nvSpPr>
+        <p:spPr>
+          <a:xfrm>
+            <a:off x="3236976" y="3877056"/>
+            <a:ext cx="1280160" cy="292608"/>
+          </a:xfrm>
+          <a:prstGeom prst="rect">
+            <a:avLst/>
+          </a:prstGeom>
+          <a:noFill/>
+          <a:ln/>
+        </p:spPr>
+        <p:txBody>
+          <a:bodyPr wrap="square" lIns="0" tIns="0" rIns="0" bIns="0" rtlCol="0" anchor="ctr"/>
+          <a:lstStyle/>
+          <a:p>
+            <a:pPr algn="ctr" indent="0" marL="0">
+              <a:buNone/>
+            </a:pPr>
+            <a:r>
+              <a:rPr lang="en-US" sz="1300" b="1" dirty="0">
+                <a:solidFill>
+                  <a:srgbClr val="0E3B2E"/>
+                </a:solidFill>
+                <a:latin typeface="Calibri" pitchFamily="34" charset="0"/>
+                <a:ea typeface="Calibri" pitchFamily="34" charset="-122"/>
+                <a:cs typeface="Calibri" pitchFamily="34" charset="-120"/>
+              </a:rPr>
+              <a:t>MiniCPM-o</a:t>
+            </a:r>
+            <a:endParaRPr lang="en-US" sz="1300" dirty="0"/>
+          </a:p>
+        </p:txBody>
+      </p:sp>
+      <p:sp>
+        <p:nvSpPr>
+          <p:cNvPr id="23" name="Text 19"/>
+          <p:cNvSpPr txBox="1"/>
+          <p:nvPr/>
+        </p:nvSpPr>
+        <p:spPr>
+          <a:xfrm>
+            <a:off x="3236976" y="4178808"/>
+            <a:ext cx="1280160" cy="237744"/>
+          </a:xfrm>
+          <a:prstGeom prst="rect">
+            <a:avLst/>
+          </a:prstGeom>
+          <a:noFill/>
+          <a:ln/>
+        </p:spPr>
+        <p:txBody>
+          <a:bodyPr wrap="square" lIns="0" tIns="0" rIns="0" bIns="0" rtlCol="0" anchor="ctr"/>
+          <a:lstStyle/>
+          <a:p>
+            <a:pPr algn="ctr" indent="0" marL="0">
+              <a:buNone/>
+            </a:pPr>
+            <a:r>
+              <a:rPr lang="en-US" sz="1000" dirty="0">
+                <a:solidFill>
+                  <a:srgbClr val="4F6559"/>
+                </a:solidFill>
+                <a:latin typeface="Calibri" pitchFamily="34" charset="0"/>
+                <a:ea typeface="Calibri" pitchFamily="34" charset="-122"/>
+                <a:cs typeface="Calibri" pitchFamily="34" charset="-120"/>
+              </a:rPr>
+              <a:t>OpenBMB · open</a:t>
+            </a:r>
+            <a:endParaRPr lang="en-US" sz="1000" dirty="0"/>
+          </a:p>
+        </p:txBody>
+      </p:sp>
+      <p:sp>
+        <p:nvSpPr>
+          <p:cNvPr id="24" name="Shape 20"/>
+          <p:cNvSpPr/>
+          <p:nvPr/>
+        </p:nvSpPr>
+        <p:spPr>
+          <a:xfrm>
+            <a:off x="4626864" y="3749040"/>
+            <a:ext cx="1280160" cy="777240"/>
+          </a:xfrm>
+          <a:prstGeom prst="roundRect">
+            <a:avLst>
+              <a:gd name="adj" fmla="val 11765"/>
+            </a:avLst>
+          </a:prstGeom>
+          <a:solidFill>
+            <a:srgbClr val="FFFFFF"/>
+          </a:solidFill>
+          <a:ln w="12700">
+            <a:solidFill>
+              <a:srgbClr val="FFFFFF"/>
+            </a:solidFill>
+            <a:prstDash val="solid"/>
+          </a:ln>
+        </p:spPr>
+      </p:sp>
+      <p:sp>
+        <p:nvSpPr>
+          <p:cNvPr id="25" name="Text 21"/>
+          <p:cNvSpPr txBox="1"/>
+          <p:nvPr/>
+        </p:nvSpPr>
+        <p:spPr>
+          <a:xfrm>
+            <a:off x="4626864" y="3877056"/>
+            <a:ext cx="1280160" cy="292608"/>
+          </a:xfrm>
+          <a:prstGeom prst="rect">
+            <a:avLst/>
+          </a:prstGeom>
+          <a:noFill/>
+          <a:ln/>
+        </p:spPr>
+        <p:txBody>
+          <a:bodyPr wrap="square" lIns="0" tIns="0" rIns="0" bIns="0" rtlCol="0" anchor="ctr"/>
+          <a:lstStyle/>
+          <a:p>
+            <a:pPr algn="ctr" indent="0" marL="0">
+              <a:buNone/>
+            </a:pPr>
+            <a:r>
+              <a:rPr lang="en-US" sz="1300" b="1" dirty="0">
+                <a:solidFill>
+                  <a:srgbClr val="0E3B2E"/>
+                </a:solidFill>
+                <a:latin typeface="Calibri" pitchFamily="34" charset="0"/>
+                <a:ea typeface="Calibri" pitchFamily="34" charset="-122"/>
+                <a:cs typeface="Calibri" pitchFamily="34" charset="-120"/>
+              </a:rPr>
+              <a:t>GLM-4-Voice</a:t>
+            </a:r>
+            <a:endParaRPr lang="en-US" sz="1300" dirty="0"/>
+          </a:p>
+        </p:txBody>
+      </p:sp>
+      <p:sp>
+        <p:nvSpPr>
+          <p:cNvPr id="26" name="Text 22"/>
+          <p:cNvSpPr txBox="1"/>
+          <p:nvPr/>
+        </p:nvSpPr>
+        <p:spPr>
+          <a:xfrm>
+            <a:off x="4626864" y="4178808"/>
+            <a:ext cx="1280160" cy="237744"/>
+          </a:xfrm>
+          <a:prstGeom prst="rect">
+            <a:avLst/>
+          </a:prstGeom>
+          <a:noFill/>
+          <a:ln/>
+        </p:spPr>
+        <p:txBody>
+          <a:bodyPr wrap="square" lIns="0" tIns="0" rIns="0" bIns="0" rtlCol="0" anchor="ctr"/>
+          <a:lstStyle/>
+          <a:p>
+            <a:pPr algn="ctr" indent="0" marL="0">
+              <a:buNone/>
+            </a:pPr>
+            <a:r>
+              <a:rPr lang="en-US" sz="1000" dirty="0">
+                <a:solidFill>
+                  <a:srgbClr val="4F6559"/>
+                </a:solidFill>
+                <a:latin typeface="Calibri" pitchFamily="34" charset="0"/>
+                <a:ea typeface="Calibri" pitchFamily="34" charset="-122"/>
+                <a:cs typeface="Calibri" pitchFamily="34" charset="-120"/>
+              </a:rPr>
+              <a:t>Zhipu AI · open</a:t>
+            </a:r>
+            <a:endParaRPr lang="en-US" sz="1000" dirty="0"/>
+          </a:p>
+        </p:txBody>
+      </p:sp>
+      <p:sp>
+        <p:nvSpPr>
+          <p:cNvPr id="27" name="Shape 23"/>
+          <p:cNvSpPr/>
+          <p:nvPr/>
+        </p:nvSpPr>
+        <p:spPr>
+          <a:xfrm>
+            <a:off x="6016752" y="3749040"/>
+            <a:ext cx="1280160" cy="777240"/>
+          </a:xfrm>
+          <a:prstGeom prst="roundRect">
+            <a:avLst>
+              <a:gd name="adj" fmla="val 11765"/>
+            </a:avLst>
+          </a:prstGeom>
+          <a:solidFill>
+            <a:srgbClr val="185443"/>
+          </a:solidFill>
+          <a:ln w="12700">
+            <a:solidFill>
+              <a:srgbClr val="2F7A60"/>
+            </a:solidFill>
+            <a:prstDash val="solid"/>
+          </a:ln>
+        </p:spPr>
+      </p:sp>
+      <p:sp>
+        <p:nvSpPr>
+          <p:cNvPr id="28" name="Text 24"/>
+          <p:cNvSpPr txBox="1"/>
+          <p:nvPr/>
+        </p:nvSpPr>
+        <p:spPr>
+          <a:xfrm>
+            <a:off x="6016752" y="3877056"/>
+            <a:ext cx="1280160" cy="292608"/>
+          </a:xfrm>
+          <a:prstGeom prst="rect">
+            <a:avLst/>
+          </a:prstGeom>
+          <a:noFill/>
+          <a:ln/>
+        </p:spPr>
+        <p:txBody>
+          <a:bodyPr wrap="square" lIns="0" tIns="0" rIns="0" bIns="0" rtlCol="0" anchor="ctr"/>
+          <a:lstStyle/>
+          <a:p>
+            <a:pPr algn="ctr" indent="0" marL="0">
+              <a:buNone/>
+            </a:pPr>
+            <a:r>
+              <a:rPr lang="en-US" sz="1300" b="1" dirty="0">
+                <a:solidFill>
+                  <a:srgbClr val="FFFFFF"/>
+                </a:solidFill>
+                <a:latin typeface="Calibri" pitchFamily="34" charset="0"/>
+                <a:ea typeface="Calibri" pitchFamily="34" charset="-122"/>
+                <a:cs typeface="Calibri" pitchFamily="34" charset="-120"/>
+              </a:rPr>
+              <a:t>GPT Realtime</a:t>
+            </a:r>
+            <a:endParaRPr lang="en-US" sz="1300" dirty="0"/>
+          </a:p>
+        </p:txBody>
+      </p:sp>
+      <p:sp>
+        <p:nvSpPr>
+          <p:cNvPr id="29" name="Text 25"/>
+          <p:cNvSpPr txBox="1"/>
+          <p:nvPr/>
+        </p:nvSpPr>
+        <p:spPr>
+          <a:xfrm>
+            <a:off x="6016752" y="4178808"/>
+            <a:ext cx="1280160" cy="237744"/>
+          </a:xfrm>
+          <a:prstGeom prst="rect">
+            <a:avLst/>
+          </a:prstGeom>
+          <a:noFill/>
+          <a:ln/>
+        </p:spPr>
+        <p:txBody>
+          <a:bodyPr wrap="square" lIns="0" tIns="0" rIns="0" bIns="0" rtlCol="0" anchor="ctr"/>
+          <a:lstStyle/>
+          <a:p>
+            <a:pPr algn="ctr" indent="0" marL="0">
+              <a:buNone/>
+            </a:pPr>
+            <a:r>
+              <a:rPr lang="en-US" sz="1000" dirty="0">
+                <a:solidFill>
+                  <a:srgbClr val="CFE6D6"/>
+                </a:solidFill>
+                <a:latin typeface="Calibri" pitchFamily="34" charset="0"/>
+                <a:ea typeface="Calibri" pitchFamily="34" charset="-122"/>
+                <a:cs typeface="Calibri" pitchFamily="34" charset="-120"/>
+              </a:rPr>
+              <a:t>OpenAI · API</a:t>
+            </a:r>
+            <a:endParaRPr lang="en-US" sz="1000" dirty="0"/>
+          </a:p>
+        </p:txBody>
+      </p:sp>
+      <p:sp>
+        <p:nvSpPr>
+          <p:cNvPr id="30" name="Shape 26"/>
+          <p:cNvSpPr/>
+          <p:nvPr/>
+        </p:nvSpPr>
+        <p:spPr>
+          <a:xfrm>
+            <a:off x="7406640" y="3749040"/>
+            <a:ext cx="1280160" cy="777240"/>
+          </a:xfrm>
+          <a:prstGeom prst="roundRect">
+            <a:avLst>
+              <a:gd name="adj" fmla="val 11765"/>
+            </a:avLst>
+          </a:prstGeom>
+          <a:solidFill>
+            <a:srgbClr val="185443"/>
+          </a:solidFill>
+          <a:ln w="12700">
+            <a:solidFill>
+              <a:srgbClr val="2F7A60"/>
+            </a:solidFill>
+            <a:prstDash val="solid"/>
+          </a:ln>
+        </p:spPr>
+      </p:sp>
+      <p:sp>
+        <p:nvSpPr>
+          <p:cNvPr id="31" name="Text 27"/>
+          <p:cNvSpPr txBox="1"/>
+          <p:nvPr/>
+        </p:nvSpPr>
+        <p:spPr>
+          <a:xfrm>
+            <a:off x="7406640" y="3877056"/>
+            <a:ext cx="1280160" cy="292608"/>
+          </a:xfrm>
+          <a:prstGeom prst="rect">
+            <a:avLst/>
+          </a:prstGeom>
+          <a:noFill/>
+          <a:ln/>
+        </p:spPr>
+        <p:txBody>
+          <a:bodyPr wrap="square" lIns="0" tIns="0" rIns="0" bIns="0" rtlCol="0" anchor="ctr"/>
+          <a:lstStyle/>
+          <a:p>
+            <a:pPr algn="ctr" indent="0" marL="0">
+              <a:buNone/>
+            </a:pPr>
+            <a:r>
+              <a:rPr lang="en-US" sz="1300" b="1" dirty="0">
+                <a:solidFill>
+                  <a:srgbClr val="FFFFFF"/>
+                </a:solidFill>
+                <a:latin typeface="Calibri" pitchFamily="34" charset="0"/>
+                <a:ea typeface="Calibri" pitchFamily="34" charset="-122"/>
+                <a:cs typeface="Calibri" pitchFamily="34" charset="-120"/>
+              </a:rPr>
+              <a:t>Gemini Live</a:t>
+            </a:r>
+            <a:endParaRPr lang="en-US" sz="1300" dirty="0"/>
+          </a:p>
+        </p:txBody>
+      </p:sp>
+      <p:sp>
+        <p:nvSpPr>
+          <p:cNvPr id="32" name="Text 28"/>
+          <p:cNvSpPr txBox="1"/>
+          <p:nvPr/>
+        </p:nvSpPr>
+        <p:spPr>
+          <a:xfrm>
+            <a:off x="7406640" y="4178808"/>
+            <a:ext cx="1280160" cy="237744"/>
+          </a:xfrm>
+          <a:prstGeom prst="rect">
+            <a:avLst/>
+          </a:prstGeom>
+          <a:noFill/>
+          <a:ln/>
+        </p:spPr>
+        <p:txBody>
+          <a:bodyPr wrap="square" lIns="0" tIns="0" rIns="0" bIns="0" rtlCol="0" anchor="ctr"/>
+          <a:lstStyle/>
+          <a:p>
+            <a:pPr algn="ctr" indent="0" marL="0">
+              <a:buNone/>
+            </a:pPr>
+            <a:r>
+              <a:rPr lang="en-US" sz="1000" dirty="0">
+                <a:solidFill>
+                  <a:srgbClr val="CFE6D6"/>
+                </a:solidFill>
+                <a:latin typeface="Calibri" pitchFamily="34" charset="0"/>
+                <a:ea typeface="Calibri" pitchFamily="34" charset="-122"/>
+                <a:cs typeface="Calibri" pitchFamily="34" charset="-120"/>
+              </a:rPr>
+              <a:t>Google · API</a:t>
+            </a:r>
+            <a:endParaRPr lang="en-US" sz="1000" dirty="0"/>
           </a:p>
         </p:txBody>
       </p:sp>
